--- a/cheatsheet/clcharts.pptx
+++ b/cheatsheet/clcharts.pptx
@@ -2216,7 +2216,7 @@
           </a:ln>
           <a:extLst>
             <a:ext uri="{C572A759-6A51-4108-AA02-DFA0A04FC94B}">
-              <ma14:wrappingTextBoxFlag xmlns:ma14="http://schemas.microsoft.com/office/mac/drawingml/2011/main" xmlns:a14="http://schemas.microsoft.com/office/drawing/2010/main" xmlns:m="http://schemas.openxmlformats.org/officeDocument/2006/math" xmlns="" val="1"/>
+              <ma14:wrappingTextBoxFlag xmlns="" xmlns:m="http://schemas.openxmlformats.org/officeDocument/2006/math" xmlns:a14="http://schemas.microsoft.com/office/drawing/2010/main" xmlns:ma14="http://schemas.microsoft.com/office/mac/drawingml/2011/main" val="1"/>
             </a:ext>
           </a:extLst>
         </p:spPr>
@@ -2255,7 +2255,7 @@
           </a:ln>
           <a:extLst>
             <a:ext uri="{C572A759-6A51-4108-AA02-DFA0A04FC94B}">
-              <ma14:wrappingTextBoxFlag xmlns:ma14="http://schemas.microsoft.com/office/mac/drawingml/2011/main" xmlns:a14="http://schemas.microsoft.com/office/drawing/2010/main" xmlns:m="http://schemas.openxmlformats.org/officeDocument/2006/math" xmlns="" val="1"/>
+              <ma14:wrappingTextBoxFlag xmlns="" xmlns:m="http://schemas.openxmlformats.org/officeDocument/2006/math" xmlns:a14="http://schemas.microsoft.com/office/drawing/2010/main" xmlns:ma14="http://schemas.microsoft.com/office/mac/drawingml/2011/main" val="1"/>
             </a:ext>
           </a:extLst>
         </p:spPr>
@@ -3251,8 +3251,8 @@
         </p:nvSpPr>
         <p:spPr>
           <a:xfrm>
-            <a:off x="165185" y="1521631"/>
-            <a:ext cx="4346831" cy="8605112"/>
+            <a:off x="165185" y="1521632"/>
+            <a:ext cx="4375182" cy="1790678"/>
           </a:xfrm>
           <a:prstGeom prst="rect">
             <a:avLst/>
@@ -3335,7 +3335,7 @@
           </a:ln>
           <a:extLst>
             <a:ext uri="{C572A759-6A51-4108-AA02-DFA0A04FC94B}">
-              <ma14:wrappingTextBoxFlag xmlns:ma14="http://schemas.microsoft.com/office/mac/drawingml/2011/main" xmlns:a14="http://schemas.microsoft.com/office/drawing/2010/main" xmlns:m="http://schemas.openxmlformats.org/officeDocument/2006/math" xmlns="" val="1"/>
+              <ma14:wrappingTextBoxFlag xmlns="" xmlns:m="http://schemas.openxmlformats.org/officeDocument/2006/math" xmlns:a14="http://schemas.microsoft.com/office/drawing/2010/main" xmlns:ma14="http://schemas.microsoft.com/office/mac/drawingml/2011/main" val="1"/>
             </a:ext>
           </a:extLst>
         </p:spPr>
@@ -3384,7 +3384,7 @@
           </a:ln>
           <a:extLst>
             <a:ext uri="{C572A759-6A51-4108-AA02-DFA0A04FC94B}">
-              <ma14:wrappingTextBoxFlag xmlns:ma14="http://schemas.microsoft.com/office/mac/drawingml/2011/main" xmlns:a14="http://schemas.microsoft.com/office/drawing/2010/main" xmlns:m="http://schemas.openxmlformats.org/officeDocument/2006/math" xmlns="" val="1"/>
+              <ma14:wrappingTextBoxFlag xmlns="" xmlns:m="http://schemas.openxmlformats.org/officeDocument/2006/math" xmlns:a14="http://schemas.microsoft.com/office/drawing/2010/main" xmlns:ma14="http://schemas.microsoft.com/office/mac/drawingml/2011/main" val="1"/>
             </a:ext>
           </a:extLst>
         </p:spPr>
@@ -3528,7 +3528,7 @@
           </a:ln>
           <a:extLst>
             <a:ext uri="{C572A759-6A51-4108-AA02-DFA0A04FC94B}">
-              <ma14:wrappingTextBoxFlag xmlns:ma14="http://schemas.microsoft.com/office/mac/drawingml/2011/main" xmlns:a14="http://schemas.microsoft.com/office/drawing/2010/main" xmlns:m="http://schemas.openxmlformats.org/officeDocument/2006/math" xmlns="" val="1"/>
+              <ma14:wrappingTextBoxFlag xmlns="" xmlns:m="http://schemas.openxmlformats.org/officeDocument/2006/math" xmlns:a14="http://schemas.microsoft.com/office/drawing/2010/main" xmlns:ma14="http://schemas.microsoft.com/office/mac/drawingml/2011/main" val="1"/>
             </a:ext>
           </a:extLst>
         </p:spPr>
@@ -3632,7 +3632,7 @@
           </a:ln>
           <a:extLst>
             <a:ext uri="{C572A759-6A51-4108-AA02-DFA0A04FC94B}">
-              <ma14:wrappingTextBoxFlag xmlns:ma14="http://schemas.microsoft.com/office/mac/drawingml/2011/main" xmlns:a14="http://schemas.microsoft.com/office/drawing/2010/main" xmlns:m="http://schemas.openxmlformats.org/officeDocument/2006/math" xmlns="" val="1"/>
+              <ma14:wrappingTextBoxFlag xmlns="" xmlns:m="http://schemas.openxmlformats.org/officeDocument/2006/math" xmlns:a14="http://schemas.microsoft.com/office/drawing/2010/main" xmlns:ma14="http://schemas.microsoft.com/office/mac/drawingml/2011/main" val="1"/>
             </a:ext>
           </a:extLst>
         </p:spPr>
@@ -3762,7 +3762,7 @@
           </a:ln>
           <a:extLst>
             <a:ext uri="{C572A759-6A51-4108-AA02-DFA0A04FC94B}">
-              <ma14:wrappingTextBoxFlag xmlns:ma14="http://schemas.microsoft.com/office/mac/drawingml/2011/main" xmlns:a14="http://schemas.microsoft.com/office/drawing/2010/main" xmlns:m="http://schemas.openxmlformats.org/officeDocument/2006/math" xmlns="" val="1"/>
+              <ma14:wrappingTextBoxFlag xmlns="" xmlns:m="http://schemas.openxmlformats.org/officeDocument/2006/math" xmlns:a14="http://schemas.microsoft.com/office/drawing/2010/main" xmlns:ma14="http://schemas.microsoft.com/office/mac/drawingml/2011/main" val="1"/>
             </a:ext>
           </a:extLst>
         </p:spPr>
@@ -3888,1113 +3888,6 @@
       </p:sp>
       <p:sp>
         <p:nvSpPr>
-          <p:cNvPr id="336" name="Use visualizations to explain concepts quickly and concisely."/>
-          <p:cNvSpPr txBox="1"/>
-          <p:nvPr/>
-        </p:nvSpPr>
-        <p:spPr>
-          <a:xfrm>
-            <a:off x="293993" y="3416012"/>
-            <a:ext cx="2007151" cy="6214355"/>
-          </a:xfrm>
-          <a:prstGeom prst="rect">
-            <a:avLst/>
-          </a:prstGeom>
-          <a:ln w="12700">
-            <a:miter lim="400000"/>
-          </a:ln>
-          <a:extLst>
-            <a:ext uri="{C572A759-6A51-4108-AA02-DFA0A04FC94B}">
-              <ma14:wrappingTextBoxFlag xmlns:ma14="http://schemas.microsoft.com/office/mac/drawingml/2011/main" xmlns:a14="http://schemas.microsoft.com/office/drawing/2010/main" xmlns:m="http://schemas.openxmlformats.org/officeDocument/2006/math" xmlns="" val="1"/>
-            </a:ext>
-          </a:extLst>
-        </p:spPr>
-        <p:txBody>
-          <a:bodyPr lIns="0" tIns="0" rIns="0" bIns="0">
-            <a:normAutofit/>
-          </a:bodyPr>
-          <a:lstStyle/>
-          <a:p>
-            <a:pPr>
-              <a:lnSpc>
-                <a:spcPct val="90000"/>
-              </a:lnSpc>
-              <a:spcBef>
-                <a:spcPts val="0"/>
-              </a:spcBef>
-              <a:buClr>
-                <a:srgbClr val="000000"/>
-              </a:buClr>
-              <a:buSzPct val="100000"/>
-              <a:defRPr b="0">
-                <a:solidFill>
-                  <a:srgbClr val="000000"/>
-                </a:solidFill>
-              </a:defRPr>
-            </a:pPr>
-            <a:r>
-              <a:rPr lang="en-GB" dirty="0">
-                <a:latin typeface="National-LFSN Book" panose="020B0504030502020203" pitchFamily="34" charset="0"/>
-              </a:rPr>
-              <a:t>To create a chart we use:</a:t>
-            </a:r>
-          </a:p>
-          <a:p>
-            <a:pPr>
-              <a:lnSpc>
-                <a:spcPct val="90000"/>
-              </a:lnSpc>
-              <a:spcBef>
-                <a:spcPts val="0"/>
-              </a:spcBef>
-              <a:buClr>
-                <a:srgbClr val="000000"/>
-              </a:buClr>
-              <a:buSzPct val="100000"/>
-              <a:defRPr b="0">
-                <a:solidFill>
-                  <a:srgbClr val="000000"/>
-                </a:solidFill>
-              </a:defRPr>
-            </a:pPr>
-            <a:endParaRPr lang="en-GB" dirty="0">
-              <a:latin typeface="National-LFSN Book" panose="020B0504030502020203" pitchFamily="34" charset="0"/>
-            </a:endParaRPr>
-          </a:p>
-          <a:p>
-            <a:pPr>
-              <a:lnSpc>
-                <a:spcPct val="90000"/>
-              </a:lnSpc>
-              <a:spcBef>
-                <a:spcPts val="0"/>
-              </a:spcBef>
-              <a:buClr>
-                <a:srgbClr val="000000"/>
-              </a:buClr>
-              <a:buSzPct val="100000"/>
-              <a:defRPr b="0">
-                <a:solidFill>
-                  <a:srgbClr val="000000"/>
-                </a:solidFill>
-              </a:defRPr>
-            </a:pPr>
-            <a:r>
-              <a:rPr lang="en-GB" dirty="0" err="1">
-                <a:latin typeface="National-LFSN Semibd" panose="020B0704030502020203" pitchFamily="34" charset="0"/>
-              </a:rPr>
-              <a:t>ggplot</a:t>
-            </a:r>
-            <a:r>
-              <a:rPr lang="en-GB" dirty="0">
-                <a:latin typeface="National-LFSN Book" panose="020B0504030502020203" pitchFamily="34" charset="0"/>
-              </a:rPr>
-              <a:t> (</a:t>
-            </a:r>
-            <a:r>
-              <a:rPr lang="en-GB" dirty="0">
-                <a:latin typeface="National-LFSN Semibd" panose="020B0704030502020203" pitchFamily="34" charset="0"/>
-              </a:rPr>
-              <a:t>data </a:t>
-            </a:r>
-            <a:r>
-              <a:rPr lang="en-GB" dirty="0">
-                <a:latin typeface="National-LFSN Book" panose="020B0504030502020203" pitchFamily="34" charset="0"/>
-              </a:rPr>
-              <a:t>= </a:t>
-            </a:r>
-            <a:r>
-              <a:rPr lang="en-GB" dirty="0">
-                <a:latin typeface="National-LFSN Semibd" panose="020B0704030502020203" pitchFamily="34" charset="0"/>
-              </a:rPr>
-              <a:t>&lt;DATA&gt;</a:t>
-            </a:r>
-            <a:r>
-              <a:rPr lang="en-GB" dirty="0">
-                <a:latin typeface="National-LFSN Book" panose="020B0504030502020203" pitchFamily="34" charset="0"/>
-              </a:rPr>
-              <a:t>) +</a:t>
-            </a:r>
-          </a:p>
-          <a:p>
-            <a:pPr>
-              <a:lnSpc>
-                <a:spcPct val="90000"/>
-              </a:lnSpc>
-              <a:spcBef>
-                <a:spcPts val="0"/>
-              </a:spcBef>
-              <a:buClr>
-                <a:srgbClr val="000000"/>
-              </a:buClr>
-              <a:buSzPct val="100000"/>
-              <a:defRPr b="0">
-                <a:solidFill>
-                  <a:srgbClr val="000000"/>
-                </a:solidFill>
-              </a:defRPr>
-            </a:pPr>
-            <a:endParaRPr lang="en-GB" dirty="0">
-              <a:latin typeface="National-LFSN Book" panose="020B0504030502020203" pitchFamily="34" charset="0"/>
-            </a:endParaRPr>
-          </a:p>
-          <a:p>
-            <a:pPr>
-              <a:lnSpc>
-                <a:spcPct val="90000"/>
-              </a:lnSpc>
-              <a:spcBef>
-                <a:spcPts val="0"/>
-              </a:spcBef>
-              <a:buClr>
-                <a:srgbClr val="000000"/>
-              </a:buClr>
-              <a:buSzPct val="100000"/>
-              <a:defRPr b="0">
-                <a:solidFill>
-                  <a:srgbClr val="000000"/>
-                </a:solidFill>
-              </a:defRPr>
-            </a:pPr>
-            <a:r>
-              <a:rPr lang="en-GB" dirty="0">
-                <a:latin typeface="National-LFSN Semibd" panose="020B0704030502020203" pitchFamily="34" charset="0"/>
-              </a:rPr>
-              <a:t>&lt;GEOM FUNCTION&gt;</a:t>
-            </a:r>
-            <a:r>
-              <a:rPr lang="en-GB" dirty="0">
-                <a:latin typeface="National-LFSN Book" panose="020B0504030502020203" pitchFamily="34" charset="0"/>
-              </a:rPr>
-              <a:t>(</a:t>
-            </a:r>
-          </a:p>
-          <a:p>
-            <a:pPr>
-              <a:lnSpc>
-                <a:spcPct val="90000"/>
-              </a:lnSpc>
-              <a:spcBef>
-                <a:spcPts val="0"/>
-              </a:spcBef>
-              <a:buClr>
-                <a:srgbClr val="000000"/>
-              </a:buClr>
-              <a:buSzPct val="100000"/>
-              <a:defRPr b="0">
-                <a:solidFill>
-                  <a:srgbClr val="000000"/>
-                </a:solidFill>
-              </a:defRPr>
-            </a:pPr>
-            <a:r>
-              <a:rPr lang="en-GB" dirty="0">
-                <a:latin typeface="National-LFSN Semibd" panose="020B0704030502020203" pitchFamily="34" charset="0"/>
-              </a:rPr>
-              <a:t>   mapping</a:t>
-            </a:r>
-            <a:r>
-              <a:rPr lang="en-GB" dirty="0">
-                <a:latin typeface="National-LFSN Book" panose="020B0504030502020203" pitchFamily="34" charset="0"/>
-              </a:rPr>
-              <a:t> = </a:t>
-            </a:r>
-            <a:r>
-              <a:rPr lang="en-GB" dirty="0" err="1">
-                <a:latin typeface="National-LFSN Book" panose="020B0504030502020203" pitchFamily="34" charset="0"/>
-              </a:rPr>
-              <a:t>aes</a:t>
-            </a:r>
-            <a:r>
-              <a:rPr lang="en-GB" dirty="0">
-                <a:latin typeface="National-LFSN Book" panose="020B0504030502020203" pitchFamily="34" charset="0"/>
-              </a:rPr>
-              <a:t>(&lt;</a:t>
-            </a:r>
-            <a:r>
-              <a:rPr lang="en-GB" dirty="0">
-                <a:latin typeface="National-LFSN Semibd" panose="020B0704030502020203" pitchFamily="34" charset="0"/>
-              </a:rPr>
-              <a:t>MAPPINGS</a:t>
-            </a:r>
-            <a:r>
-              <a:rPr lang="en-GB" dirty="0">
-                <a:latin typeface="National-LFSN Book" panose="020B0504030502020203" pitchFamily="34" charset="0"/>
-              </a:rPr>
-              <a:t>&gt;),</a:t>
-            </a:r>
-          </a:p>
-          <a:p>
-            <a:pPr>
-              <a:lnSpc>
-                <a:spcPct val="90000"/>
-              </a:lnSpc>
-              <a:spcBef>
-                <a:spcPts val="0"/>
-              </a:spcBef>
-              <a:buClr>
-                <a:srgbClr val="000000"/>
-              </a:buClr>
-              <a:buSzPct val="100000"/>
-              <a:defRPr b="0">
-                <a:solidFill>
-                  <a:srgbClr val="000000"/>
-                </a:solidFill>
-              </a:defRPr>
-            </a:pPr>
-            <a:r>
-              <a:rPr lang="en-GB" dirty="0">
-                <a:latin typeface="National-LFSN Book" panose="020B0504030502020203" pitchFamily="34" charset="0"/>
-              </a:rPr>
-              <a:t>   stat = &lt;STAT&gt;,</a:t>
-            </a:r>
-          </a:p>
-          <a:p>
-            <a:pPr>
-              <a:lnSpc>
-                <a:spcPct val="90000"/>
-              </a:lnSpc>
-              <a:spcBef>
-                <a:spcPts val="0"/>
-              </a:spcBef>
-              <a:buClr>
-                <a:srgbClr val="000000"/>
-              </a:buClr>
-              <a:buSzPct val="100000"/>
-              <a:defRPr b="0">
-                <a:solidFill>
-                  <a:srgbClr val="000000"/>
-                </a:solidFill>
-              </a:defRPr>
-            </a:pPr>
-            <a:r>
-              <a:rPr lang="en-GB" dirty="0">
-                <a:latin typeface="National-LFSN Book" panose="020B0504030502020203" pitchFamily="34" charset="0"/>
-              </a:rPr>
-              <a:t>   position = &lt;POSITION&gt;</a:t>
-            </a:r>
-          </a:p>
-          <a:p>
-            <a:pPr>
-              <a:lnSpc>
-                <a:spcPct val="90000"/>
-              </a:lnSpc>
-              <a:spcBef>
-                <a:spcPts val="0"/>
-              </a:spcBef>
-              <a:buClr>
-                <a:srgbClr val="000000"/>
-              </a:buClr>
-              <a:buSzPct val="100000"/>
-              <a:defRPr b="0">
-                <a:solidFill>
-                  <a:srgbClr val="000000"/>
-                </a:solidFill>
-              </a:defRPr>
-            </a:pPr>
-            <a:r>
-              <a:rPr lang="en-GB" dirty="0">
-                <a:latin typeface="National-LFSN Book" panose="020B0504030502020203" pitchFamily="34" charset="0"/>
-              </a:rPr>
-              <a:t>) +</a:t>
-            </a:r>
-          </a:p>
-          <a:p>
-            <a:pPr>
-              <a:lnSpc>
-                <a:spcPct val="90000"/>
-              </a:lnSpc>
-              <a:spcBef>
-                <a:spcPts val="0"/>
-              </a:spcBef>
-              <a:buClr>
-                <a:srgbClr val="000000"/>
-              </a:buClr>
-              <a:buSzPct val="100000"/>
-              <a:defRPr b="0">
-                <a:solidFill>
-                  <a:srgbClr val="000000"/>
-                </a:solidFill>
-              </a:defRPr>
-            </a:pPr>
-            <a:endParaRPr lang="en-GB" dirty="0">
-              <a:latin typeface="National-LFSN Book" panose="020B0504030502020203" pitchFamily="34" charset="0"/>
-            </a:endParaRPr>
-          </a:p>
-          <a:p>
-            <a:pPr>
-              <a:lnSpc>
-                <a:spcPct val="90000"/>
-              </a:lnSpc>
-              <a:spcBef>
-                <a:spcPts val="0"/>
-              </a:spcBef>
-              <a:buClr>
-                <a:srgbClr val="000000"/>
-              </a:buClr>
-              <a:buSzPct val="100000"/>
-              <a:defRPr b="0">
-                <a:solidFill>
-                  <a:srgbClr val="000000"/>
-                </a:solidFill>
-              </a:defRPr>
-            </a:pPr>
-            <a:endParaRPr lang="en-GB" dirty="0">
-              <a:latin typeface="National-LFSN Book" panose="020B0504030502020203" pitchFamily="34" charset="0"/>
-            </a:endParaRPr>
-          </a:p>
-          <a:p>
-            <a:pPr>
-              <a:lnSpc>
-                <a:spcPct val="90000"/>
-              </a:lnSpc>
-              <a:spcBef>
-                <a:spcPts val="0"/>
-              </a:spcBef>
-              <a:buClr>
-                <a:srgbClr val="000000"/>
-              </a:buClr>
-              <a:buSzPct val="100000"/>
-              <a:defRPr b="0">
-                <a:solidFill>
-                  <a:srgbClr val="000000"/>
-                </a:solidFill>
-              </a:defRPr>
-            </a:pPr>
-            <a:endParaRPr lang="en-GB" dirty="0">
-              <a:latin typeface="National-LFSN Book" panose="020B0504030502020203" pitchFamily="34" charset="0"/>
-            </a:endParaRPr>
-          </a:p>
-          <a:p>
-            <a:pPr>
-              <a:lnSpc>
-                <a:spcPct val="90000"/>
-              </a:lnSpc>
-              <a:spcBef>
-                <a:spcPts val="0"/>
-              </a:spcBef>
-              <a:buClr>
-                <a:srgbClr val="000000"/>
-              </a:buClr>
-              <a:buSzPct val="100000"/>
-              <a:defRPr b="0">
-                <a:solidFill>
-                  <a:srgbClr val="000000"/>
-                </a:solidFill>
-              </a:defRPr>
-            </a:pPr>
-            <a:r>
-              <a:rPr lang="en-GB" dirty="0">
-                <a:latin typeface="National-LFSN Book" panose="020B0504030502020203" pitchFamily="34" charset="0"/>
-              </a:rPr>
-              <a:t>&lt;COORDINATE FUNCTION&gt; + </a:t>
-            </a:r>
-          </a:p>
-          <a:p>
-            <a:pPr>
-              <a:lnSpc>
-                <a:spcPct val="90000"/>
-              </a:lnSpc>
-              <a:spcBef>
-                <a:spcPts val="0"/>
-              </a:spcBef>
-              <a:buClr>
-                <a:srgbClr val="000000"/>
-              </a:buClr>
-              <a:buSzPct val="100000"/>
-              <a:defRPr b="0">
-                <a:solidFill>
-                  <a:srgbClr val="000000"/>
-                </a:solidFill>
-              </a:defRPr>
-            </a:pPr>
-            <a:endParaRPr lang="en-GB" dirty="0">
-              <a:latin typeface="National-LFSN Book" panose="020B0504030502020203" pitchFamily="34" charset="0"/>
-            </a:endParaRPr>
-          </a:p>
-          <a:p>
-            <a:pPr>
-              <a:lnSpc>
-                <a:spcPct val="90000"/>
-              </a:lnSpc>
-              <a:spcBef>
-                <a:spcPts val="0"/>
-              </a:spcBef>
-              <a:buClr>
-                <a:srgbClr val="000000"/>
-              </a:buClr>
-              <a:buSzPct val="100000"/>
-              <a:defRPr b="0">
-                <a:solidFill>
-                  <a:srgbClr val="000000"/>
-                </a:solidFill>
-              </a:defRPr>
-            </a:pPr>
-            <a:endParaRPr lang="en-GB" dirty="0">
-              <a:latin typeface="National-LFSN Book" panose="020B0504030502020203" pitchFamily="34" charset="0"/>
-            </a:endParaRPr>
-          </a:p>
-          <a:p>
-            <a:pPr>
-              <a:lnSpc>
-                <a:spcPct val="90000"/>
-              </a:lnSpc>
-              <a:spcBef>
-                <a:spcPts val="0"/>
-              </a:spcBef>
-              <a:buClr>
-                <a:srgbClr val="000000"/>
-              </a:buClr>
-              <a:buSzPct val="100000"/>
-              <a:defRPr b="0">
-                <a:solidFill>
-                  <a:srgbClr val="000000"/>
-                </a:solidFill>
-              </a:defRPr>
-            </a:pPr>
-            <a:endParaRPr lang="en-GB" dirty="0">
-              <a:latin typeface="National-LFSN Book" panose="020B0504030502020203" pitchFamily="34" charset="0"/>
-            </a:endParaRPr>
-          </a:p>
-          <a:p>
-            <a:pPr>
-              <a:lnSpc>
-                <a:spcPct val="90000"/>
-              </a:lnSpc>
-              <a:spcBef>
-                <a:spcPts val="0"/>
-              </a:spcBef>
-              <a:buClr>
-                <a:srgbClr val="000000"/>
-              </a:buClr>
-              <a:buSzPct val="100000"/>
-              <a:defRPr b="0">
-                <a:solidFill>
-                  <a:srgbClr val="000000"/>
-                </a:solidFill>
-              </a:defRPr>
-            </a:pPr>
-            <a:endParaRPr lang="en-GB" dirty="0">
-              <a:latin typeface="National-LFSN Book" panose="020B0504030502020203" pitchFamily="34" charset="0"/>
-            </a:endParaRPr>
-          </a:p>
-          <a:p>
-            <a:pPr>
-              <a:lnSpc>
-                <a:spcPct val="90000"/>
-              </a:lnSpc>
-              <a:spcBef>
-                <a:spcPts val="0"/>
-              </a:spcBef>
-              <a:buClr>
-                <a:srgbClr val="000000"/>
-              </a:buClr>
-              <a:buSzPct val="100000"/>
-              <a:defRPr b="0">
-                <a:solidFill>
-                  <a:srgbClr val="000000"/>
-                </a:solidFill>
-              </a:defRPr>
-            </a:pPr>
-            <a:r>
-              <a:rPr lang="en-GB" dirty="0">
-                <a:latin typeface="National-LFSN Book" panose="020B0504030502020203" pitchFamily="34" charset="0"/>
-              </a:rPr>
-              <a:t>&lt;FACET FUNCTION&gt; + </a:t>
-            </a:r>
-          </a:p>
-          <a:p>
-            <a:pPr>
-              <a:lnSpc>
-                <a:spcPct val="90000"/>
-              </a:lnSpc>
-              <a:spcBef>
-                <a:spcPts val="0"/>
-              </a:spcBef>
-              <a:buClr>
-                <a:srgbClr val="000000"/>
-              </a:buClr>
-              <a:buSzPct val="100000"/>
-              <a:defRPr b="0">
-                <a:solidFill>
-                  <a:srgbClr val="000000"/>
-                </a:solidFill>
-              </a:defRPr>
-            </a:pPr>
-            <a:endParaRPr lang="en-GB" dirty="0">
-              <a:latin typeface="National-LFSN Book" panose="020B0504030502020203" pitchFamily="34" charset="0"/>
-            </a:endParaRPr>
-          </a:p>
-          <a:p>
-            <a:pPr>
-              <a:lnSpc>
-                <a:spcPct val="90000"/>
-              </a:lnSpc>
-              <a:spcBef>
-                <a:spcPts val="0"/>
-              </a:spcBef>
-              <a:buClr>
-                <a:srgbClr val="000000"/>
-              </a:buClr>
-              <a:buSzPct val="100000"/>
-              <a:defRPr b="0">
-                <a:solidFill>
-                  <a:srgbClr val="000000"/>
-                </a:solidFill>
-              </a:defRPr>
-            </a:pPr>
-            <a:endParaRPr lang="en-GB" dirty="0">
-              <a:latin typeface="National-LFSN Book" panose="020B0504030502020203" pitchFamily="34" charset="0"/>
-            </a:endParaRPr>
-          </a:p>
-          <a:p>
-            <a:pPr>
-              <a:lnSpc>
-                <a:spcPct val="90000"/>
-              </a:lnSpc>
-              <a:spcBef>
-                <a:spcPts val="0"/>
-              </a:spcBef>
-              <a:buClr>
-                <a:srgbClr val="000000"/>
-              </a:buClr>
-              <a:buSzPct val="100000"/>
-              <a:defRPr b="0">
-                <a:solidFill>
-                  <a:srgbClr val="000000"/>
-                </a:solidFill>
-              </a:defRPr>
-            </a:pPr>
-            <a:endParaRPr lang="en-GB" dirty="0">
-              <a:latin typeface="National-LFSN Book" panose="020B0504030502020203" pitchFamily="34" charset="0"/>
-            </a:endParaRPr>
-          </a:p>
-          <a:p>
-            <a:pPr>
-              <a:lnSpc>
-                <a:spcPct val="90000"/>
-              </a:lnSpc>
-              <a:spcBef>
-                <a:spcPts val="0"/>
-              </a:spcBef>
-              <a:buClr>
-                <a:srgbClr val="000000"/>
-              </a:buClr>
-              <a:buSzPct val="100000"/>
-              <a:defRPr b="0">
-                <a:solidFill>
-                  <a:srgbClr val="000000"/>
-                </a:solidFill>
-              </a:defRPr>
-            </a:pPr>
-            <a:r>
-              <a:rPr lang="en-GB" dirty="0">
-                <a:latin typeface="National-LFSN Book" panose="020B0504030502020203" pitchFamily="34" charset="0"/>
-              </a:rPr>
-              <a:t>&lt;SCALE FUNCTION&gt; +</a:t>
-            </a:r>
-          </a:p>
-          <a:p>
-            <a:pPr>
-              <a:lnSpc>
-                <a:spcPct val="90000"/>
-              </a:lnSpc>
-              <a:spcBef>
-                <a:spcPts val="0"/>
-              </a:spcBef>
-              <a:buClr>
-                <a:srgbClr val="000000"/>
-              </a:buClr>
-              <a:buSzPct val="100000"/>
-              <a:defRPr b="0">
-                <a:solidFill>
-                  <a:srgbClr val="000000"/>
-                </a:solidFill>
-              </a:defRPr>
-            </a:pPr>
-            <a:endParaRPr lang="en-GB" dirty="0">
-              <a:latin typeface="National-LFSN Book" panose="020B0504030502020203" pitchFamily="34" charset="0"/>
-            </a:endParaRPr>
-          </a:p>
-          <a:p>
-            <a:pPr>
-              <a:lnSpc>
-                <a:spcPct val="90000"/>
-              </a:lnSpc>
-              <a:spcBef>
-                <a:spcPts val="0"/>
-              </a:spcBef>
-              <a:buClr>
-                <a:srgbClr val="000000"/>
-              </a:buClr>
-              <a:buSzPct val="100000"/>
-              <a:defRPr b="0">
-                <a:solidFill>
-                  <a:srgbClr val="000000"/>
-                </a:solidFill>
-              </a:defRPr>
-            </a:pPr>
-            <a:r>
-              <a:rPr lang="en-GB" b="0" dirty="0" err="1">
-                <a:latin typeface="National-LFSN Semibd" panose="020B0704030502020203" pitchFamily="34" charset="0"/>
-              </a:rPr>
-              <a:t>theme_commonslib</a:t>
-            </a:r>
-            <a:r>
-              <a:rPr lang="en-GB" b="0" dirty="0">
-                <a:latin typeface="National-LFSN Semibd" panose="020B0704030502020203" pitchFamily="34" charset="0"/>
-              </a:rPr>
-              <a:t>() +</a:t>
-            </a:r>
-          </a:p>
-          <a:p>
-            <a:pPr>
-              <a:lnSpc>
-                <a:spcPct val="90000"/>
-              </a:lnSpc>
-              <a:spcBef>
-                <a:spcPts val="0"/>
-              </a:spcBef>
-              <a:buClr>
-                <a:srgbClr val="000000"/>
-              </a:buClr>
-              <a:buSzPct val="100000"/>
-              <a:defRPr b="0">
-                <a:solidFill>
-                  <a:srgbClr val="000000"/>
-                </a:solidFill>
-              </a:defRPr>
-            </a:pPr>
-            <a:endParaRPr lang="en-GB" b="0" dirty="0">
-              <a:latin typeface="National-LFSN Semibd" panose="020B0704030502020203" pitchFamily="34" charset="0"/>
-            </a:endParaRPr>
-          </a:p>
-          <a:p>
-            <a:pPr>
-              <a:lnSpc>
-                <a:spcPct val="90000"/>
-              </a:lnSpc>
-              <a:spcBef>
-                <a:spcPts val="0"/>
-              </a:spcBef>
-              <a:buClr>
-                <a:srgbClr val="000000"/>
-              </a:buClr>
-              <a:buSzPct val="100000"/>
-              <a:defRPr b="0">
-                <a:solidFill>
-                  <a:srgbClr val="000000"/>
-                </a:solidFill>
-              </a:defRPr>
-            </a:pPr>
-            <a:r>
-              <a:rPr lang="en-GB" b="0" dirty="0">
-                <a:latin typeface="National-LFSN Semibd" panose="020B0704030502020203" pitchFamily="34" charset="0"/>
-              </a:rPr>
-              <a:t>labs(</a:t>
-            </a:r>
-          </a:p>
-          <a:p>
-            <a:pPr>
-              <a:lnSpc>
-                <a:spcPct val="90000"/>
-              </a:lnSpc>
-              <a:spcBef>
-                <a:spcPts val="0"/>
-              </a:spcBef>
-              <a:buClr>
-                <a:srgbClr val="000000"/>
-              </a:buClr>
-              <a:buSzPct val="100000"/>
-              <a:defRPr b="0">
-                <a:solidFill>
-                  <a:srgbClr val="000000"/>
-                </a:solidFill>
-              </a:defRPr>
-            </a:pPr>
-            <a:r>
-              <a:rPr lang="en-GB" b="0" dirty="0">
-                <a:latin typeface="National-LFSN Semibd" panose="020B0704030502020203" pitchFamily="34" charset="0"/>
-              </a:rPr>
-              <a:t>  x = &lt;x label&gt;,</a:t>
-            </a:r>
-          </a:p>
-          <a:p>
-            <a:pPr>
-              <a:lnSpc>
-                <a:spcPct val="90000"/>
-              </a:lnSpc>
-              <a:spcBef>
-                <a:spcPts val="0"/>
-              </a:spcBef>
-              <a:buClr>
-                <a:srgbClr val="000000"/>
-              </a:buClr>
-              <a:buSzPct val="100000"/>
-              <a:defRPr b="0">
-                <a:solidFill>
-                  <a:srgbClr val="000000"/>
-                </a:solidFill>
-              </a:defRPr>
-            </a:pPr>
-            <a:r>
-              <a:rPr lang="en-GB" b="0" dirty="0">
-                <a:latin typeface="National-LFSN Semibd" panose="020B0704030502020203" pitchFamily="34" charset="0"/>
-              </a:rPr>
-              <a:t>  y = &lt;y label</a:t>
-            </a:r>
-          </a:p>
-          <a:p>
-            <a:pPr>
-              <a:lnSpc>
-                <a:spcPct val="90000"/>
-              </a:lnSpc>
-              <a:spcBef>
-                <a:spcPts val="0"/>
-              </a:spcBef>
-              <a:buClr>
-                <a:srgbClr val="000000"/>
-              </a:buClr>
-              <a:buSzPct val="100000"/>
-              <a:defRPr b="0">
-                <a:solidFill>
-                  <a:srgbClr val="000000"/>
-                </a:solidFill>
-              </a:defRPr>
-            </a:pPr>
-            <a:r>
-              <a:rPr lang="en-GB" b="0" dirty="0">
-                <a:latin typeface="National-LFSN Semibd" panose="020B0704030502020203" pitchFamily="34" charset="0"/>
-              </a:rPr>
-              <a:t>) +</a:t>
-            </a:r>
-          </a:p>
-          <a:p>
-            <a:pPr>
-              <a:lnSpc>
-                <a:spcPct val="90000"/>
-              </a:lnSpc>
-              <a:spcBef>
-                <a:spcPts val="0"/>
-              </a:spcBef>
-              <a:buClr>
-                <a:srgbClr val="000000"/>
-              </a:buClr>
-              <a:buSzPct val="100000"/>
-              <a:defRPr b="0">
-                <a:solidFill>
-                  <a:srgbClr val="000000"/>
-                </a:solidFill>
-              </a:defRPr>
-            </a:pPr>
-            <a:endParaRPr lang="en-GB" b="0" dirty="0">
-              <a:latin typeface="National-LFSN Semibd" panose="020B0704030502020203" pitchFamily="34" charset="0"/>
-            </a:endParaRPr>
-          </a:p>
-          <a:p>
-            <a:pPr>
-              <a:lnSpc>
-                <a:spcPct val="90000"/>
-              </a:lnSpc>
-              <a:spcBef>
-                <a:spcPts val="0"/>
-              </a:spcBef>
-              <a:buClr>
-                <a:srgbClr val="000000"/>
-              </a:buClr>
-              <a:buSzPct val="100000"/>
-              <a:defRPr b="0">
-                <a:solidFill>
-                  <a:srgbClr val="000000"/>
-                </a:solidFill>
-              </a:defRPr>
-            </a:pPr>
-            <a:r>
-              <a:rPr lang="en-GB" b="0" dirty="0" err="1">
-                <a:latin typeface="National-LFSN Semibd" panose="020B0704030502020203" pitchFamily="34" charset="0"/>
-              </a:rPr>
-              <a:t>add_commonslib_title</a:t>
-            </a:r>
-            <a:r>
-              <a:rPr lang="en-GB" b="0" dirty="0">
-                <a:latin typeface="National-LFSN Semibd" panose="020B0704030502020203" pitchFamily="34" charset="0"/>
-              </a:rPr>
-              <a:t>(</a:t>
-            </a:r>
-          </a:p>
-          <a:p>
-            <a:pPr>
-              <a:lnSpc>
-                <a:spcPct val="90000"/>
-              </a:lnSpc>
-              <a:spcBef>
-                <a:spcPts val="0"/>
-              </a:spcBef>
-              <a:buClr>
-                <a:srgbClr val="000000"/>
-              </a:buClr>
-              <a:buSzPct val="100000"/>
-              <a:defRPr b="0">
-                <a:solidFill>
-                  <a:srgbClr val="000000"/>
-                </a:solidFill>
-              </a:defRPr>
-            </a:pPr>
-            <a:r>
-              <a:rPr lang="en-GB" b="0" dirty="0">
-                <a:latin typeface="National-LFSN Semibd" panose="020B0704030502020203" pitchFamily="34" charset="0"/>
-              </a:rPr>
-              <a:t>  title = &lt;title&gt;,</a:t>
-            </a:r>
-          </a:p>
-          <a:p>
-            <a:pPr>
-              <a:lnSpc>
-                <a:spcPct val="90000"/>
-              </a:lnSpc>
-              <a:spcBef>
-                <a:spcPts val="0"/>
-              </a:spcBef>
-              <a:buClr>
-                <a:srgbClr val="000000"/>
-              </a:buClr>
-              <a:buSzPct val="100000"/>
-              <a:defRPr b="0">
-                <a:solidFill>
-                  <a:srgbClr val="000000"/>
-                </a:solidFill>
-              </a:defRPr>
-            </a:pPr>
-            <a:r>
-              <a:rPr lang="en-GB" b="0" dirty="0">
-                <a:latin typeface="National-LFSN Semibd" panose="020B0704030502020203" pitchFamily="34" charset="0"/>
-              </a:rPr>
-              <a:t>  subtitle = &lt;subtitle&gt;</a:t>
-            </a:r>
-          </a:p>
-          <a:p>
-            <a:pPr>
-              <a:lnSpc>
-                <a:spcPct val="90000"/>
-              </a:lnSpc>
-              <a:spcBef>
-                <a:spcPts val="0"/>
-              </a:spcBef>
-              <a:buClr>
-                <a:srgbClr val="000000"/>
-              </a:buClr>
-              <a:buSzPct val="100000"/>
-              <a:defRPr b="0">
-                <a:solidFill>
-                  <a:srgbClr val="000000"/>
-                </a:solidFill>
-              </a:defRPr>
-            </a:pPr>
-            <a:r>
-              <a:rPr lang="en-GB" b="0" dirty="0">
-                <a:latin typeface="National-LFSN Semibd" panose="020B0704030502020203" pitchFamily="34" charset="0"/>
-              </a:rPr>
-              <a:t>)</a:t>
-            </a:r>
-          </a:p>
-          <a:p>
-            <a:pPr>
-              <a:lnSpc>
-                <a:spcPct val="90000"/>
-              </a:lnSpc>
-              <a:spcBef>
-                <a:spcPts val="0"/>
-              </a:spcBef>
-              <a:buClr>
-                <a:srgbClr val="000000"/>
-              </a:buClr>
-              <a:buSzPct val="100000"/>
-              <a:defRPr b="0">
-                <a:solidFill>
-                  <a:srgbClr val="000000"/>
-                </a:solidFill>
-              </a:defRPr>
-            </a:pPr>
-            <a:endParaRPr lang="en-GB" b="0" dirty="0">
-              <a:latin typeface="National-LFSN Semibd" panose="020B0704030502020203" pitchFamily="34" charset="0"/>
-            </a:endParaRPr>
-          </a:p>
-          <a:p>
-            <a:pPr>
-              <a:lnSpc>
-                <a:spcPct val="90000"/>
-              </a:lnSpc>
-              <a:spcBef>
-                <a:spcPts val="0"/>
-              </a:spcBef>
-              <a:buClr>
-                <a:srgbClr val="000000"/>
-              </a:buClr>
-              <a:buSzPct val="100000"/>
-              <a:defRPr b="0">
-                <a:solidFill>
-                  <a:srgbClr val="000000"/>
-                </a:solidFill>
-              </a:defRPr>
-            </a:pPr>
-            <a:endParaRPr lang="en-GB" b="0" dirty="0">
-              <a:latin typeface="National-LFSN Semibd" panose="020B0704030502020203" pitchFamily="34" charset="0"/>
-            </a:endParaRPr>
-          </a:p>
-          <a:p>
-            <a:pPr>
-              <a:lnSpc>
-                <a:spcPct val="90000"/>
-              </a:lnSpc>
-              <a:spcBef>
-                <a:spcPts val="0"/>
-              </a:spcBef>
-              <a:buClr>
-                <a:srgbClr val="000000"/>
-              </a:buClr>
-              <a:buSzPct val="100000"/>
-              <a:defRPr b="0">
-                <a:solidFill>
-                  <a:srgbClr val="000000"/>
-                </a:solidFill>
-              </a:defRPr>
-            </a:pPr>
-            <a:endParaRPr lang="en-GB" b="0" dirty="0">
-              <a:latin typeface="National-LFSN Semibd" panose="020B0704030502020203" pitchFamily="34" charset="0"/>
-            </a:endParaRPr>
-          </a:p>
-          <a:p>
-            <a:pPr>
-              <a:lnSpc>
-                <a:spcPct val="90000"/>
-              </a:lnSpc>
-              <a:spcBef>
-                <a:spcPts val="0"/>
-              </a:spcBef>
-              <a:buClr>
-                <a:srgbClr val="000000"/>
-              </a:buClr>
-              <a:buSzPct val="100000"/>
-              <a:defRPr b="0">
-                <a:solidFill>
-                  <a:srgbClr val="000000"/>
-                </a:solidFill>
-              </a:defRPr>
-            </a:pPr>
-            <a:endParaRPr lang="en-GB" dirty="0">
-              <a:latin typeface="National-LFSN Book" panose="020B0504030502020203" pitchFamily="34" charset="0"/>
-            </a:endParaRPr>
-          </a:p>
-          <a:p>
-            <a:pPr>
-              <a:lnSpc>
-                <a:spcPct val="90000"/>
-              </a:lnSpc>
-              <a:spcBef>
-                <a:spcPts val="0"/>
-              </a:spcBef>
-              <a:buClr>
-                <a:srgbClr val="000000"/>
-              </a:buClr>
-              <a:buSzPct val="100000"/>
-              <a:defRPr b="0">
-                <a:solidFill>
-                  <a:srgbClr val="000000"/>
-                </a:solidFill>
-              </a:defRPr>
-            </a:pPr>
-            <a:endParaRPr lang="en-GB" dirty="0">
-              <a:latin typeface="National-LFSN Book" panose="020B0504030502020203" pitchFamily="34" charset="0"/>
-            </a:endParaRPr>
-          </a:p>
-          <a:p>
-            <a:pPr>
-              <a:lnSpc>
-                <a:spcPct val="90000"/>
-              </a:lnSpc>
-              <a:spcBef>
-                <a:spcPts val="0"/>
-              </a:spcBef>
-              <a:buClr>
-                <a:srgbClr val="000000"/>
-              </a:buClr>
-              <a:buSzPct val="100000"/>
-              <a:defRPr b="0">
-                <a:solidFill>
-                  <a:srgbClr val="000000"/>
-                </a:solidFill>
-              </a:defRPr>
-            </a:pPr>
-            <a:endParaRPr lang="en-GB" dirty="0">
-              <a:latin typeface="National-LFSN Book" panose="020B0504030502020203" pitchFamily="34" charset="0"/>
-            </a:endParaRPr>
-          </a:p>
-          <a:p>
-            <a:pPr>
-              <a:lnSpc>
-                <a:spcPct val="90000"/>
-              </a:lnSpc>
-              <a:spcBef>
-                <a:spcPts val="0"/>
-              </a:spcBef>
-              <a:buClr>
-                <a:srgbClr val="000000"/>
-              </a:buClr>
-              <a:buSzPct val="100000"/>
-              <a:defRPr b="0">
-                <a:solidFill>
-                  <a:srgbClr val="000000"/>
-                </a:solidFill>
-              </a:defRPr>
-            </a:pPr>
-            <a:endParaRPr lang="en-GB" dirty="0">
-              <a:latin typeface="National-LFSN Book" panose="020B0504030502020203" pitchFamily="34" charset="0"/>
-            </a:endParaRPr>
-          </a:p>
-          <a:p>
-            <a:pPr>
-              <a:lnSpc>
-                <a:spcPct val="90000"/>
-              </a:lnSpc>
-              <a:spcBef>
-                <a:spcPts val="0"/>
-              </a:spcBef>
-              <a:buClr>
-                <a:srgbClr val="000000"/>
-              </a:buClr>
-              <a:buSzPct val="100000"/>
-              <a:defRPr b="0">
-                <a:solidFill>
-                  <a:srgbClr val="000000"/>
-                </a:solidFill>
-              </a:defRPr>
-            </a:pPr>
-            <a:endParaRPr lang="en-GB" dirty="0"/>
-          </a:p>
-          <a:p>
-            <a:pPr>
-              <a:lnSpc>
-                <a:spcPct val="90000"/>
-              </a:lnSpc>
-              <a:spcBef>
-                <a:spcPts val="0"/>
-              </a:spcBef>
-              <a:buClr>
-                <a:srgbClr val="000000"/>
-              </a:buClr>
-              <a:buSzPct val="100000"/>
-              <a:defRPr b="0">
-                <a:solidFill>
-                  <a:srgbClr val="000000"/>
-                </a:solidFill>
-              </a:defRPr>
-            </a:pPr>
-            <a:endParaRPr dirty="0"/>
-          </a:p>
-        </p:txBody>
-      </p:sp>
-      <p:sp>
-        <p:nvSpPr>
           <p:cNvPr id="340" name="Line"/>
           <p:cNvSpPr/>
           <p:nvPr/>
@@ -5032,48 +3925,6 @@
               </a:defRPr>
             </a:pPr>
             <a:endParaRPr dirty="0"/>
-          </a:p>
-        </p:txBody>
-      </p:sp>
-      <p:sp>
-        <p:nvSpPr>
-          <p:cNvPr id="358" name="Line"/>
-          <p:cNvSpPr/>
-          <p:nvPr/>
-        </p:nvSpPr>
-        <p:spPr>
-          <a:xfrm>
-            <a:off x="4814439" y="3892550"/>
-            <a:ext cx="4309674" cy="0"/>
-          </a:xfrm>
-          <a:prstGeom prst="line">
-            <a:avLst/>
-          </a:prstGeom>
-          <a:ln w="12700">
-            <a:solidFill>
-              <a:srgbClr val="E4E4E3"/>
-            </a:solidFill>
-            <a:miter lim="400000"/>
-          </a:ln>
-        </p:spPr>
-        <p:txBody>
-          <a:bodyPr lIns="54570" tIns="54570" rIns="54570" bIns="54570" anchor="ctr"/>
-          <a:lstStyle/>
-          <a:p>
-            <a:pPr>
-              <a:lnSpc>
-                <a:spcPct val="80000"/>
-              </a:lnSpc>
-              <a:spcBef>
-                <a:spcPts val="600"/>
-              </a:spcBef>
-              <a:defRPr b="0">
-                <a:solidFill>
-                  <a:srgbClr val="000000"/>
-                </a:solidFill>
-              </a:defRPr>
-            </a:pPr>
-            <a:endParaRPr/>
           </a:p>
         </p:txBody>
       </p:sp>
@@ -5116,20 +3967,63 @@
               </a:defRPr>
             </a:pPr>
             <a:r>
-              <a:rPr lang="en-GB" dirty="0" err="1"/>
+              <a:rPr lang="en-GB" sz="1100" dirty="0"/>
+              <a:t>Get theme colours by: </a:t>
+            </a:r>
+            <a:r>
+              <a:rPr lang="en-GB" sz="1100" dirty="0" err="1"/>
               <a:t>commonslib_color</a:t>
             </a:r>
             <a:r>
-              <a:rPr lang="en-GB" dirty="0"/>
+              <a:rPr lang="en-GB" sz="1100" dirty="0"/>
               <a:t>(&lt;</a:t>
             </a:r>
             <a:r>
-              <a:rPr lang="en-GB" dirty="0" err="1"/>
+              <a:rPr lang="en-GB" sz="1100" dirty="0" err="1"/>
               <a:t>color_name</a:t>
             </a:r>
             <a:r>
-              <a:rPr lang="en-GB" dirty="0"/>
+              <a:rPr lang="en-GB" sz="1100" dirty="0"/>
+              <a:t>&gt;).</a:t>
+            </a:r>
+          </a:p>
+          <a:p>
+            <a:pPr>
+              <a:lnSpc>
+                <a:spcPct val="80000"/>
+              </a:lnSpc>
+              <a:spcBef>
+                <a:spcPts val="600"/>
+              </a:spcBef>
+              <a:defRPr b="0">
+                <a:solidFill>
+                  <a:srgbClr val="000000"/>
+                </a:solidFill>
+              </a:defRPr>
+            </a:pPr>
+            <a:r>
+              <a:rPr lang="en-GB" sz="1100" dirty="0"/>
+              <a:t>Get political party colours from </a:t>
+            </a:r>
+            <a:r>
+              <a:rPr lang="en-GB" sz="1100" b="0" dirty="0" err="1"/>
+              <a:t>commonslib_party_color</a:t>
+            </a:r>
+            <a:r>
+              <a:rPr lang="en-GB" sz="1100" b="0" dirty="0"/>
+              <a:t>(&lt;</a:t>
+            </a:r>
+            <a:r>
+              <a:rPr lang="en-GB" sz="1100" b="0" dirty="0" err="1"/>
+              <a:t>party_name</a:t>
+            </a:r>
+            <a:r>
+              <a:rPr lang="en-GB" sz="1100" b="0" dirty="0"/>
               <a:t>&gt;)</a:t>
+            </a:r>
+            <a:r>
+              <a:rPr lang="en-GB" sz="1100" dirty="0"/>
+              <a:t> </a:t>
             </a:r>
           </a:p>
           <a:p>
@@ -5147,77 +4041,6 @@
               </a:defRPr>
             </a:pPr>
             <a:endParaRPr dirty="0"/>
-          </a:p>
-        </p:txBody>
-      </p:sp>
-      <p:sp>
-        <p:nvSpPr>
-          <p:cNvPr id="361" name="To use a font awesome icon, copy and paste one from here fortawesome.github.io/Font-Awesome/cheatsheet/. Then set the text font to font awesome."/>
-          <p:cNvSpPr txBox="1"/>
-          <p:nvPr/>
-        </p:nvSpPr>
-        <p:spPr>
-          <a:xfrm>
-            <a:off x="4787900" y="5843136"/>
-            <a:ext cx="4154098" cy="642542"/>
-          </a:xfrm>
-          <a:prstGeom prst="rect">
-            <a:avLst/>
-          </a:prstGeom>
-          <a:ln w="12700">
-            <a:miter lim="400000"/>
-          </a:ln>
-          <a:extLst>
-            <a:ext uri="{C572A759-6A51-4108-AA02-DFA0A04FC94B}">
-              <ma14:wrappingTextBoxFlag xmlns:ma14="http://schemas.microsoft.com/office/mac/drawingml/2011/main" xmlns:a14="http://schemas.microsoft.com/office/drawing/2010/main" xmlns:m="http://schemas.openxmlformats.org/officeDocument/2006/math" xmlns="" val="1"/>
-            </a:ext>
-          </a:extLst>
-        </p:spPr>
-        <p:txBody>
-          <a:bodyPr lIns="54570" tIns="54570" rIns="54570" bIns="54570" anchor="ctr">
-            <a:spAutoFit/>
-          </a:bodyPr>
-          <a:lstStyle/>
-          <a:p>
-            <a:pPr>
-              <a:lnSpc>
-                <a:spcPct val="90000"/>
-              </a:lnSpc>
-              <a:spcBef>
-                <a:spcPts val="300"/>
-              </a:spcBef>
-              <a:buClr>
-                <a:schemeClr val="accent4">
-                  <a:hueOff val="384618"/>
-                  <a:satOff val="3869"/>
-                  <a:lumOff val="5802"/>
-                </a:schemeClr>
-              </a:buClr>
-              <a:defRPr b="0">
-                <a:solidFill>
-                  <a:srgbClr val="000000"/>
-                </a:solidFill>
-              </a:defRPr>
-            </a:pPr>
-            <a:r>
-              <a:t>To use a </a:t>
-            </a:r>
-            <a:r>
-              <a:rPr b="1"/>
-              <a:t>font awesome</a:t>
-            </a:r>
-            <a:r>
-              <a:t> icon, copy and paste one from here </a:t>
-            </a:r>
-            <a:r>
-              <a:rPr u="sng">
-                <a:hlinkClick r:id="rId6"/>
-              </a:rPr>
-              <a:t>fortawesome.github.io/Font-Awesome/cheatsheet/</a:t>
-            </a:r>
-            <a:r>
-              <a:t>. Then set the text font to font awesome.</a:t>
-            </a:r>
           </a:p>
         </p:txBody>
       </p:sp>
@@ -5240,7 +4063,7 @@
           </a:ln>
           <a:extLst>
             <a:ext uri="{C572A759-6A51-4108-AA02-DFA0A04FC94B}">
-              <ma14:wrappingTextBoxFlag xmlns:ma14="http://schemas.microsoft.com/office/mac/drawingml/2011/main" xmlns:a14="http://schemas.microsoft.com/office/drawing/2010/main" xmlns:m="http://schemas.openxmlformats.org/officeDocument/2006/math" xmlns="" val="1"/>
+              <ma14:wrappingTextBoxFlag xmlns="" xmlns:m="http://schemas.openxmlformats.org/officeDocument/2006/math" xmlns:a14="http://schemas.microsoft.com/office/drawing/2010/main" xmlns:ma14="http://schemas.microsoft.com/office/mac/drawingml/2011/main" val="1"/>
             </a:ext>
           </a:extLst>
         </p:spPr>
@@ -5270,100 +4093,6 @@
               </a:defRPr>
             </a:pPr>
             <a:endParaRPr dirty="0"/>
-          </a:p>
-        </p:txBody>
-      </p:sp>
-      <p:sp>
-        <p:nvSpPr>
-          <p:cNvPr id="384" name="Layout Suggestions"/>
-          <p:cNvSpPr txBox="1"/>
-          <p:nvPr/>
-        </p:nvSpPr>
-        <p:spPr>
-          <a:xfrm>
-            <a:off x="4791188" y="1537907"/>
-            <a:ext cx="1421864" cy="340029"/>
-          </a:xfrm>
-          <a:prstGeom prst="rect">
-            <a:avLst/>
-          </a:prstGeom>
-          <a:ln w="12700">
-            <a:miter lim="400000"/>
-          </a:ln>
-          <a:extLst>
-            <a:ext uri="{C572A759-6A51-4108-AA02-DFA0A04FC94B}">
-              <ma14:wrappingTextBoxFlag xmlns:ma14="http://schemas.microsoft.com/office/mac/drawingml/2011/main" xmlns:a14="http://schemas.microsoft.com/office/drawing/2010/main" xmlns:m="http://schemas.openxmlformats.org/officeDocument/2006/math" xmlns="" val="1"/>
-            </a:ext>
-          </a:extLst>
-        </p:spPr>
-        <p:txBody>
-          <a:bodyPr wrap="none" lIns="12700" tIns="12700" rIns="12700" bIns="12700" anchor="ctr">
-            <a:spAutoFit/>
-          </a:bodyPr>
-          <a:lstStyle/>
-          <a:p>
-            <a:pPr lvl="1" indent="0">
-              <a:lnSpc>
-                <a:spcPct val="80000"/>
-              </a:lnSpc>
-              <a:spcBef>
-                <a:spcPts val="0"/>
-              </a:spcBef>
-              <a:defRPr sz="2500" b="0">
-                <a:solidFill>
-                  <a:srgbClr val="628DB5"/>
-                </a:solidFill>
-              </a:defRPr>
-            </a:pPr>
-            <a:r>
-              <a:rPr lang="en-GB" dirty="0" err="1"/>
-              <a:t>Quickstart</a:t>
-            </a:r>
-            <a:endParaRPr dirty="0"/>
-          </a:p>
-        </p:txBody>
-      </p:sp>
-      <p:sp>
-        <p:nvSpPr>
-          <p:cNvPr id="385" name="Line"/>
-          <p:cNvSpPr/>
-          <p:nvPr/>
-        </p:nvSpPr>
-        <p:spPr>
-          <a:xfrm>
-            <a:off x="231073" y="8781291"/>
-            <a:ext cx="4311195" cy="1"/>
-          </a:xfrm>
-          <a:prstGeom prst="line">
-            <a:avLst/>
-          </a:prstGeom>
-          <a:ln w="12700">
-            <a:solidFill>
-              <a:srgbClr val="767C85"/>
-            </a:solidFill>
-            <a:custDash>
-              <a:ds d="100000" sp="200000"/>
-            </a:custDash>
-          </a:ln>
-        </p:spPr>
-        <p:txBody>
-          <a:bodyPr lIns="54570" tIns="54570" rIns="54570" bIns="54570" anchor="ctr"/>
-          <a:lstStyle/>
-          <a:p>
-            <a:pPr>
-              <a:lnSpc>
-                <a:spcPct val="80000"/>
-              </a:lnSpc>
-              <a:spcBef>
-                <a:spcPts val="600"/>
-              </a:spcBef>
-              <a:defRPr b="0">
-                <a:solidFill>
-                  <a:srgbClr val="000000"/>
-                </a:solidFill>
-              </a:defRPr>
-            </a:pPr>
-            <a:endParaRPr/>
           </a:p>
         </p:txBody>
       </p:sp>
@@ -5446,1923 +4175,6 @@
           </a:p>
         </p:txBody>
       </p:sp>
-      <p:sp>
-        <p:nvSpPr>
-          <p:cNvPr id="16" name="Right Bracket 15">
-            <a:extLst>
-              <a:ext uri="{FF2B5EF4-FFF2-40B4-BE49-F238E27FC236}">
-                <a16:creationId xmlns:a16="http://schemas.microsoft.com/office/drawing/2014/main" id="{A2B992C3-5B05-D577-AA8B-30CF4F58FFD8}"/>
-              </a:ext>
-            </a:extLst>
-          </p:cNvPr>
-          <p:cNvSpPr/>
-          <p:nvPr/>
-        </p:nvSpPr>
-        <p:spPr>
-          <a:xfrm>
-            <a:off x="2295711" y="3754795"/>
-            <a:ext cx="140455" cy="569448"/>
-          </a:xfrm>
-          <a:prstGeom prst="rightBracket">
-            <a:avLst/>
-          </a:prstGeom>
-          <a:noFill/>
-          <a:ln w="25400" cap="flat">
-            <a:solidFill>
-              <a:srgbClr val="000000"/>
-            </a:solidFill>
-            <a:prstDash val="solid"/>
-            <a:miter lim="400000"/>
-          </a:ln>
-          <a:effectLst/>
-          <a:sp3d/>
-        </p:spPr>
-        <p:style>
-          <a:lnRef idx="0">
-            <a:scrgbClr r="0" g="0" b="0"/>
-          </a:lnRef>
-          <a:fillRef idx="0">
-            <a:scrgbClr r="0" g="0" b="0"/>
-          </a:fillRef>
-          <a:effectRef idx="0">
-            <a:scrgbClr r="0" g="0" b="0"/>
-          </a:effectRef>
-          <a:fontRef idx="none"/>
-        </p:style>
-        <p:txBody>
-          <a:bodyPr rot="0" spcFirstLastPara="1" vertOverflow="overflow" horzOverflow="overflow" vert="horz" wrap="square" lIns="91439" tIns="45719" rIns="91439" bIns="45719" numCol="1" spcCol="38100" rtlCol="0" anchor="t">
-            <a:noAutofit/>
-          </a:bodyPr>
-          <a:lstStyle/>
-          <a:p>
-            <a:pPr marL="0" marR="0" indent="0" algn="l" defTabSz="914400" rtl="0" fontAlgn="auto" latinLnBrk="1" hangingPunct="0">
-              <a:lnSpc>
-                <a:spcPct val="100000"/>
-              </a:lnSpc>
-              <a:spcBef>
-                <a:spcPts val="0"/>
-              </a:spcBef>
-              <a:spcAft>
-                <a:spcPts val="0"/>
-              </a:spcAft>
-              <a:buClrTx/>
-              <a:buSzTx/>
-              <a:buFontTx/>
-              <a:buNone/>
-              <a:tabLst/>
-            </a:pPr>
-            <a:endParaRPr kumimoji="0" lang="en-GB" sz="1800" b="0" i="0" u="none" strike="noStrike" cap="none" spc="0" normalizeH="0" baseline="0">
-              <a:ln>
-                <a:noFill/>
-              </a:ln>
-              <a:solidFill>
-                <a:srgbClr val="000000"/>
-              </a:solidFill>
-              <a:effectLst/>
-              <a:uFillTx/>
-            </a:endParaRPr>
-          </a:p>
-        </p:txBody>
-      </p:sp>
-      <p:sp>
-        <p:nvSpPr>
-          <p:cNvPr id="17" name="Right Bracket 16">
-            <a:extLst>
-              <a:ext uri="{FF2B5EF4-FFF2-40B4-BE49-F238E27FC236}">
-                <a16:creationId xmlns:a16="http://schemas.microsoft.com/office/drawing/2014/main" id="{C2AB3151-C78B-1C2F-4D48-8ECCE8332738}"/>
-              </a:ext>
-            </a:extLst>
-          </p:cNvPr>
-          <p:cNvSpPr/>
-          <p:nvPr/>
-        </p:nvSpPr>
-        <p:spPr>
-          <a:xfrm>
-            <a:off x="2235783" y="4478917"/>
-            <a:ext cx="200383" cy="1636878"/>
-          </a:xfrm>
-          <a:prstGeom prst="rightBracket">
-            <a:avLst/>
-          </a:prstGeom>
-          <a:noFill/>
-          <a:ln w="25400" cap="flat">
-            <a:solidFill>
-              <a:srgbClr val="000000"/>
-            </a:solidFill>
-            <a:prstDash val="solid"/>
-            <a:miter lim="400000"/>
-          </a:ln>
-          <a:effectLst/>
-          <a:sp3d/>
-        </p:spPr>
-        <p:style>
-          <a:lnRef idx="0">
-            <a:scrgbClr r="0" g="0" b="0"/>
-          </a:lnRef>
-          <a:fillRef idx="0">
-            <a:scrgbClr r="0" g="0" b="0"/>
-          </a:fillRef>
-          <a:effectRef idx="0">
-            <a:scrgbClr r="0" g="0" b="0"/>
-          </a:effectRef>
-          <a:fontRef idx="none"/>
-        </p:style>
-        <p:txBody>
-          <a:bodyPr rot="0" spcFirstLastPara="1" vertOverflow="overflow" horzOverflow="overflow" vert="horz" wrap="square" lIns="91439" tIns="45719" rIns="91439" bIns="45719" numCol="1" spcCol="38100" rtlCol="0" anchor="t">
-            <a:noAutofit/>
-          </a:bodyPr>
-          <a:lstStyle/>
-          <a:p>
-            <a:pPr marL="0" marR="0" indent="0" algn="l" defTabSz="914400" rtl="0" fontAlgn="auto" latinLnBrk="1" hangingPunct="0">
-              <a:lnSpc>
-                <a:spcPct val="100000"/>
-              </a:lnSpc>
-              <a:spcBef>
-                <a:spcPts val="0"/>
-              </a:spcBef>
-              <a:spcAft>
-                <a:spcPts val="0"/>
-              </a:spcAft>
-              <a:buClrTx/>
-              <a:buSzTx/>
-              <a:buFontTx/>
-              <a:buNone/>
-              <a:tabLst/>
-            </a:pPr>
-            <a:endParaRPr kumimoji="0" lang="en-GB" sz="1800" b="0" i="0" u="none" strike="noStrike" cap="none" spc="0" normalizeH="0" baseline="0">
-              <a:ln>
-                <a:noFill/>
-              </a:ln>
-              <a:solidFill>
-                <a:srgbClr val="000000"/>
-              </a:solidFill>
-              <a:effectLst/>
-              <a:uFillTx/>
-            </a:endParaRPr>
-          </a:p>
-        </p:txBody>
-      </p:sp>
-      <p:sp>
-        <p:nvSpPr>
-          <p:cNvPr id="18" name="TextBox 17">
-            <a:extLst>
-              <a:ext uri="{FF2B5EF4-FFF2-40B4-BE49-F238E27FC236}">
-                <a16:creationId xmlns:a16="http://schemas.microsoft.com/office/drawing/2014/main" id="{5407ABD2-B6DE-E226-BD54-C7C37B327CC0}"/>
-              </a:ext>
-            </a:extLst>
-          </p:cNvPr>
-          <p:cNvSpPr txBox="1"/>
-          <p:nvPr/>
-        </p:nvSpPr>
-        <p:spPr>
-          <a:xfrm rot="16200000">
-            <a:off x="2066667" y="3740120"/>
-            <a:ext cx="897305" cy="289742"/>
-          </a:xfrm>
-          <a:prstGeom prst="rect">
-            <a:avLst/>
-          </a:prstGeom>
-          <a:noFill/>
-          <a:ln w="12700" cap="flat">
-            <a:noFill/>
-            <a:miter lim="400000"/>
-          </a:ln>
-          <a:effectLst/>
-          <a:sp3d/>
-        </p:spPr>
-        <p:style>
-          <a:lnRef idx="0">
-            <a:scrgbClr r="0" g="0" b="0"/>
-          </a:lnRef>
-          <a:fillRef idx="0">
-            <a:scrgbClr r="0" g="0" b="0"/>
-          </a:fillRef>
-          <a:effectRef idx="0">
-            <a:scrgbClr r="0" g="0" b="0"/>
-          </a:effectRef>
-          <a:fontRef idx="none"/>
-        </p:style>
-        <p:txBody>
-          <a:bodyPr rot="0" spcFirstLastPara="1" vertOverflow="overflow" horzOverflow="overflow" vert="horz" wrap="square" lIns="54570" tIns="54570" rIns="54570" bIns="54570" numCol="1" spcCol="38100" rtlCol="0" anchor="ctr">
-            <a:spAutoFit/>
-          </a:bodyPr>
-          <a:lstStyle/>
-          <a:p>
-            <a:pPr marL="0" marR="0" indent="0" algn="l" defTabSz="584200" rtl="0" fontAlgn="auto" latinLnBrk="0" hangingPunct="0">
-              <a:lnSpc>
-                <a:spcPct val="100000"/>
-              </a:lnSpc>
-              <a:spcBef>
-                <a:spcPts val="200"/>
-              </a:spcBef>
-              <a:spcAft>
-                <a:spcPts val="0"/>
-              </a:spcAft>
-              <a:buClrTx/>
-              <a:buSzTx/>
-              <a:buFontTx/>
-              <a:buNone/>
-              <a:tabLst/>
-            </a:pPr>
-            <a:r>
-              <a:rPr kumimoji="0" lang="en-GB" sz="1000" b="1" i="0" u="none" strike="noStrike" cap="none" spc="0" normalizeH="0" baseline="0" dirty="0">
-                <a:ln>
-                  <a:noFill/>
-                </a:ln>
-                <a:solidFill>
-                  <a:srgbClr val="4C4C4C"/>
-                </a:solidFill>
-                <a:effectLst/>
-                <a:uFillTx/>
-                <a:latin typeface="National-LFSN Semibd" panose="020B0704030502020203" pitchFamily="34" charset="0"/>
-                <a:sym typeface="Source Sans Pro"/>
-              </a:rPr>
-              <a:t>required</a:t>
-            </a:r>
-          </a:p>
-        </p:txBody>
-      </p:sp>
-      <p:sp>
-        <p:nvSpPr>
-          <p:cNvPr id="19" name="TextBox 18">
-            <a:extLst>
-              <a:ext uri="{FF2B5EF4-FFF2-40B4-BE49-F238E27FC236}">
-                <a16:creationId xmlns:a16="http://schemas.microsoft.com/office/drawing/2014/main" id="{46FA831F-C88A-E63A-5AF2-928696D9FE49}"/>
-              </a:ext>
-            </a:extLst>
-          </p:cNvPr>
-          <p:cNvSpPr txBox="1"/>
-          <p:nvPr/>
-        </p:nvSpPr>
-        <p:spPr>
-          <a:xfrm rot="16200000">
-            <a:off x="1633179" y="4464096"/>
-            <a:ext cx="1790700" cy="289742"/>
-          </a:xfrm>
-          <a:prstGeom prst="rect">
-            <a:avLst/>
-          </a:prstGeom>
-          <a:noFill/>
-          <a:ln w="12700" cap="flat">
-            <a:noFill/>
-            <a:miter lim="400000"/>
-          </a:ln>
-          <a:effectLst/>
-          <a:sp3d/>
-        </p:spPr>
-        <p:style>
-          <a:lnRef idx="0">
-            <a:scrgbClr r="0" g="0" b="0"/>
-          </a:lnRef>
-          <a:fillRef idx="0">
-            <a:scrgbClr r="0" g="0" b="0"/>
-          </a:fillRef>
-          <a:effectRef idx="0">
-            <a:scrgbClr r="0" g="0" b="0"/>
-          </a:effectRef>
-          <a:fontRef idx="none"/>
-        </p:style>
-        <p:txBody>
-          <a:bodyPr rot="0" spcFirstLastPara="1" vertOverflow="overflow" horzOverflow="overflow" vert="horz" wrap="square" lIns="54570" tIns="54570" rIns="54570" bIns="54570" numCol="1" spcCol="38100" rtlCol="0" anchor="ctr">
-            <a:spAutoFit/>
-          </a:bodyPr>
-          <a:lstStyle/>
-          <a:p>
-            <a:pPr marL="0" marR="0" indent="0" algn="l" defTabSz="584200" rtl="0" fontAlgn="auto" latinLnBrk="0" hangingPunct="0">
-              <a:lnSpc>
-                <a:spcPct val="100000"/>
-              </a:lnSpc>
-              <a:spcBef>
-                <a:spcPts val="200"/>
-              </a:spcBef>
-              <a:spcAft>
-                <a:spcPts val="0"/>
-              </a:spcAft>
-              <a:buClrTx/>
-              <a:buSzTx/>
-              <a:buFontTx/>
-              <a:buNone/>
-              <a:tabLst/>
-            </a:pPr>
-            <a:r>
-              <a:rPr kumimoji="0" lang="en-GB" sz="1000" b="1" i="0" u="none" strike="noStrike" cap="none" spc="0" normalizeH="0" baseline="0" dirty="0">
-                <a:ln>
-                  <a:noFill/>
-                </a:ln>
-                <a:solidFill>
-                  <a:srgbClr val="4C4C4C"/>
-                </a:solidFill>
-                <a:effectLst/>
-                <a:uFillTx/>
-                <a:latin typeface="National-LFSN Semibd" panose="020B0704030502020203" pitchFamily="34" charset="0"/>
-                <a:sym typeface="Source Sans Pro"/>
-              </a:rPr>
-              <a:t>Not required</a:t>
-            </a:r>
-          </a:p>
-        </p:txBody>
-      </p:sp>
-      <p:grpSp>
-        <p:nvGrpSpPr>
-          <p:cNvPr id="28" name="Group 12">
-            <a:extLst>
-              <a:ext uri="{FF2B5EF4-FFF2-40B4-BE49-F238E27FC236}">
-                <a16:creationId xmlns:a16="http://schemas.microsoft.com/office/drawing/2014/main" id="{954AD853-ABED-08C6-7CB8-4793D139FA11}"/>
-              </a:ext>
-            </a:extLst>
-          </p:cNvPr>
-          <p:cNvGrpSpPr>
-            <a:grpSpLocks noChangeAspect="1"/>
-          </p:cNvGrpSpPr>
-          <p:nvPr/>
-        </p:nvGrpSpPr>
-        <p:grpSpPr bwMode="auto">
-          <a:xfrm>
-            <a:off x="2525545" y="3546074"/>
-            <a:ext cx="3145087" cy="1121824"/>
-            <a:chOff x="3294" y="3029"/>
-            <a:chExt cx="2212" cy="789"/>
-          </a:xfrm>
-        </p:grpSpPr>
-        <p:sp>
-          <p:nvSpPr>
-            <p:cNvPr id="29" name="AutoShape 11">
-              <a:extLst>
-                <a:ext uri="{FF2B5EF4-FFF2-40B4-BE49-F238E27FC236}">
-                  <a16:creationId xmlns:a16="http://schemas.microsoft.com/office/drawing/2014/main" id="{6C68CEA3-06B3-6036-2608-8728D65094CB}"/>
-                </a:ext>
-              </a:extLst>
-            </p:cNvPr>
-            <p:cNvSpPr>
-              <a:spLocks noChangeAspect="1" noChangeArrowheads="1" noTextEdit="1"/>
-            </p:cNvSpPr>
-            <p:nvPr/>
-          </p:nvSpPr>
-          <p:spPr bwMode="auto">
-            <a:xfrm>
-              <a:off x="3294" y="3029"/>
-              <a:ext cx="2212" cy="742"/>
-            </a:xfrm>
-            <a:prstGeom prst="rect">
-              <a:avLst/>
-            </a:prstGeom>
-            <a:noFill/>
-            <a:ln>
-              <a:noFill/>
-            </a:ln>
-            <a:extLst>
-              <a:ext uri="{909E8E84-426E-40DD-AFC4-6F175D3DCCD1}">
-                <a14:hiddenFill xmlns:a14="http://schemas.microsoft.com/office/drawing/2010/main">
-                  <a:solidFill>
-                    <a:srgbClr val="FFFFFF"/>
-                  </a:solidFill>
-                </a14:hiddenFill>
-              </a:ext>
-              <a:ext uri="{91240B29-F687-4F45-9708-019B960494DF}">
-                <a14:hiddenLine xmlns:a14="http://schemas.microsoft.com/office/drawing/2010/main" w="9525">
-                  <a:solidFill>
-                    <a:srgbClr val="000000"/>
-                  </a:solidFill>
-                  <a:miter lim="800000"/>
-                  <a:headEnd/>
-                  <a:tailEnd/>
-                </a14:hiddenLine>
-              </a:ext>
-            </a:extLst>
-          </p:spPr>
-          <p:txBody>
-            <a:bodyPr vert="horz" wrap="square" lIns="91440" tIns="45720" rIns="91440" bIns="45720" numCol="1" anchor="t" anchorCtr="0" compatLnSpc="1">
-              <a:prstTxWarp prst="textNoShape">
-                <a:avLst/>
-              </a:prstTxWarp>
-            </a:bodyPr>
-            <a:lstStyle/>
-            <a:p>
-              <a:endParaRPr lang="en-GB"/>
-            </a:p>
-          </p:txBody>
-        </p:sp>
-        <p:pic>
-          <p:nvPicPr>
-            <p:cNvPr id="1037" name="Picture 13">
-              <a:extLst>
-                <a:ext uri="{FF2B5EF4-FFF2-40B4-BE49-F238E27FC236}">
-                  <a16:creationId xmlns:a16="http://schemas.microsoft.com/office/drawing/2014/main" id="{F2167417-1789-8DB4-FB14-9041F13FAB4D}"/>
-                </a:ext>
-              </a:extLst>
-            </p:cNvPr>
-            <p:cNvPicPr>
-              <a:picLocks noChangeAspect="1" noChangeArrowheads="1"/>
-            </p:cNvPicPr>
-            <p:nvPr/>
-          </p:nvPicPr>
-          <p:blipFill rotWithShape="1">
-            <a:blip r:embed="rId7">
-              <a:extLst>
-                <a:ext uri="{28A0092B-C50C-407E-A947-70E740481C1C}">
-                  <a14:useLocalDpi xmlns:a14="http://schemas.microsoft.com/office/drawing/2010/main" val="0"/>
-                </a:ext>
-              </a:extLst>
-            </a:blip>
-            <a:srcRect l="6973" r="56302"/>
-            <a:stretch>
-              <a:fillRect/>
-            </a:stretch>
-          </p:blipFill>
-          <p:spPr bwMode="auto">
-            <a:xfrm>
-              <a:off x="3373" y="3070"/>
-              <a:ext cx="814" cy="748"/>
-            </a:xfrm>
-            <a:prstGeom prst="rect">
-              <a:avLst/>
-            </a:prstGeom>
-            <a:noFill/>
-            <a:ln>
-              <a:noFill/>
-            </a:ln>
-            <a:extLst>
-              <a:ext uri="{909E8E84-426E-40DD-AFC4-6F175D3DCCD1}">
-                <a14:hiddenFill xmlns:a14="http://schemas.microsoft.com/office/drawing/2010/main">
-                  <a:solidFill>
-                    <a:srgbClr val="FFFFFF"/>
-                  </a:solidFill>
-                </a14:hiddenFill>
-              </a:ext>
-              <a:ext uri="{91240B29-F687-4F45-9708-019B960494DF}">
-                <a14:hiddenLine xmlns:a14="http://schemas.microsoft.com/office/drawing/2010/main" w="9525">
-                  <a:solidFill>
-                    <a:srgbClr val="000000"/>
-                  </a:solidFill>
-                  <a:miter lim="800000"/>
-                  <a:headEnd/>
-                  <a:tailEnd/>
-                </a14:hiddenLine>
-              </a:ext>
-            </a:extLst>
-          </p:spPr>
-        </p:pic>
-      </p:grpSp>
-      <p:grpSp>
-        <p:nvGrpSpPr>
-          <p:cNvPr id="30" name="Group 12">
-            <a:extLst>
-              <a:ext uri="{FF2B5EF4-FFF2-40B4-BE49-F238E27FC236}">
-                <a16:creationId xmlns:a16="http://schemas.microsoft.com/office/drawing/2014/main" id="{ADE4551D-9EFB-BBE2-07A3-CC57AA934031}"/>
-              </a:ext>
-            </a:extLst>
-          </p:cNvPr>
-          <p:cNvGrpSpPr>
-            <a:grpSpLocks noChangeAspect="1"/>
-          </p:cNvGrpSpPr>
-          <p:nvPr/>
-        </p:nvGrpSpPr>
-        <p:grpSpPr bwMode="auto">
-          <a:xfrm>
-            <a:off x="2707944" y="5020815"/>
-            <a:ext cx="3511550" cy="1177925"/>
-            <a:chOff x="3294" y="3029"/>
-            <a:chExt cx="2212" cy="742"/>
-          </a:xfrm>
-        </p:grpSpPr>
-        <p:sp>
-          <p:nvSpPr>
-            <p:cNvPr id="31" name="AutoShape 11">
-              <a:extLst>
-                <a:ext uri="{FF2B5EF4-FFF2-40B4-BE49-F238E27FC236}">
-                  <a16:creationId xmlns:a16="http://schemas.microsoft.com/office/drawing/2014/main" id="{707F9E14-19C3-F8EC-DA82-25E596A35794}"/>
-                </a:ext>
-              </a:extLst>
-            </p:cNvPr>
-            <p:cNvSpPr>
-              <a:spLocks noChangeAspect="1" noChangeArrowheads="1" noTextEdit="1"/>
-            </p:cNvSpPr>
-            <p:nvPr/>
-          </p:nvSpPr>
-          <p:spPr bwMode="auto">
-            <a:xfrm>
-              <a:off x="3294" y="3029"/>
-              <a:ext cx="2212" cy="742"/>
-            </a:xfrm>
-            <a:prstGeom prst="rect">
-              <a:avLst/>
-            </a:prstGeom>
-            <a:noFill/>
-            <a:ln>
-              <a:noFill/>
-            </a:ln>
-            <a:extLst>
-              <a:ext uri="{909E8E84-426E-40DD-AFC4-6F175D3DCCD1}">
-                <a14:hiddenFill xmlns:a14="http://schemas.microsoft.com/office/drawing/2010/main">
-                  <a:solidFill>
-                    <a:srgbClr val="FFFFFF"/>
-                  </a:solidFill>
-                </a14:hiddenFill>
-              </a:ext>
-              <a:ext uri="{91240B29-F687-4F45-9708-019B960494DF}">
-                <a14:hiddenLine xmlns:a14="http://schemas.microsoft.com/office/drawing/2010/main" w="9525">
-                  <a:solidFill>
-                    <a:srgbClr val="000000"/>
-                  </a:solidFill>
-                  <a:miter lim="800000"/>
-                  <a:headEnd/>
-                  <a:tailEnd/>
-                </a14:hiddenLine>
-              </a:ext>
-            </a:extLst>
-          </p:spPr>
-          <p:txBody>
-            <a:bodyPr vert="horz" wrap="square" lIns="91440" tIns="45720" rIns="91440" bIns="45720" numCol="1" anchor="t" anchorCtr="0" compatLnSpc="1">
-              <a:prstTxWarp prst="textNoShape">
-                <a:avLst/>
-              </a:prstTxWarp>
-            </a:bodyPr>
-            <a:lstStyle/>
-            <a:p>
-              <a:endParaRPr lang="en-GB"/>
-            </a:p>
-          </p:txBody>
-        </p:sp>
-        <p:pic>
-          <p:nvPicPr>
-            <p:cNvPr id="32" name="Picture 13">
-              <a:extLst>
-                <a:ext uri="{FF2B5EF4-FFF2-40B4-BE49-F238E27FC236}">
-                  <a16:creationId xmlns:a16="http://schemas.microsoft.com/office/drawing/2014/main" id="{7DED182F-6F18-ADC9-7090-2384F3875A9E}"/>
-                </a:ext>
-              </a:extLst>
-            </p:cNvPr>
-            <p:cNvPicPr>
-              <a:picLocks noChangeAspect="1" noChangeArrowheads="1"/>
-            </p:cNvPicPr>
-            <p:nvPr/>
-          </p:nvPicPr>
-          <p:blipFill rotWithShape="1">
-            <a:blip r:embed="rId7">
-              <a:extLst>
-                <a:ext uri="{28A0092B-C50C-407E-A947-70E740481C1C}">
-                  <a14:useLocalDpi xmlns:a14="http://schemas.microsoft.com/office/drawing/2010/main" val="0"/>
-                </a:ext>
-              </a:extLst>
-            </a:blip>
-            <a:srcRect l="42085" r="32063"/>
-            <a:stretch>
-              <a:fillRect/>
-            </a:stretch>
-          </p:blipFill>
-          <p:spPr bwMode="auto">
-            <a:xfrm>
-              <a:off x="3337" y="3083"/>
-              <a:ext cx="427" cy="557"/>
-            </a:xfrm>
-            <a:prstGeom prst="rect">
-              <a:avLst/>
-            </a:prstGeom>
-            <a:noFill/>
-            <a:ln>
-              <a:noFill/>
-            </a:ln>
-            <a:extLst>
-              <a:ext uri="{909E8E84-426E-40DD-AFC4-6F175D3DCCD1}">
-                <a14:hiddenFill xmlns:a14="http://schemas.microsoft.com/office/drawing/2010/main">
-                  <a:solidFill>
-                    <a:srgbClr val="FFFFFF"/>
-                  </a:solidFill>
-                </a14:hiddenFill>
-              </a:ext>
-              <a:ext uri="{91240B29-F687-4F45-9708-019B960494DF}">
-                <a14:hiddenLine xmlns:a14="http://schemas.microsoft.com/office/drawing/2010/main" w="9525">
-                  <a:solidFill>
-                    <a:srgbClr val="000000"/>
-                  </a:solidFill>
-                  <a:miter lim="800000"/>
-                  <a:headEnd/>
-                  <a:tailEnd/>
-                </a14:hiddenLine>
-              </a:ext>
-            </a:extLst>
-          </p:spPr>
-        </p:pic>
-      </p:grpSp>
-      <p:pic>
-        <p:nvPicPr>
-          <p:cNvPr id="1039" name="Picture 15">
-            <a:extLst>
-              <a:ext uri="{FF2B5EF4-FFF2-40B4-BE49-F238E27FC236}">
-                <a16:creationId xmlns:a16="http://schemas.microsoft.com/office/drawing/2014/main" id="{61945945-98E6-8325-E01D-077EF0243572}"/>
-              </a:ext>
-            </a:extLst>
-          </p:cNvPr>
-          <p:cNvPicPr>
-            <a:picLocks noChangeAspect="1" noChangeArrowheads="1"/>
-          </p:cNvPicPr>
-          <p:nvPr/>
-        </p:nvPicPr>
-        <p:blipFill rotWithShape="1">
-          <a:blip r:embed="rId8" cstate="print">
-            <a:extLst>
-              <a:ext uri="{28A0092B-C50C-407E-A947-70E740481C1C}">
-                <a14:useLocalDpi xmlns:a14="http://schemas.microsoft.com/office/drawing/2010/main" val="0"/>
-              </a:ext>
-            </a:extLst>
-          </a:blip>
-          <a:srcRect r="46743" b="8774"/>
-          <a:stretch>
-            <a:fillRect/>
-          </a:stretch>
-        </p:blipFill>
-        <p:spPr bwMode="auto">
-          <a:xfrm>
-            <a:off x="2757404" y="6166960"/>
-            <a:ext cx="678965" cy="647280"/>
-          </a:xfrm>
-          <a:prstGeom prst="rect">
-            <a:avLst/>
-          </a:prstGeom>
-          <a:noFill/>
-          <a:extLst>
-            <a:ext uri="{909E8E84-426E-40DD-AFC4-6F175D3DCCD1}">
-              <a14:hiddenFill xmlns:a14="http://schemas.microsoft.com/office/drawing/2010/main">
-                <a:solidFill>
-                  <a:srgbClr val="FFFFFF"/>
-                </a:solidFill>
-              </a14:hiddenFill>
-            </a:ext>
-          </a:extLst>
-        </p:spPr>
-      </p:pic>
-      <p:sp>
-        <p:nvSpPr>
-          <p:cNvPr id="34" name="TextBox 33">
-            <a:extLst>
-              <a:ext uri="{FF2B5EF4-FFF2-40B4-BE49-F238E27FC236}">
-                <a16:creationId xmlns:a16="http://schemas.microsoft.com/office/drawing/2014/main" id="{6969FED2-5F88-4268-4883-D4110780D0A8}"/>
-              </a:ext>
-            </a:extLst>
-          </p:cNvPr>
-          <p:cNvSpPr txBox="1"/>
-          <p:nvPr/>
-        </p:nvSpPr>
-        <p:spPr>
-          <a:xfrm>
-            <a:off x="3737530" y="3632173"/>
-            <a:ext cx="841997" cy="1520848"/>
-          </a:xfrm>
-          <a:prstGeom prst="rect">
-            <a:avLst/>
-          </a:prstGeom>
-          <a:noFill/>
-          <a:ln w="12700" cap="flat">
-            <a:noFill/>
-            <a:miter lim="400000"/>
-          </a:ln>
-          <a:effectLst/>
-          <a:sp3d/>
-        </p:spPr>
-        <p:style>
-          <a:lnRef idx="0">
-            <a:scrgbClr r="0" g="0" b="0"/>
-          </a:lnRef>
-          <a:fillRef idx="0">
-            <a:scrgbClr r="0" g="0" b="0"/>
-          </a:fillRef>
-          <a:effectRef idx="0">
-            <a:scrgbClr r="0" g="0" b="0"/>
-          </a:effectRef>
-          <a:fontRef idx="none"/>
-        </p:style>
-        <p:txBody>
-          <a:bodyPr rot="0" spcFirstLastPara="1" vertOverflow="overflow" horzOverflow="overflow" vert="horz" wrap="square" lIns="54570" tIns="54570" rIns="54570" bIns="54570" numCol="1" spcCol="38100" rtlCol="0" anchor="ctr">
-            <a:spAutoFit/>
-          </a:bodyPr>
-          <a:lstStyle/>
-          <a:p>
-            <a:pPr marL="0" marR="0" indent="0" algn="l" defTabSz="584200" rtl="0" fontAlgn="auto" latinLnBrk="0" hangingPunct="0">
-              <a:lnSpc>
-                <a:spcPct val="100000"/>
-              </a:lnSpc>
-              <a:spcBef>
-                <a:spcPts val="200"/>
-              </a:spcBef>
-              <a:spcAft>
-                <a:spcPts val="0"/>
-              </a:spcAft>
-              <a:buClrTx/>
-              <a:buSzTx/>
-              <a:buFontTx/>
-              <a:buNone/>
-              <a:tabLst/>
-            </a:pPr>
-            <a:r>
-              <a:rPr lang="en-GB" sz="1000" b="0" dirty="0">
-                <a:solidFill>
-                  <a:schemeClr val="tx2"/>
-                </a:solidFill>
-                <a:latin typeface="National-LFSN Book" panose="020B0504030502020203" pitchFamily="34" charset="0"/>
-              </a:rPr>
-              <a:t>Data variables are mapped to visual properties of the </a:t>
-            </a:r>
-            <a:r>
-              <a:rPr lang="en-GB" sz="1000" b="0" dirty="0" err="1">
-                <a:solidFill>
-                  <a:schemeClr val="tx2"/>
-                </a:solidFill>
-                <a:latin typeface="National-LFSN Book" panose="020B0504030502020203" pitchFamily="34" charset="0"/>
-              </a:rPr>
-              <a:t>geom</a:t>
-            </a:r>
-            <a:r>
-              <a:rPr lang="en-GB" sz="1000" b="0" dirty="0">
-                <a:solidFill>
-                  <a:schemeClr val="tx2"/>
-                </a:solidFill>
-                <a:latin typeface="National-LFSN Book" panose="020B0504030502020203" pitchFamily="34" charset="0"/>
-              </a:rPr>
-              <a:t> like size, colour and x and y locations</a:t>
-            </a:r>
-            <a:endParaRPr kumimoji="0" lang="en-GB" sz="1000" b="0" i="0" u="none" strike="noStrike" cap="none" spc="0" normalizeH="0" baseline="0" dirty="0">
-              <a:ln>
-                <a:noFill/>
-              </a:ln>
-              <a:solidFill>
-                <a:schemeClr val="tx2"/>
-              </a:solidFill>
-              <a:effectLst/>
-              <a:uFillTx/>
-              <a:latin typeface="National-LFSN Book" panose="020B0504030502020203" pitchFamily="34" charset="0"/>
-              <a:sym typeface="Source Sans Pro"/>
-            </a:endParaRPr>
-          </a:p>
-        </p:txBody>
-      </p:sp>
-      <p:sp>
-        <p:nvSpPr>
-          <p:cNvPr id="35" name="TextBox 34">
-            <a:extLst>
-              <a:ext uri="{FF2B5EF4-FFF2-40B4-BE49-F238E27FC236}">
-                <a16:creationId xmlns:a16="http://schemas.microsoft.com/office/drawing/2014/main" id="{FC5A7E32-9064-534F-8789-C7EBC6856FF1}"/>
-              </a:ext>
-            </a:extLst>
-          </p:cNvPr>
-          <p:cNvSpPr txBox="1"/>
-          <p:nvPr/>
-        </p:nvSpPr>
-        <p:spPr>
-          <a:xfrm>
-            <a:off x="3472663" y="6030430"/>
-            <a:ext cx="1051451" cy="921443"/>
-          </a:xfrm>
-          <a:prstGeom prst="rect">
-            <a:avLst/>
-          </a:prstGeom>
-          <a:noFill/>
-          <a:ln w="12700" cap="flat">
-            <a:noFill/>
-            <a:miter lim="400000"/>
-          </a:ln>
-          <a:effectLst/>
-          <a:sp3d/>
-        </p:spPr>
-        <p:style>
-          <a:lnRef idx="0">
-            <a:scrgbClr r="0" g="0" b="0"/>
-          </a:lnRef>
-          <a:fillRef idx="0">
-            <a:scrgbClr r="0" g="0" b="0"/>
-          </a:fillRef>
-          <a:effectRef idx="0">
-            <a:scrgbClr r="0" g="0" b="0"/>
-          </a:effectRef>
-          <a:fontRef idx="none"/>
-        </p:style>
-        <p:txBody>
-          <a:bodyPr rot="0" spcFirstLastPara="1" vertOverflow="overflow" horzOverflow="overflow" vert="horz" wrap="square" lIns="54570" tIns="54570" rIns="54570" bIns="54570" numCol="1" spcCol="38100" rtlCol="0" anchor="ctr">
-            <a:spAutoFit/>
-          </a:bodyPr>
-          <a:lstStyle/>
-          <a:p>
-            <a:pPr marL="0" marR="0" indent="0" algn="l" defTabSz="584200" rtl="0" fontAlgn="auto" latinLnBrk="0" hangingPunct="0">
-              <a:lnSpc>
-                <a:spcPct val="100000"/>
-              </a:lnSpc>
-              <a:spcBef>
-                <a:spcPts val="200"/>
-              </a:spcBef>
-              <a:spcAft>
-                <a:spcPts val="0"/>
-              </a:spcAft>
-              <a:buClrTx/>
-              <a:buSzTx/>
-              <a:buFontTx/>
-              <a:buNone/>
-              <a:tabLst/>
-            </a:pPr>
-            <a:r>
-              <a:rPr lang="en-GB" sz="1000" b="0" dirty="0">
-                <a:solidFill>
-                  <a:schemeClr val="tx2"/>
-                </a:solidFill>
-                <a:latin typeface="National-LFSN Book" panose="020B0504030502020203" pitchFamily="34" charset="0"/>
-              </a:rPr>
-              <a:t>Faceting generates small multiples showing different subsets of the data</a:t>
-            </a:r>
-            <a:endParaRPr kumimoji="0" lang="en-GB" sz="1000" b="0" i="0" u="none" strike="noStrike" cap="none" spc="0" normalizeH="0" baseline="0" dirty="0">
-              <a:ln>
-                <a:noFill/>
-              </a:ln>
-              <a:solidFill>
-                <a:schemeClr val="tx2"/>
-              </a:solidFill>
-              <a:effectLst/>
-              <a:uFillTx/>
-              <a:latin typeface="National-LFSN Book" panose="020B0504030502020203" pitchFamily="34" charset="0"/>
-              <a:sym typeface="Source Sans Pro"/>
-            </a:endParaRPr>
-          </a:p>
-        </p:txBody>
-      </p:sp>
-      <p:sp>
-        <p:nvSpPr>
-          <p:cNvPr id="36" name="TextBox 35">
-            <a:extLst>
-              <a:ext uri="{FF2B5EF4-FFF2-40B4-BE49-F238E27FC236}">
-                <a16:creationId xmlns:a16="http://schemas.microsoft.com/office/drawing/2014/main" id="{08FF379B-F4EB-A40E-F920-F3639981FDF5}"/>
-              </a:ext>
-            </a:extLst>
-          </p:cNvPr>
-          <p:cNvSpPr txBox="1"/>
-          <p:nvPr/>
-        </p:nvSpPr>
-        <p:spPr>
-          <a:xfrm>
-            <a:off x="2532053" y="7103450"/>
-            <a:ext cx="2105200" cy="289742"/>
-          </a:xfrm>
-          <a:prstGeom prst="rect">
-            <a:avLst/>
-          </a:prstGeom>
-          <a:noFill/>
-          <a:ln w="12700" cap="flat">
-            <a:noFill/>
-            <a:miter lim="400000"/>
-          </a:ln>
-          <a:effectLst/>
-          <a:sp3d/>
-        </p:spPr>
-        <p:style>
-          <a:lnRef idx="0">
-            <a:scrgbClr r="0" g="0" b="0"/>
-          </a:lnRef>
-          <a:fillRef idx="0">
-            <a:scrgbClr r="0" g="0" b="0"/>
-          </a:fillRef>
-          <a:effectRef idx="0">
-            <a:scrgbClr r="0" g="0" b="0"/>
-          </a:effectRef>
-          <a:fontRef idx="none"/>
-        </p:style>
-        <p:txBody>
-          <a:bodyPr rot="0" spcFirstLastPara="1" vertOverflow="overflow" horzOverflow="overflow" vert="horz" wrap="square" lIns="54570" tIns="54570" rIns="54570" bIns="54570" numCol="1" spcCol="38100" rtlCol="0" anchor="ctr">
-            <a:spAutoFit/>
-          </a:bodyPr>
-          <a:lstStyle/>
-          <a:p>
-            <a:pPr marL="0" marR="0" indent="0" algn="l" defTabSz="584200" rtl="0" fontAlgn="auto" latinLnBrk="0" hangingPunct="0">
-              <a:lnSpc>
-                <a:spcPct val="100000"/>
-              </a:lnSpc>
-              <a:spcBef>
-                <a:spcPts val="200"/>
-              </a:spcBef>
-              <a:spcAft>
-                <a:spcPts val="0"/>
-              </a:spcAft>
-              <a:buClrTx/>
-              <a:buSzTx/>
-              <a:buFontTx/>
-              <a:buNone/>
-              <a:tabLst/>
-            </a:pPr>
-            <a:r>
-              <a:rPr lang="en-GB" sz="1000" b="0" dirty="0">
-                <a:solidFill>
-                  <a:schemeClr val="tx2"/>
-                </a:solidFill>
-                <a:latin typeface="National-LFSN Book" panose="020B0504030502020203" pitchFamily="34" charset="0"/>
-              </a:rPr>
-              <a:t>House of Commons library theme</a:t>
-            </a:r>
-            <a:endParaRPr kumimoji="0" lang="en-GB" sz="1000" b="0" i="0" u="none" strike="noStrike" cap="none" spc="0" normalizeH="0" baseline="0" dirty="0">
-              <a:ln>
-                <a:noFill/>
-              </a:ln>
-              <a:solidFill>
-                <a:schemeClr val="tx2"/>
-              </a:solidFill>
-              <a:effectLst/>
-              <a:uFillTx/>
-              <a:latin typeface="National-LFSN Book" panose="020B0504030502020203" pitchFamily="34" charset="0"/>
-              <a:sym typeface="Source Sans Pro"/>
-            </a:endParaRPr>
-          </a:p>
-        </p:txBody>
-      </p:sp>
-      <p:sp>
-        <p:nvSpPr>
-          <p:cNvPr id="37" name="TextBox 36">
-            <a:extLst>
-              <a:ext uri="{FF2B5EF4-FFF2-40B4-BE49-F238E27FC236}">
-                <a16:creationId xmlns:a16="http://schemas.microsoft.com/office/drawing/2014/main" id="{9A6C7DAC-7F43-88BF-13C2-E490481FD810}"/>
-              </a:ext>
-            </a:extLst>
-          </p:cNvPr>
-          <p:cNvSpPr txBox="1"/>
-          <p:nvPr/>
-        </p:nvSpPr>
-        <p:spPr>
-          <a:xfrm>
-            <a:off x="2523178" y="7429358"/>
-            <a:ext cx="2105200" cy="289742"/>
-          </a:xfrm>
-          <a:prstGeom prst="rect">
-            <a:avLst/>
-          </a:prstGeom>
-          <a:noFill/>
-          <a:ln w="12700" cap="flat">
-            <a:noFill/>
-            <a:miter lim="400000"/>
-          </a:ln>
-          <a:effectLst/>
-          <a:sp3d/>
-        </p:spPr>
-        <p:style>
-          <a:lnRef idx="0">
-            <a:scrgbClr r="0" g="0" b="0"/>
-          </a:lnRef>
-          <a:fillRef idx="0">
-            <a:scrgbClr r="0" g="0" b="0"/>
-          </a:fillRef>
-          <a:effectRef idx="0">
-            <a:scrgbClr r="0" g="0" b="0"/>
-          </a:effectRef>
-          <a:fontRef idx="none"/>
-        </p:style>
-        <p:txBody>
-          <a:bodyPr rot="0" spcFirstLastPara="1" vertOverflow="overflow" horzOverflow="overflow" vert="horz" wrap="square" lIns="54570" tIns="54570" rIns="54570" bIns="54570" numCol="1" spcCol="38100" rtlCol="0" anchor="ctr">
-            <a:spAutoFit/>
-          </a:bodyPr>
-          <a:lstStyle/>
-          <a:p>
-            <a:pPr marL="0" marR="0" indent="0" algn="l" defTabSz="584200" rtl="0" fontAlgn="auto" latinLnBrk="0" hangingPunct="0">
-              <a:lnSpc>
-                <a:spcPct val="100000"/>
-              </a:lnSpc>
-              <a:spcBef>
-                <a:spcPts val="200"/>
-              </a:spcBef>
-              <a:spcAft>
-                <a:spcPts val="0"/>
-              </a:spcAft>
-              <a:buClrTx/>
-              <a:buSzTx/>
-              <a:buFontTx/>
-              <a:buNone/>
-              <a:tabLst/>
-            </a:pPr>
-            <a:r>
-              <a:rPr lang="en-GB" sz="1000" b="0" dirty="0">
-                <a:solidFill>
-                  <a:schemeClr val="tx2"/>
-                </a:solidFill>
-                <a:latin typeface="National-LFSN Book" panose="020B0504030502020203" pitchFamily="34" charset="0"/>
-              </a:rPr>
-              <a:t>Set labels e.g. for x and y axes</a:t>
-            </a:r>
-            <a:endParaRPr kumimoji="0" lang="en-GB" sz="1000" b="0" i="0" u="none" strike="noStrike" cap="none" spc="0" normalizeH="0" baseline="0" dirty="0">
-              <a:ln>
-                <a:noFill/>
-              </a:ln>
-              <a:solidFill>
-                <a:schemeClr val="tx2"/>
-              </a:solidFill>
-              <a:effectLst/>
-              <a:uFillTx/>
-              <a:latin typeface="National-LFSN Book" panose="020B0504030502020203" pitchFamily="34" charset="0"/>
-              <a:sym typeface="Source Sans Pro"/>
-            </a:endParaRPr>
-          </a:p>
-        </p:txBody>
-      </p:sp>
-      <p:sp>
-        <p:nvSpPr>
-          <p:cNvPr id="38" name="TextBox 37">
-            <a:extLst>
-              <a:ext uri="{FF2B5EF4-FFF2-40B4-BE49-F238E27FC236}">
-                <a16:creationId xmlns:a16="http://schemas.microsoft.com/office/drawing/2014/main" id="{655CF3F9-A6D4-67B9-476B-B8DE21F880BA}"/>
-              </a:ext>
-            </a:extLst>
-          </p:cNvPr>
-          <p:cNvSpPr txBox="1"/>
-          <p:nvPr/>
-        </p:nvSpPr>
-        <p:spPr>
-          <a:xfrm>
-            <a:off x="2532053" y="8108775"/>
-            <a:ext cx="2105200" cy="597519"/>
-          </a:xfrm>
-          <a:prstGeom prst="rect">
-            <a:avLst/>
-          </a:prstGeom>
-          <a:noFill/>
-          <a:ln w="12700" cap="flat">
-            <a:noFill/>
-            <a:miter lim="400000"/>
-          </a:ln>
-          <a:effectLst/>
-          <a:sp3d/>
-        </p:spPr>
-        <p:style>
-          <a:lnRef idx="0">
-            <a:scrgbClr r="0" g="0" b="0"/>
-          </a:lnRef>
-          <a:fillRef idx="0">
-            <a:scrgbClr r="0" g="0" b="0"/>
-          </a:fillRef>
-          <a:effectRef idx="0">
-            <a:scrgbClr r="0" g="0" b="0"/>
-          </a:effectRef>
-          <a:fontRef idx="none"/>
-        </p:style>
-        <p:txBody>
-          <a:bodyPr rot="0" spcFirstLastPara="1" vertOverflow="overflow" horzOverflow="overflow" vert="horz" wrap="square" lIns="54570" tIns="54570" rIns="54570" bIns="54570" numCol="1" spcCol="38100" rtlCol="0" anchor="ctr">
-            <a:spAutoFit/>
-          </a:bodyPr>
-          <a:lstStyle/>
-          <a:p>
-            <a:pPr marL="0" marR="0" indent="0" algn="l" defTabSz="584200" rtl="0" fontAlgn="auto" latinLnBrk="0" hangingPunct="0">
-              <a:lnSpc>
-                <a:spcPct val="100000"/>
-              </a:lnSpc>
-              <a:spcBef>
-                <a:spcPts val="200"/>
-              </a:spcBef>
-              <a:spcAft>
-                <a:spcPts val="0"/>
-              </a:spcAft>
-              <a:buClrTx/>
-              <a:buSzTx/>
-              <a:buFontTx/>
-              <a:buNone/>
-              <a:tabLst/>
-            </a:pPr>
-            <a:r>
-              <a:rPr lang="en-GB" sz="1000" b="0" dirty="0">
-                <a:solidFill>
-                  <a:schemeClr val="tx2"/>
-                </a:solidFill>
-                <a:latin typeface="National-LFSN Book" panose="020B0504030502020203" pitchFamily="34" charset="0"/>
-              </a:rPr>
-              <a:t>This aligns the title and subtitle to the left hand edge of the y axis which is consistent with the Library style.</a:t>
-            </a:r>
-            <a:endParaRPr kumimoji="0" lang="en-GB" sz="1000" b="0" i="0" u="none" strike="noStrike" cap="none" spc="0" normalizeH="0" baseline="0" dirty="0">
-              <a:ln>
-                <a:noFill/>
-              </a:ln>
-              <a:solidFill>
-                <a:schemeClr val="tx2"/>
-              </a:solidFill>
-              <a:effectLst/>
-              <a:uFillTx/>
-              <a:latin typeface="National-LFSN Book" panose="020B0504030502020203" pitchFamily="34" charset="0"/>
-              <a:sym typeface="Source Sans Pro"/>
-            </a:endParaRPr>
-          </a:p>
-        </p:txBody>
-      </p:sp>
-      <p:sp>
-        <p:nvSpPr>
-          <p:cNvPr id="39" name="TextBox 38">
-            <a:extLst>
-              <a:ext uri="{FF2B5EF4-FFF2-40B4-BE49-F238E27FC236}">
-                <a16:creationId xmlns:a16="http://schemas.microsoft.com/office/drawing/2014/main" id="{D4FC44E4-D966-1A8E-E919-E43447F014B5}"/>
-              </a:ext>
-            </a:extLst>
-          </p:cNvPr>
-          <p:cNvSpPr txBox="1"/>
-          <p:nvPr/>
-        </p:nvSpPr>
-        <p:spPr>
-          <a:xfrm>
-            <a:off x="2675578" y="7581758"/>
-            <a:ext cx="2105200" cy="289742"/>
-          </a:xfrm>
-          <a:prstGeom prst="rect">
-            <a:avLst/>
-          </a:prstGeom>
-          <a:noFill/>
-          <a:ln w="12700" cap="flat">
-            <a:noFill/>
-            <a:miter lim="400000"/>
-          </a:ln>
-          <a:effectLst/>
-          <a:sp3d/>
-        </p:spPr>
-        <p:style>
-          <a:lnRef idx="0">
-            <a:scrgbClr r="0" g="0" b="0"/>
-          </a:lnRef>
-          <a:fillRef idx="0">
-            <a:scrgbClr r="0" g="0" b="0"/>
-          </a:fillRef>
-          <a:effectRef idx="0">
-            <a:scrgbClr r="0" g="0" b="0"/>
-          </a:effectRef>
-          <a:fontRef idx="none"/>
-        </p:style>
-        <p:txBody>
-          <a:bodyPr rot="0" spcFirstLastPara="1" vertOverflow="overflow" horzOverflow="overflow" vert="horz" wrap="square" lIns="54570" tIns="54570" rIns="54570" bIns="54570" numCol="1" spcCol="38100" rtlCol="0" anchor="ctr">
-            <a:spAutoFit/>
-          </a:bodyPr>
-          <a:lstStyle/>
-          <a:p>
-            <a:pPr marL="0" marR="0" indent="0" algn="l" defTabSz="584200" rtl="0" fontAlgn="auto" latinLnBrk="0" hangingPunct="0">
-              <a:lnSpc>
-                <a:spcPct val="100000"/>
-              </a:lnSpc>
-              <a:spcBef>
-                <a:spcPts val="200"/>
-              </a:spcBef>
-              <a:spcAft>
-                <a:spcPts val="0"/>
-              </a:spcAft>
-              <a:buClrTx/>
-              <a:buSzTx/>
-              <a:buFontTx/>
-              <a:buNone/>
-              <a:tabLst/>
-            </a:pPr>
-            <a:r>
-              <a:rPr lang="en-GB" sz="1000" b="0" dirty="0">
-                <a:solidFill>
-                  <a:schemeClr val="tx2"/>
-                </a:solidFill>
-                <a:latin typeface="National-LFSN Book" panose="020B0504030502020203" pitchFamily="34" charset="0"/>
-              </a:rPr>
-              <a:t>Set labels e.g. for x and y axes</a:t>
-            </a:r>
-            <a:endParaRPr kumimoji="0" lang="en-GB" sz="1000" b="0" i="0" u="none" strike="noStrike" cap="none" spc="0" normalizeH="0" baseline="0" dirty="0">
-              <a:ln>
-                <a:noFill/>
-              </a:ln>
-              <a:solidFill>
-                <a:schemeClr val="tx2"/>
-              </a:solidFill>
-              <a:effectLst/>
-              <a:uFillTx/>
-              <a:latin typeface="National-LFSN Book" panose="020B0504030502020203" pitchFamily="34" charset="0"/>
-              <a:sym typeface="Source Sans Pro"/>
-            </a:endParaRPr>
-          </a:p>
-        </p:txBody>
-      </p:sp>
-      <p:sp>
-        <p:nvSpPr>
-          <p:cNvPr id="40" name="CODE">
-            <a:extLst>
-              <a:ext uri="{FF2B5EF4-FFF2-40B4-BE49-F238E27FC236}">
-                <a16:creationId xmlns:a16="http://schemas.microsoft.com/office/drawing/2014/main" id="{3872ADE0-6978-A207-7D39-DF4528C2D349}"/>
-              </a:ext>
-            </a:extLst>
-          </p:cNvPr>
-          <p:cNvSpPr txBox="1"/>
-          <p:nvPr/>
-        </p:nvSpPr>
-        <p:spPr>
-          <a:xfrm>
-            <a:off x="4787900" y="1895093"/>
-            <a:ext cx="831959" cy="210314"/>
-          </a:xfrm>
-          <a:prstGeom prst="rect">
-            <a:avLst/>
-          </a:prstGeom>
-          <a:ln w="12700">
-            <a:miter lim="400000"/>
-          </a:ln>
-          <a:extLst>
-            <a:ext uri="{C572A759-6A51-4108-AA02-DFA0A04FC94B}">
-              <ma14:wrappingTextBoxFlag xmlns:ma14="http://schemas.microsoft.com/office/mac/drawingml/2011/main" xmlns:a14="http://schemas.microsoft.com/office/drawing/2010/main" xmlns:m="http://schemas.openxmlformats.org/officeDocument/2006/math" xmlns="" val="1"/>
-            </a:ext>
-          </a:extLst>
-        </p:spPr>
-        <p:txBody>
-          <a:bodyPr wrap="none" lIns="12700" tIns="12700" rIns="12700" bIns="12700" anchor="ctr">
-            <a:spAutoFit/>
-          </a:bodyPr>
-          <a:lstStyle/>
-          <a:p>
-            <a:pPr lvl="1" indent="0"/>
-            <a:r>
-              <a:rPr lang="en-GB" dirty="0"/>
-              <a:t>LINE CHART</a:t>
-            </a:r>
-            <a:endParaRPr dirty="0"/>
-          </a:p>
-        </p:txBody>
-      </p:sp>
-      <p:sp>
-        <p:nvSpPr>
-          <p:cNvPr id="41" name="ggplot(mpg, aes(hwy, cty)) +…">
-            <a:extLst>
-              <a:ext uri="{FF2B5EF4-FFF2-40B4-BE49-F238E27FC236}">
-                <a16:creationId xmlns:a16="http://schemas.microsoft.com/office/drawing/2014/main" id="{E50B1236-153C-3B73-CD90-A26898249BB0}"/>
-              </a:ext>
-            </a:extLst>
-          </p:cNvPr>
-          <p:cNvSpPr txBox="1"/>
-          <p:nvPr/>
-        </p:nvSpPr>
-        <p:spPr>
-          <a:xfrm>
-            <a:off x="4790652" y="2208553"/>
-            <a:ext cx="4296974" cy="5475777"/>
-          </a:xfrm>
-          <a:prstGeom prst="rect">
-            <a:avLst/>
-          </a:prstGeom>
-          <a:solidFill>
-            <a:srgbClr val="FFFFFF"/>
-          </a:solidFill>
-          <a:ln w="12700">
-            <a:solidFill>
-              <a:srgbClr val="A6AAA9"/>
-            </a:solidFill>
-            <a:miter lim="400000"/>
-          </a:ln>
-          <a:extLst>
-            <a:ext uri="{C572A759-6A51-4108-AA02-DFA0A04FC94B}">
-              <ma14:wrappingTextBoxFlag xmlns:ma14="http://schemas.microsoft.com/office/mac/drawingml/2011/main" xmlns:a14="http://schemas.microsoft.com/office/drawing/2010/main" xmlns:m="http://schemas.openxmlformats.org/officeDocument/2006/math" xmlns="" val="1"/>
-            </a:ext>
-          </a:extLst>
-        </p:spPr>
-        <p:txBody>
-          <a:bodyPr wrap="square" lIns="54570" tIns="54570" rIns="54570" bIns="54570" anchor="ctr">
-            <a:spAutoFit/>
-          </a:bodyPr>
-          <a:lstStyle/>
-          <a:p>
-            <a:r>
-              <a:rPr lang="en-GB" b="0" dirty="0"/>
-              <a:t>plot &lt;- </a:t>
-            </a:r>
-            <a:r>
-              <a:rPr lang="en-GB" b="0" dirty="0" err="1"/>
-              <a:t>ggplot</a:t>
-            </a:r>
-            <a:r>
-              <a:rPr lang="en-GB" b="0" dirty="0"/>
-              <a:t>(</a:t>
-            </a:r>
-          </a:p>
-          <a:p>
-            <a:r>
-              <a:rPr lang="en-GB" b="0" dirty="0"/>
-              <a:t>       data = &lt;data&gt;,</a:t>
-            </a:r>
-          </a:p>
-          <a:p>
-            <a:r>
-              <a:rPr lang="en-GB" b="0" dirty="0"/>
-              <a:t>       mapping = </a:t>
-            </a:r>
-            <a:r>
-              <a:rPr lang="en-GB" b="0" dirty="0" err="1"/>
-              <a:t>aes</a:t>
-            </a:r>
-            <a:r>
-              <a:rPr lang="en-GB" b="0" dirty="0"/>
-              <a:t>(x = &lt;x&gt;, y = &lt;y&gt;)</a:t>
-            </a:r>
-          </a:p>
-          <a:p>
-            <a:r>
-              <a:rPr lang="en-GB" b="0" dirty="0"/>
-              <a:t>) +</a:t>
-            </a:r>
-          </a:p>
-          <a:p>
-            <a:r>
-              <a:rPr lang="en-GB" b="0" dirty="0"/>
-              <a:t>    </a:t>
-            </a:r>
-          </a:p>
-          <a:p>
-            <a:r>
-              <a:rPr lang="en-GB" b="0" dirty="0" err="1"/>
-              <a:t>geom_line</a:t>
-            </a:r>
-            <a:r>
-              <a:rPr lang="en-GB" b="0" dirty="0"/>
-              <a:t>(</a:t>
-            </a:r>
-            <a:r>
-              <a:rPr lang="en-GB" b="0" dirty="0" err="1"/>
-              <a:t>color</a:t>
-            </a:r>
-            <a:r>
-              <a:rPr lang="en-GB" b="0" dirty="0"/>
-              <a:t> = </a:t>
-            </a:r>
-            <a:r>
-              <a:rPr lang="en-GB" b="0" dirty="0" err="1"/>
-              <a:t>commonslib_color</a:t>
-            </a:r>
-            <a:r>
-              <a:rPr lang="en-GB" b="0" dirty="0"/>
-              <a:t>(“</a:t>
-            </a:r>
-            <a:r>
-              <a:rPr lang="en-GB" b="0" dirty="0" err="1"/>
-              <a:t>commons_green</a:t>
-            </a:r>
-            <a:r>
-              <a:rPr lang="en-GB" b="0" dirty="0"/>
-              <a:t>”), size = 1.1) +</a:t>
-            </a:r>
-          </a:p>
-          <a:p>
-            <a:endParaRPr lang="en-GB" b="0" dirty="0"/>
-          </a:p>
-          <a:p>
-            <a:r>
-              <a:rPr lang="en-GB" b="0" dirty="0"/>
-              <a:t>labs(</a:t>
-            </a:r>
-          </a:p>
-          <a:p>
-            <a:r>
-              <a:rPr lang="en-GB" b="0" dirty="0"/>
-              <a:t>        x = &lt;x&gt;,</a:t>
-            </a:r>
-          </a:p>
-          <a:p>
-            <a:r>
-              <a:rPr lang="en-GB" b="0" dirty="0"/>
-              <a:t>        y = &lt;y&gt;) +</a:t>
-            </a:r>
-          </a:p>
-          <a:p>
-            <a:endParaRPr lang="en-GB" b="0" dirty="0"/>
-          </a:p>
-          <a:p>
-            <a:r>
-              <a:rPr lang="en-GB" b="0" dirty="0"/>
-              <a:t> </a:t>
-            </a:r>
-            <a:r>
-              <a:rPr lang="en-GB" b="0" dirty="0" err="1"/>
-              <a:t>scale_x_continuous</a:t>
-            </a:r>
-            <a:r>
-              <a:rPr lang="en-GB" b="0" dirty="0"/>
-              <a:t>(breaks = </a:t>
-            </a:r>
-            <a:r>
-              <a:rPr lang="en-GB" b="0" dirty="0" err="1"/>
-              <a:t>seq</a:t>
-            </a:r>
-            <a:r>
-              <a:rPr lang="en-GB" b="0" dirty="0"/>
-              <a:t>(0, 10, 2)) +</a:t>
-            </a:r>
-          </a:p>
-          <a:p>
-            <a:r>
-              <a:rPr lang="en-GB" b="0" dirty="0"/>
-              <a:t> </a:t>
-            </a:r>
-            <a:r>
-              <a:rPr lang="en-GB" b="0" dirty="0" err="1"/>
-              <a:t>scale_y_continuous</a:t>
-            </a:r>
-            <a:r>
-              <a:rPr lang="en-GB" b="0" dirty="0"/>
-              <a:t>(limits = c(0, 20)) +</a:t>
-            </a:r>
-          </a:p>
-          <a:p>
-            <a:endParaRPr lang="en-GB" b="0" dirty="0"/>
-          </a:p>
-          <a:p>
-            <a:r>
-              <a:rPr lang="en-GB" b="0" dirty="0"/>
-              <a:t> </a:t>
-            </a:r>
-            <a:r>
-              <a:rPr lang="en-GB" b="0" dirty="0" err="1"/>
-              <a:t>theme_commonslib</a:t>
-            </a:r>
-            <a:r>
-              <a:rPr lang="en-GB" b="0" dirty="0"/>
-              <a:t>() </a:t>
-            </a:r>
-          </a:p>
-          <a:p>
-            <a:endParaRPr lang="en-GB" b="0" dirty="0"/>
-          </a:p>
-          <a:p>
-            <a:r>
-              <a:rPr lang="en-GB" b="0" dirty="0"/>
-              <a:t>plot &lt;- plot + </a:t>
-            </a:r>
-            <a:r>
-              <a:rPr lang="en-GB" b="0" dirty="0" err="1"/>
-              <a:t>add_commonslib_titles</a:t>
-            </a:r>
-            <a:r>
-              <a:rPr lang="en-GB" b="0" dirty="0"/>
-              <a:t>(</a:t>
-            </a:r>
-          </a:p>
-          <a:p>
-            <a:r>
-              <a:rPr lang="en-GB" b="0" dirty="0"/>
-              <a:t>   plot,</a:t>
-            </a:r>
-          </a:p>
-          <a:p>
-            <a:r>
-              <a:rPr lang="en-GB" b="0" dirty="0"/>
-              <a:t>   title = &lt;title&gt;,</a:t>
-            </a:r>
-          </a:p>
-          <a:p>
-            <a:r>
-              <a:rPr lang="en-GB" b="0" dirty="0"/>
-              <a:t>    subtitle = &lt;title&gt;</a:t>
-            </a:r>
-          </a:p>
-          <a:p>
-            <a:r>
-              <a:rPr lang="en-GB" b="0" dirty="0"/>
-              <a:t>)</a:t>
-            </a:r>
-          </a:p>
-          <a:p>
-            <a:r>
-              <a:rPr lang="en-GB" b="0" dirty="0"/>
-              <a:t># Save the plot</a:t>
-            </a:r>
-          </a:p>
-          <a:p>
-            <a:r>
-              <a:rPr lang="en-GB" b="0" dirty="0" err="1"/>
-              <a:t>save_png</a:t>
-            </a:r>
-            <a:r>
-              <a:rPr lang="en-GB" b="0" dirty="0"/>
-              <a:t>(plot, “&lt;</a:t>
-            </a:r>
-            <a:r>
-              <a:rPr lang="en-GB" b="0" dirty="0" err="1"/>
-              <a:t>plotname</a:t>
-            </a:r>
-            <a:r>
-              <a:rPr lang="en-GB" b="0" dirty="0"/>
-              <a:t>&gt;.png", width = 8, height = 5)</a:t>
-            </a:r>
-          </a:p>
-          <a:p>
-            <a:pPr>
-              <a:spcBef>
-                <a:spcPts val="0"/>
-              </a:spcBef>
-              <a:defRPr b="0">
-                <a:solidFill>
-                  <a:srgbClr val="000000"/>
-                </a:solidFill>
-                <a:latin typeface="Menlo"/>
-                <a:ea typeface="Menlo"/>
-                <a:cs typeface="Menlo"/>
-                <a:sym typeface="Menlo"/>
-              </a:defRPr>
-            </a:pPr>
-            <a:endParaRPr lang="en-GB" dirty="0"/>
-          </a:p>
-          <a:p>
-            <a:pPr>
-              <a:spcBef>
-                <a:spcPts val="0"/>
-              </a:spcBef>
-              <a:defRPr b="0">
-                <a:solidFill>
-                  <a:srgbClr val="000000"/>
-                </a:solidFill>
-                <a:latin typeface="Menlo"/>
-                <a:ea typeface="Menlo"/>
-                <a:cs typeface="Menlo"/>
-                <a:sym typeface="Menlo"/>
-              </a:defRPr>
-            </a:pPr>
-            <a:endParaRPr dirty="0"/>
-          </a:p>
-        </p:txBody>
-      </p:sp>
-      <p:sp>
-        <p:nvSpPr>
-          <p:cNvPr id="388" name="Word balloons"/>
-          <p:cNvSpPr/>
-          <p:nvPr/>
-        </p:nvSpPr>
-        <p:spPr>
-          <a:xfrm>
-            <a:off x="6761654" y="1908366"/>
-            <a:ext cx="2258965" cy="739480"/>
-          </a:xfrm>
-          <a:custGeom>
-            <a:avLst/>
-            <a:gdLst/>
-            <a:ahLst/>
-            <a:cxnLst>
-              <a:cxn ang="0">
-                <a:pos x="wd2" y="hd2"/>
-              </a:cxn>
-              <a:cxn ang="5400000">
-                <a:pos x="wd2" y="hd2"/>
-              </a:cxn>
-              <a:cxn ang="10800000">
-                <a:pos x="wd2" y="hd2"/>
-              </a:cxn>
-              <a:cxn ang="16200000">
-                <a:pos x="wd2" y="hd2"/>
-              </a:cxn>
-            </a:cxnLst>
-            <a:rect l="0" t="0" r="r" b="b"/>
-            <a:pathLst>
-              <a:path w="21600" h="21600" extrusionOk="0">
-                <a:moveTo>
-                  <a:pt x="5136" y="0"/>
-                </a:moveTo>
-                <a:cubicBezTo>
-                  <a:pt x="4296" y="0"/>
-                  <a:pt x="3611" y="1497"/>
-                  <a:pt x="3611" y="3334"/>
-                </a:cubicBezTo>
-                <a:lnTo>
-                  <a:pt x="3611" y="15677"/>
-                </a:lnTo>
-                <a:lnTo>
-                  <a:pt x="0" y="21600"/>
-                </a:lnTo>
-                <a:lnTo>
-                  <a:pt x="4909" y="19951"/>
-                </a:lnTo>
-                <a:cubicBezTo>
-                  <a:pt x="4986" y="19977"/>
-                  <a:pt x="5056" y="20057"/>
-                  <a:pt x="5136" y="20057"/>
-                </a:cubicBezTo>
-                <a:lnTo>
-                  <a:pt x="20083" y="20057"/>
-                </a:lnTo>
-                <a:cubicBezTo>
-                  <a:pt x="20923" y="20057"/>
-                  <a:pt x="21600" y="18560"/>
-                  <a:pt x="21600" y="16723"/>
-                </a:cubicBezTo>
-                <a:lnTo>
-                  <a:pt x="21600" y="3334"/>
-                </a:lnTo>
-                <a:cubicBezTo>
-                  <a:pt x="21600" y="1497"/>
-                  <a:pt x="20923" y="0"/>
-                  <a:pt x="20083" y="0"/>
-                </a:cubicBezTo>
-                <a:lnTo>
-                  <a:pt x="5136" y="0"/>
-                </a:lnTo>
-                <a:close/>
-              </a:path>
-            </a:pathLst>
-          </a:custGeom>
-          <a:solidFill>
-            <a:srgbClr val="659FD5"/>
-          </a:solidFill>
-          <a:ln w="12700">
-            <a:miter lim="400000"/>
-          </a:ln>
-          <a:extLst>
-            <a:ext uri="{C572A759-6A51-4108-AA02-DFA0A04FC94B}">
-              <ma14:wrappingTextBoxFlag xmlns:ma14="http://schemas.microsoft.com/office/mac/drawingml/2011/main" xmlns:a14="http://schemas.microsoft.com/office/drawing/2010/main" xmlns:m="http://schemas.openxmlformats.org/officeDocument/2006/math" xmlns="" val="1"/>
-            </a:ext>
-          </a:extLst>
-        </p:spPr>
-        <p:txBody>
-          <a:bodyPr wrap="square" lIns="432000" tIns="72000" rIns="0" bIns="72000" anchor="ctr">
-            <a:spAutoFit/>
-          </a:bodyPr>
-          <a:lstStyle>
-            <a:lvl1pPr algn="ctr">
-              <a:lnSpc>
-                <a:spcPct val="80000"/>
-              </a:lnSpc>
-              <a:spcBef>
-                <a:spcPts val="300"/>
-              </a:spcBef>
-              <a:buClr>
-                <a:schemeClr val="accent4">
-                  <a:hueOff val="384618"/>
-                  <a:satOff val="3869"/>
-                  <a:lumOff val="5802"/>
-                </a:schemeClr>
-              </a:buClr>
-              <a:defRPr>
-                <a:solidFill>
-                  <a:srgbClr val="FFFFFF"/>
-                </a:solidFill>
-              </a:defRPr>
-            </a:lvl1pPr>
-          </a:lstStyle>
-          <a:p>
-            <a:r>
-              <a:rPr lang="en-GB" dirty="0" err="1"/>
-              <a:t>aes</a:t>
-            </a:r>
-            <a:r>
-              <a:rPr lang="en-GB" dirty="0"/>
-              <a:t> maps &lt;x&gt; to x and &lt;y&gt; to y. This can be set here to apply to all </a:t>
-            </a:r>
-            <a:r>
-              <a:rPr lang="en-GB" dirty="0" err="1"/>
-              <a:t>geoms</a:t>
-            </a:r>
-            <a:r>
-              <a:rPr lang="en-GB" dirty="0"/>
-              <a:t>, or set in each geom.</a:t>
-            </a:r>
-            <a:endParaRPr dirty="0"/>
-          </a:p>
-        </p:txBody>
-      </p:sp>
-      <p:sp>
-        <p:nvSpPr>
-          <p:cNvPr id="42" name="Word balloons">
-            <a:extLst>
-              <a:ext uri="{FF2B5EF4-FFF2-40B4-BE49-F238E27FC236}">
-                <a16:creationId xmlns:a16="http://schemas.microsoft.com/office/drawing/2014/main" id="{88349141-AF81-8F5E-49B5-0901D098327C}"/>
-              </a:ext>
-            </a:extLst>
-          </p:cNvPr>
-          <p:cNvSpPr/>
-          <p:nvPr/>
-        </p:nvSpPr>
-        <p:spPr>
-          <a:xfrm>
-            <a:off x="5484055" y="3653591"/>
-            <a:ext cx="2258965" cy="444014"/>
-          </a:xfrm>
-          <a:custGeom>
-            <a:avLst/>
-            <a:gdLst/>
-            <a:ahLst/>
-            <a:cxnLst>
-              <a:cxn ang="0">
-                <a:pos x="wd2" y="hd2"/>
-              </a:cxn>
-              <a:cxn ang="5400000">
-                <a:pos x="wd2" y="hd2"/>
-              </a:cxn>
-              <a:cxn ang="10800000">
-                <a:pos x="wd2" y="hd2"/>
-              </a:cxn>
-              <a:cxn ang="16200000">
-                <a:pos x="wd2" y="hd2"/>
-              </a:cxn>
-            </a:cxnLst>
-            <a:rect l="0" t="0" r="r" b="b"/>
-            <a:pathLst>
-              <a:path w="21600" h="21600" extrusionOk="0">
-                <a:moveTo>
-                  <a:pt x="5136" y="0"/>
-                </a:moveTo>
-                <a:cubicBezTo>
-                  <a:pt x="4296" y="0"/>
-                  <a:pt x="3611" y="1497"/>
-                  <a:pt x="3611" y="3334"/>
-                </a:cubicBezTo>
-                <a:lnTo>
-                  <a:pt x="3611" y="15677"/>
-                </a:lnTo>
-                <a:lnTo>
-                  <a:pt x="0" y="21600"/>
-                </a:lnTo>
-                <a:lnTo>
-                  <a:pt x="4909" y="19951"/>
-                </a:lnTo>
-                <a:cubicBezTo>
-                  <a:pt x="4986" y="19977"/>
-                  <a:pt x="5056" y="20057"/>
-                  <a:pt x="5136" y="20057"/>
-                </a:cubicBezTo>
-                <a:lnTo>
-                  <a:pt x="20083" y="20057"/>
-                </a:lnTo>
-                <a:cubicBezTo>
-                  <a:pt x="20923" y="20057"/>
-                  <a:pt x="21600" y="18560"/>
-                  <a:pt x="21600" y="16723"/>
-                </a:cubicBezTo>
-                <a:lnTo>
-                  <a:pt x="21600" y="3334"/>
-                </a:lnTo>
-                <a:cubicBezTo>
-                  <a:pt x="21600" y="1497"/>
-                  <a:pt x="20923" y="0"/>
-                  <a:pt x="20083" y="0"/>
-                </a:cubicBezTo>
-                <a:lnTo>
-                  <a:pt x="5136" y="0"/>
-                </a:lnTo>
-                <a:close/>
-              </a:path>
-            </a:pathLst>
-          </a:custGeom>
-          <a:solidFill>
-            <a:srgbClr val="659FD5"/>
-          </a:solidFill>
-          <a:ln w="12700">
-            <a:miter lim="400000"/>
-          </a:ln>
-          <a:extLst>
-            <a:ext uri="{C572A759-6A51-4108-AA02-DFA0A04FC94B}">
-              <ma14:wrappingTextBoxFlag xmlns:ma14="http://schemas.microsoft.com/office/mac/drawingml/2011/main" xmlns:a14="http://schemas.microsoft.com/office/drawing/2010/main" xmlns:m="http://schemas.openxmlformats.org/officeDocument/2006/math" xmlns="" val="1"/>
-            </a:ext>
-          </a:extLst>
-        </p:spPr>
-        <p:txBody>
-          <a:bodyPr wrap="square" lIns="432000" tIns="72000" rIns="0" bIns="72000" anchor="ctr">
-            <a:spAutoFit/>
-          </a:bodyPr>
-          <a:lstStyle>
-            <a:lvl1pPr algn="ctr">
-              <a:lnSpc>
-                <a:spcPct val="80000"/>
-              </a:lnSpc>
-              <a:spcBef>
-                <a:spcPts val="300"/>
-              </a:spcBef>
-              <a:buClr>
-                <a:schemeClr val="accent4">
-                  <a:hueOff val="384618"/>
-                  <a:satOff val="3869"/>
-                  <a:lumOff val="5802"/>
-                </a:schemeClr>
-              </a:buClr>
-              <a:defRPr>
-                <a:solidFill>
-                  <a:srgbClr val="FFFFFF"/>
-                </a:solidFill>
-              </a:defRPr>
-            </a:lvl1pPr>
-          </a:lstStyle>
-          <a:p>
-            <a:r>
-              <a:rPr lang="en-GB" dirty="0"/>
-              <a:t>Set x and y axes labels here</a:t>
-            </a:r>
-            <a:endParaRPr dirty="0"/>
-          </a:p>
-        </p:txBody>
-      </p:sp>
-      <p:sp>
-        <p:nvSpPr>
-          <p:cNvPr id="43" name="Word balloons">
-            <a:extLst>
-              <a:ext uri="{FF2B5EF4-FFF2-40B4-BE49-F238E27FC236}">
-                <a16:creationId xmlns:a16="http://schemas.microsoft.com/office/drawing/2014/main" id="{0BEE3BE4-659E-A5E5-2DE4-6B4B28562983}"/>
-              </a:ext>
-            </a:extLst>
-          </p:cNvPr>
-          <p:cNvSpPr/>
-          <p:nvPr/>
-        </p:nvSpPr>
-        <p:spPr>
-          <a:xfrm>
-            <a:off x="7539125" y="4022857"/>
-            <a:ext cx="1544694" cy="739480"/>
-          </a:xfrm>
-          <a:custGeom>
-            <a:avLst/>
-            <a:gdLst/>
-            <a:ahLst/>
-            <a:cxnLst>
-              <a:cxn ang="0">
-                <a:pos x="wd2" y="hd2"/>
-              </a:cxn>
-              <a:cxn ang="5400000">
-                <a:pos x="wd2" y="hd2"/>
-              </a:cxn>
-              <a:cxn ang="10800000">
-                <a:pos x="wd2" y="hd2"/>
-              </a:cxn>
-              <a:cxn ang="16200000">
-                <a:pos x="wd2" y="hd2"/>
-              </a:cxn>
-            </a:cxnLst>
-            <a:rect l="0" t="0" r="r" b="b"/>
-            <a:pathLst>
-              <a:path w="21600" h="21600" extrusionOk="0">
-                <a:moveTo>
-                  <a:pt x="5136" y="0"/>
-                </a:moveTo>
-                <a:cubicBezTo>
-                  <a:pt x="4296" y="0"/>
-                  <a:pt x="3611" y="1497"/>
-                  <a:pt x="3611" y="3334"/>
-                </a:cubicBezTo>
-                <a:lnTo>
-                  <a:pt x="3611" y="15677"/>
-                </a:lnTo>
-                <a:lnTo>
-                  <a:pt x="0" y="21600"/>
-                </a:lnTo>
-                <a:lnTo>
-                  <a:pt x="4909" y="19951"/>
-                </a:lnTo>
-                <a:cubicBezTo>
-                  <a:pt x="4986" y="19977"/>
-                  <a:pt x="5056" y="20057"/>
-                  <a:pt x="5136" y="20057"/>
-                </a:cubicBezTo>
-                <a:lnTo>
-                  <a:pt x="20083" y="20057"/>
-                </a:lnTo>
-                <a:cubicBezTo>
-                  <a:pt x="20923" y="20057"/>
-                  <a:pt x="21600" y="18560"/>
-                  <a:pt x="21600" y="16723"/>
-                </a:cubicBezTo>
-                <a:lnTo>
-                  <a:pt x="21600" y="3334"/>
-                </a:lnTo>
-                <a:cubicBezTo>
-                  <a:pt x="21600" y="1497"/>
-                  <a:pt x="20923" y="0"/>
-                  <a:pt x="20083" y="0"/>
-                </a:cubicBezTo>
-                <a:lnTo>
-                  <a:pt x="5136" y="0"/>
-                </a:lnTo>
-                <a:close/>
-              </a:path>
-            </a:pathLst>
-          </a:custGeom>
-          <a:solidFill>
-            <a:srgbClr val="659FD5"/>
-          </a:solidFill>
-          <a:ln w="12700">
-            <a:miter lim="400000"/>
-          </a:ln>
-          <a:extLst>
-            <a:ext uri="{C572A759-6A51-4108-AA02-DFA0A04FC94B}">
-              <ma14:wrappingTextBoxFlag xmlns:ma14="http://schemas.microsoft.com/office/mac/drawingml/2011/main" xmlns:a14="http://schemas.microsoft.com/office/drawing/2010/main" xmlns:m="http://schemas.openxmlformats.org/officeDocument/2006/math" xmlns="" val="1"/>
-            </a:ext>
-          </a:extLst>
-        </p:spPr>
-        <p:txBody>
-          <a:bodyPr wrap="square" lIns="252000" tIns="72000" rIns="0" bIns="72000" anchor="ctr">
-            <a:spAutoFit/>
-          </a:bodyPr>
-          <a:lstStyle>
-            <a:lvl1pPr algn="ctr">
-              <a:lnSpc>
-                <a:spcPct val="80000"/>
-              </a:lnSpc>
-              <a:spcBef>
-                <a:spcPts val="300"/>
-              </a:spcBef>
-              <a:buClr>
-                <a:schemeClr val="accent4">
-                  <a:hueOff val="384618"/>
-                  <a:satOff val="3869"/>
-                  <a:lumOff val="5802"/>
-                </a:schemeClr>
-              </a:buClr>
-              <a:defRPr>
-                <a:solidFill>
-                  <a:srgbClr val="FFFFFF"/>
-                </a:solidFill>
-              </a:defRPr>
-            </a:lvl1pPr>
-          </a:lstStyle>
-          <a:p>
-            <a:r>
-              <a:rPr lang="en-GB" dirty="0"/>
-              <a:t>Control axes: x is from 0 to 10 in steps of  2, y is between 0 and 20</a:t>
-            </a:r>
-            <a:endParaRPr dirty="0"/>
-          </a:p>
-        </p:txBody>
-      </p:sp>
       <p:grpSp>
         <p:nvGrpSpPr>
           <p:cNvPr id="453" name="Group 452">
@@ -7377,7 +4189,7 @@
         </p:nvGrpSpPr>
         <p:grpSpPr>
           <a:xfrm>
-            <a:off x="9435669" y="2105407"/>
+            <a:off x="9435669" y="1813307"/>
             <a:ext cx="2406590" cy="1413713"/>
             <a:chOff x="9536868" y="2236471"/>
             <a:chExt cx="2406590" cy="1413713"/>
@@ -9181,7 +5993,7 @@
           </a:ln>
           <a:extLst>
             <a:ext uri="{C572A759-6A51-4108-AA02-DFA0A04FC94B}">
-              <ma14:wrappingTextBoxFlag xmlns:ma14="http://schemas.microsoft.com/office/mac/drawingml/2011/main" xmlns:a14="http://schemas.microsoft.com/office/drawing/2010/main" xmlns:m="http://schemas.openxmlformats.org/officeDocument/2006/math" xmlns="" val="1"/>
+              <ma14:wrappingTextBoxFlag xmlns="" xmlns:m="http://schemas.openxmlformats.org/officeDocument/2006/math" xmlns:a14="http://schemas.microsoft.com/office/drawing/2010/main" xmlns:ma14="http://schemas.microsoft.com/office/mac/drawingml/2011/main" val="1"/>
             </a:ext>
           </a:extLst>
         </p:spPr>
@@ -9269,7 +6081,7 @@
           </a:ln>
           <a:extLst>
             <a:ext uri="{C572A759-6A51-4108-AA02-DFA0A04FC94B}">
-              <ma14:wrappingTextBoxFlag xmlns:ma14="http://schemas.microsoft.com/office/mac/drawingml/2011/main" xmlns:a14="http://schemas.microsoft.com/office/drawing/2010/main" xmlns:m="http://schemas.openxmlformats.org/officeDocument/2006/math" xmlns="" val="1"/>
+              <ma14:wrappingTextBoxFlag xmlns="" xmlns:m="http://schemas.openxmlformats.org/officeDocument/2006/math" xmlns:a14="http://schemas.microsoft.com/office/drawing/2010/main" xmlns:ma14="http://schemas.microsoft.com/office/mac/drawingml/2011/main" val="1"/>
             </a:ext>
           </a:extLst>
         </p:spPr>
@@ -9339,7 +6151,7 @@
             </a:ln>
             <a:extLst>
               <a:ext uri="{C572A759-6A51-4108-AA02-DFA0A04FC94B}">
-                <ma14:wrappingTextBoxFlag xmlns:ma14="http://schemas.microsoft.com/office/mac/drawingml/2011/main" xmlns:a14="http://schemas.microsoft.com/office/drawing/2010/main" xmlns:m="http://schemas.openxmlformats.org/officeDocument/2006/math" xmlns="" val="1"/>
+                <ma14:wrappingTextBoxFlag xmlns="" xmlns:m="http://schemas.openxmlformats.org/officeDocument/2006/math" xmlns:a14="http://schemas.microsoft.com/office/drawing/2010/main" xmlns:ma14="http://schemas.microsoft.com/office/mac/drawingml/2011/main" val="1"/>
               </a:ext>
             </a:extLst>
           </p:spPr>
@@ -11603,8 +8415,8 @@
         </p:nvSpPr>
         <p:spPr>
           <a:xfrm>
-            <a:off x="9328037" y="6009413"/>
-            <a:ext cx="7020426" cy="692562"/>
+            <a:off x="9205103" y="6404565"/>
+            <a:ext cx="7020426" cy="655436"/>
           </a:xfrm>
           <a:prstGeom prst="rect">
             <a:avLst/>
@@ -11649,19 +8461,19 @@
               </a:defRPr>
             </a:pPr>
             <a:r>
-              <a:rPr lang="en-GB" dirty="0" err="1"/>
+              <a:rPr lang="en-GB" sz="1100" dirty="0" err="1"/>
               <a:t>scale_color_commonslib</a:t>
             </a:r>
             <a:r>
-              <a:rPr lang="en-GB" dirty="0"/>
+              <a:rPr lang="en-GB" sz="1100" dirty="0"/>
               <a:t>(palette=&lt;</a:t>
             </a:r>
             <a:r>
-              <a:rPr lang="en-GB" dirty="0" err="1"/>
+              <a:rPr lang="en-GB" sz="1100" dirty="0" err="1"/>
               <a:t>palette_name</a:t>
             </a:r>
             <a:r>
-              <a:rPr lang="en-GB" dirty="0"/>
+              <a:rPr lang="en-GB" sz="1100" dirty="0"/>
               <a:t>&gt;)</a:t>
             </a:r>
           </a:p>
@@ -11679,7 +8491,7 @@
                 </a:solidFill>
               </a:defRPr>
             </a:pPr>
-            <a:endParaRPr lang="en-GB" dirty="0"/>
+            <a:endParaRPr lang="en-GB" sz="1100" dirty="0"/>
           </a:p>
           <a:p>
             <a:pPr>
@@ -11696,19 +8508,19 @@
               </a:defRPr>
             </a:pPr>
             <a:r>
-              <a:rPr lang="en-GB" dirty="0" err="1"/>
+              <a:rPr lang="en-GB" sz="1100" dirty="0" err="1"/>
               <a:t>scale_fill_commonslib</a:t>
             </a:r>
             <a:r>
-              <a:rPr lang="en-GB" dirty="0"/>
+              <a:rPr lang="en-GB" sz="1100" dirty="0"/>
               <a:t>(palette=&lt;</a:t>
             </a:r>
             <a:r>
-              <a:rPr lang="en-GB" dirty="0" err="1"/>
+              <a:rPr lang="en-GB" sz="1100" dirty="0" err="1"/>
               <a:t>palette_name</a:t>
             </a:r>
             <a:r>
-              <a:rPr lang="en-GB" dirty="0"/>
+              <a:rPr lang="en-GB" sz="1100" dirty="0"/>
               <a:t>&gt;)</a:t>
             </a:r>
           </a:p>
@@ -11749,7 +8561,7 @@
             <p:nvPr/>
           </p:nvPicPr>
           <p:blipFill>
-            <a:blip r:embed="rId9"/>
+            <a:blip r:embed="rId6"/>
             <a:stretch>
               <a:fillRect/>
             </a:stretch>
@@ -11924,8 +8736,8 @@
         </p:nvSpPr>
         <p:spPr>
           <a:xfrm>
-            <a:off x="4807883" y="9243811"/>
-            <a:ext cx="1234215" cy="1125868"/>
+            <a:off x="4807883" y="9382310"/>
+            <a:ext cx="1234215" cy="848870"/>
           </a:xfrm>
           <a:prstGeom prst="rect">
             <a:avLst/>
@@ -11941,7 +8753,7 @@
           </a:ln>
           <a:extLst>
             <a:ext uri="{C572A759-6A51-4108-AA02-DFA0A04FC94B}">
-              <ma14:wrappingTextBoxFlag xmlns:ma14="http://schemas.microsoft.com/office/mac/drawingml/2011/main" xmlns:a14="http://schemas.microsoft.com/office/drawing/2010/main" xmlns:m="http://schemas.openxmlformats.org/officeDocument/2006/math" xmlns="" val="1"/>
+              <ma14:wrappingTextBoxFlag xmlns="" xmlns:m="http://schemas.openxmlformats.org/officeDocument/2006/math" xmlns:a14="http://schemas.microsoft.com/office/drawing/2010/main" xmlns:ma14="http://schemas.microsoft.com/office/mac/drawingml/2011/main" val="1"/>
             </a:ext>
           </a:extLst>
         </p:spPr>
@@ -11966,7 +8778,7 @@
               </a:defRPr>
             </a:pPr>
             <a:r>
-              <a:rPr lang="en-GB" sz="900" dirty="0"/>
+              <a:rPr lang="en-GB" sz="800" dirty="0"/>
               <a:t>labs(caption=&lt;caption&gt;) +</a:t>
             </a:r>
           </a:p>
@@ -11986,11 +8798,11 @@
               </a:defRPr>
             </a:pPr>
             <a:r>
-              <a:rPr lang="en-GB" sz="900" dirty="0" err="1"/>
+              <a:rPr lang="en-GB" sz="800" dirty="0" err="1"/>
               <a:t>theme_commonslib</a:t>
             </a:r>
             <a:r>
-              <a:rPr lang="en-GB" sz="900" dirty="0"/>
+              <a:rPr lang="en-GB" sz="800" dirty="0"/>
               <a:t>(</a:t>
             </a:r>
           </a:p>
@@ -12010,19 +8822,19 @@
               </a:defRPr>
             </a:pPr>
             <a:r>
-              <a:rPr lang="en-GB" sz="900" dirty="0" err="1"/>
+              <a:rPr lang="en-GB" sz="800" dirty="0" err="1"/>
               <a:t>caption_position</a:t>
             </a:r>
             <a:r>
-              <a:rPr lang="en-GB" sz="900" dirty="0"/>
+              <a:rPr lang="en-GB" sz="800" dirty="0"/>
               <a:t>=&lt;</a:t>
             </a:r>
             <a:r>
-              <a:rPr lang="en-GB" sz="900" dirty="0" err="1"/>
+              <a:rPr lang="en-GB" sz="800" dirty="0" err="1"/>
               <a:t>left|right</a:t>
             </a:r>
             <a:r>
-              <a:rPr lang="en-GB" sz="900" dirty="0"/>
+              <a:rPr lang="en-GB" sz="800" dirty="0"/>
               <a:t>&gt;</a:t>
             </a:r>
           </a:p>
@@ -12042,7 +8854,7 @@
               </a:defRPr>
             </a:pPr>
             <a:r>
-              <a:rPr lang="en-GB" sz="900" dirty="0"/>
+              <a:rPr lang="en-GB" sz="800" dirty="0"/>
               <a:t>)</a:t>
             </a:r>
           </a:p>
@@ -12061,7 +8873,7 @@
                 <a:sym typeface="Menlo"/>
               </a:defRPr>
             </a:pPr>
-            <a:endParaRPr dirty="0"/>
+            <a:endParaRPr sz="800" dirty="0"/>
           </a:p>
         </p:txBody>
       </p:sp>
@@ -12348,7 +9160,7 @@
             <p:nvPr/>
           </p:nvPicPr>
           <p:blipFill>
-            <a:blip r:embed="rId9"/>
+            <a:blip r:embed="rId6"/>
             <a:stretch>
               <a:fillRect/>
             </a:stretch>
@@ -12623,7 +9435,7 @@
           </a:ln>
           <a:extLst>
             <a:ext uri="{C572A759-6A51-4108-AA02-DFA0A04FC94B}">
-              <ma14:wrappingTextBoxFlag xmlns:ma14="http://schemas.microsoft.com/office/mac/drawingml/2011/main" xmlns:a14="http://schemas.microsoft.com/office/drawing/2010/main" xmlns:m="http://schemas.openxmlformats.org/officeDocument/2006/math" xmlns="" val="1"/>
+              <ma14:wrappingTextBoxFlag xmlns="" xmlns:m="http://schemas.openxmlformats.org/officeDocument/2006/math" xmlns:a14="http://schemas.microsoft.com/office/drawing/2010/main" xmlns:ma14="http://schemas.microsoft.com/office/mac/drawingml/2011/main" val="1"/>
             </a:ext>
           </a:extLst>
         </p:spPr>
@@ -12690,7 +9502,7 @@
             <p:nvPr/>
           </p:nvPicPr>
           <p:blipFill>
-            <a:blip r:embed="rId9"/>
+            <a:blip r:embed="rId6"/>
             <a:stretch>
               <a:fillRect/>
             </a:stretch>
@@ -12882,7 +9694,7 @@
           </a:ln>
           <a:extLst>
             <a:ext uri="{C572A759-6A51-4108-AA02-DFA0A04FC94B}">
-              <ma14:wrappingTextBoxFlag xmlns:ma14="http://schemas.microsoft.com/office/mac/drawingml/2011/main" xmlns:a14="http://schemas.microsoft.com/office/drawing/2010/main" xmlns:m="http://schemas.openxmlformats.org/officeDocument/2006/math" xmlns="" val="1"/>
+              <ma14:wrappingTextBoxFlag xmlns="" xmlns:m="http://schemas.openxmlformats.org/officeDocument/2006/math" xmlns:a14="http://schemas.microsoft.com/office/drawing/2010/main" xmlns:ma14="http://schemas.microsoft.com/office/mac/drawingml/2011/main" val="1"/>
             </a:ext>
           </a:extLst>
         </p:spPr>
@@ -13031,7 +9843,7 @@
             <p:nvPr/>
           </p:nvPicPr>
           <p:blipFill>
-            <a:blip r:embed="rId9"/>
+            <a:blip r:embed="rId6"/>
             <a:stretch>
               <a:fillRect/>
             </a:stretch>
@@ -13206,7 +10018,7 @@
         </p:nvSpPr>
         <p:spPr>
           <a:xfrm>
-            <a:off x="8456810" y="9109578"/>
+            <a:off x="8502428" y="8940863"/>
             <a:ext cx="1234215" cy="1402867"/>
           </a:xfrm>
           <a:prstGeom prst="rect">
@@ -13223,7 +10035,7 @@
           </a:ln>
           <a:extLst>
             <a:ext uri="{C572A759-6A51-4108-AA02-DFA0A04FC94B}">
-              <ma14:wrappingTextBoxFlag xmlns:ma14="http://schemas.microsoft.com/office/mac/drawingml/2011/main" xmlns:a14="http://schemas.microsoft.com/office/drawing/2010/main" xmlns:m="http://schemas.openxmlformats.org/officeDocument/2006/math" xmlns="" val="1"/>
+              <ma14:wrappingTextBoxFlag xmlns="" xmlns:m="http://schemas.openxmlformats.org/officeDocument/2006/math" xmlns:a14="http://schemas.microsoft.com/office/drawing/2010/main" xmlns:ma14="http://schemas.microsoft.com/office/mac/drawingml/2011/main" val="1"/>
             </a:ext>
           </a:extLst>
         </p:spPr>
@@ -13248,11 +10060,11 @@
               </a:defRPr>
             </a:pPr>
             <a:r>
-              <a:rPr lang="en-GB" sz="900" dirty="0" err="1"/>
+              <a:rPr lang="en-GB" sz="800" dirty="0" err="1"/>
               <a:t>annotate_commonslib</a:t>
             </a:r>
             <a:r>
-              <a:rPr lang="en-GB" sz="900" dirty="0"/>
+              <a:rPr lang="en-GB" sz="800" dirty="0"/>
               <a:t>(</a:t>
             </a:r>
           </a:p>
@@ -13272,7 +10084,7 @@
               </a:defRPr>
             </a:pPr>
             <a:r>
-              <a:rPr lang="en-GB" sz="900" dirty="0"/>
+              <a:rPr lang="en-GB" sz="800" dirty="0"/>
               <a:t>x=&lt;x&gt;, y=&lt;y&gt;, label=&lt;label&gt;,</a:t>
             </a:r>
           </a:p>
@@ -13292,7 +10104,7 @@
               </a:defRPr>
             </a:pPr>
             <a:r>
-              <a:rPr lang="en-GB" sz="900" dirty="0"/>
+              <a:rPr lang="en-GB" sz="800" dirty="0"/>
               <a:t>size=4.2)</a:t>
             </a:r>
           </a:p>
@@ -13311,7 +10123,7 @@
                 <a:sym typeface="Menlo"/>
               </a:defRPr>
             </a:pPr>
-            <a:endParaRPr lang="en-GB" sz="900" dirty="0"/>
+            <a:endParaRPr lang="en-GB" sz="800" dirty="0"/>
           </a:p>
           <a:p>
             <a:pPr>
@@ -13329,8 +10141,45 @@
               </a:defRPr>
             </a:pPr>
             <a:r>
-              <a:rPr lang="en-GB" sz="900" dirty="0"/>
+              <a:rPr lang="en-GB" sz="800" dirty="0"/>
               <a:t>Equivalent to 12pt, size is in mm (1 pt =0.35mm)</a:t>
+            </a:r>
+          </a:p>
+          <a:p>
+            <a:pPr>
+              <a:spcBef>
+                <a:spcPts val="0"/>
+              </a:spcBef>
+              <a:defRPr b="0">
+                <a:solidFill>
+                  <a:srgbClr val="000000"/>
+                </a:solidFill>
+                <a:latin typeface="Menlo"/>
+                <a:ea typeface="Menlo"/>
+                <a:cs typeface="Menlo"/>
+                <a:sym typeface="Menlo"/>
+              </a:defRPr>
+            </a:pPr>
+            <a:endParaRPr lang="en-GB" sz="800" dirty="0"/>
+          </a:p>
+          <a:p>
+            <a:pPr>
+              <a:spcBef>
+                <a:spcPts val="0"/>
+              </a:spcBef>
+              <a:defRPr b="0">
+                <a:solidFill>
+                  <a:srgbClr val="000000"/>
+                </a:solidFill>
+                <a:latin typeface="Menlo"/>
+                <a:ea typeface="Menlo"/>
+                <a:cs typeface="Menlo"/>
+                <a:sym typeface="Menlo"/>
+              </a:defRPr>
+            </a:pPr>
+            <a:r>
+              <a:rPr lang="en-GB" sz="800" dirty="0"/>
+              <a:t>Puts annotation at &lt;x&gt;,&lt;y&gt;</a:t>
             </a:r>
           </a:p>
           <a:p>
@@ -13448,7 +10297,7 @@
         </p:nvSpPr>
         <p:spPr>
           <a:xfrm>
-            <a:off x="9435669" y="7175351"/>
+            <a:off x="9435669" y="7315051"/>
             <a:ext cx="923330" cy="340029"/>
           </a:xfrm>
           <a:prstGeom prst="rect">
@@ -13459,7 +10308,7 @@
           </a:ln>
           <a:extLst>
             <a:ext uri="{C572A759-6A51-4108-AA02-DFA0A04FC94B}">
-              <ma14:wrappingTextBoxFlag xmlns:ma14="http://schemas.microsoft.com/office/mac/drawingml/2011/main" xmlns:a14="http://schemas.microsoft.com/office/drawing/2010/main" xmlns:m="http://schemas.openxmlformats.org/officeDocument/2006/math" xmlns="" val="1"/>
+              <ma14:wrappingTextBoxFlag xmlns="" xmlns:m="http://schemas.openxmlformats.org/officeDocument/2006/math" xmlns:a14="http://schemas.microsoft.com/office/drawing/2010/main" xmlns:ma14="http://schemas.microsoft.com/office/mac/drawingml/2011/main" val="1"/>
             </a:ext>
           </a:extLst>
         </p:spPr>
@@ -13521,7 +10370,7 @@
           </a:ln>
           <a:extLst>
             <a:ext uri="{C572A759-6A51-4108-AA02-DFA0A04FC94B}">
-              <ma14:wrappingTextBoxFlag xmlns:ma14="http://schemas.microsoft.com/office/mac/drawingml/2011/main" xmlns:a14="http://schemas.microsoft.com/office/drawing/2010/main" xmlns:m="http://schemas.openxmlformats.org/officeDocument/2006/math" xmlns="" val="1"/>
+              <ma14:wrappingTextBoxFlag xmlns="" xmlns:m="http://schemas.openxmlformats.org/officeDocument/2006/math" xmlns:a14="http://schemas.microsoft.com/office/drawing/2010/main" xmlns:ma14="http://schemas.microsoft.com/office/mac/drawingml/2011/main" val="1"/>
             </a:ext>
           </a:extLst>
         </p:spPr>
@@ -13611,7 +10460,7 @@
           </a:ln>
           <a:extLst>
             <a:ext uri="{C572A759-6A51-4108-AA02-DFA0A04FC94B}">
-              <ma14:wrappingTextBoxFlag xmlns:ma14="http://schemas.microsoft.com/office/mac/drawingml/2011/main" xmlns:a14="http://schemas.microsoft.com/office/drawing/2010/main" xmlns:m="http://schemas.openxmlformats.org/officeDocument/2006/math" xmlns="" val="1"/>
+              <ma14:wrappingTextBoxFlag xmlns="" xmlns:m="http://schemas.openxmlformats.org/officeDocument/2006/math" xmlns:a14="http://schemas.microsoft.com/office/drawing/2010/main" xmlns:ma14="http://schemas.microsoft.com/office/mac/drawingml/2011/main" val="1"/>
             </a:ext>
           </a:extLst>
         </p:spPr>
@@ -13753,6 +10602,3667 @@
               </a:defRPr>
             </a:pPr>
             <a:endParaRPr dirty="0"/>
+          </a:p>
+        </p:txBody>
+      </p:sp>
+      <p:sp>
+        <p:nvSpPr>
+          <p:cNvPr id="2" name="Line"/>
+          <p:cNvSpPr/>
+          <p:nvPr/>
+        </p:nvSpPr>
+        <p:spPr>
+          <a:xfrm>
+            <a:off x="298972" y="5846952"/>
+            <a:ext cx="4309674" cy="0"/>
+          </a:xfrm>
+          <a:prstGeom prst="line">
+            <a:avLst/>
+          </a:prstGeom>
+          <a:ln w="12700">
+            <a:solidFill>
+              <a:srgbClr val="E4E4E3"/>
+            </a:solidFill>
+            <a:miter lim="400000"/>
+          </a:ln>
+        </p:spPr>
+        <p:txBody>
+          <a:bodyPr lIns="54570" tIns="54570" rIns="54570" bIns="54570" anchor="ctr"/>
+          <a:lstStyle/>
+          <a:p>
+            <a:pPr>
+              <a:lnSpc>
+                <a:spcPct val="80000"/>
+              </a:lnSpc>
+              <a:spcBef>
+                <a:spcPts val="600"/>
+              </a:spcBef>
+              <a:defRPr b="0">
+                <a:solidFill>
+                  <a:srgbClr val="000000"/>
+                </a:solidFill>
+              </a:defRPr>
+            </a:pPr>
+            <a:endParaRPr/>
+          </a:p>
+        </p:txBody>
+      </p:sp>
+      <p:sp>
+        <p:nvSpPr>
+          <p:cNvPr id="4" name="To use a font awesome icon, copy and paste one from here fortawesome.github.io/Font-Awesome/cheatsheet/. Then set the text font to font awesome."/>
+          <p:cNvSpPr txBox="1"/>
+          <p:nvPr/>
+        </p:nvSpPr>
+        <p:spPr>
+          <a:xfrm>
+            <a:off x="272433" y="7797538"/>
+            <a:ext cx="4154098" cy="642542"/>
+          </a:xfrm>
+          <a:prstGeom prst="rect">
+            <a:avLst/>
+          </a:prstGeom>
+          <a:ln w="12700">
+            <a:miter lim="400000"/>
+          </a:ln>
+          <a:extLst>
+            <a:ext uri="{C572A759-6A51-4108-AA02-DFA0A04FC94B}">
+              <ma14:wrappingTextBoxFlag xmlns="" xmlns:m="http://schemas.openxmlformats.org/officeDocument/2006/math" xmlns:a14="http://schemas.microsoft.com/office/drawing/2010/main" xmlns:ma14="http://schemas.microsoft.com/office/mac/drawingml/2011/main" val="1"/>
+            </a:ext>
+          </a:extLst>
+        </p:spPr>
+        <p:txBody>
+          <a:bodyPr lIns="54570" tIns="54570" rIns="54570" bIns="54570" anchor="ctr">
+            <a:spAutoFit/>
+          </a:bodyPr>
+          <a:lstStyle/>
+          <a:p>
+            <a:pPr>
+              <a:lnSpc>
+                <a:spcPct val="90000"/>
+              </a:lnSpc>
+              <a:spcBef>
+                <a:spcPts val="300"/>
+              </a:spcBef>
+              <a:buClr>
+                <a:schemeClr val="accent4">
+                  <a:hueOff val="384618"/>
+                  <a:satOff val="3869"/>
+                  <a:lumOff val="5802"/>
+                </a:schemeClr>
+              </a:buClr>
+              <a:defRPr b="0">
+                <a:solidFill>
+                  <a:srgbClr val="000000"/>
+                </a:solidFill>
+              </a:defRPr>
+            </a:pPr>
+            <a:r>
+              <a:t>To use a </a:t>
+            </a:r>
+            <a:r>
+              <a:rPr b="1"/>
+              <a:t>font awesome</a:t>
+            </a:r>
+            <a:r>
+              <a:t> icon, copy and paste one from here </a:t>
+            </a:r>
+            <a:r>
+              <a:rPr u="sng">
+                <a:hlinkClick r:id="rId7"/>
+              </a:rPr>
+              <a:t>fortawesome.github.io/Font-Awesome/cheatsheet/</a:t>
+            </a:r>
+            <a:r>
+              <a:t>. Then set the text font to font awesome.</a:t>
+            </a:r>
+          </a:p>
+        </p:txBody>
+      </p:sp>
+      <p:sp>
+        <p:nvSpPr>
+          <p:cNvPr id="5" name="Layout Suggestions"/>
+          <p:cNvSpPr txBox="1"/>
+          <p:nvPr/>
+        </p:nvSpPr>
+        <p:spPr>
+          <a:xfrm>
+            <a:off x="275721" y="3492309"/>
+            <a:ext cx="1421864" cy="340029"/>
+          </a:xfrm>
+          <a:prstGeom prst="rect">
+            <a:avLst/>
+          </a:prstGeom>
+          <a:ln w="12700">
+            <a:miter lim="400000"/>
+          </a:ln>
+          <a:extLst>
+            <a:ext uri="{C572A759-6A51-4108-AA02-DFA0A04FC94B}">
+              <ma14:wrappingTextBoxFlag xmlns="" xmlns:m="http://schemas.openxmlformats.org/officeDocument/2006/math" xmlns:a14="http://schemas.microsoft.com/office/drawing/2010/main" xmlns:ma14="http://schemas.microsoft.com/office/mac/drawingml/2011/main" val="1"/>
+            </a:ext>
+          </a:extLst>
+        </p:spPr>
+        <p:txBody>
+          <a:bodyPr wrap="none" lIns="12700" tIns="12700" rIns="12700" bIns="12700" anchor="ctr">
+            <a:spAutoFit/>
+          </a:bodyPr>
+          <a:lstStyle/>
+          <a:p>
+            <a:pPr lvl="1" indent="0">
+              <a:lnSpc>
+                <a:spcPct val="80000"/>
+              </a:lnSpc>
+              <a:spcBef>
+                <a:spcPts val="0"/>
+              </a:spcBef>
+              <a:defRPr sz="2500" b="0">
+                <a:solidFill>
+                  <a:srgbClr val="628DB5"/>
+                </a:solidFill>
+              </a:defRPr>
+            </a:pPr>
+            <a:r>
+              <a:rPr lang="en-GB" dirty="0" err="1"/>
+              <a:t>Quickstart</a:t>
+            </a:r>
+            <a:endParaRPr dirty="0"/>
+          </a:p>
+        </p:txBody>
+      </p:sp>
+      <p:sp>
+        <p:nvSpPr>
+          <p:cNvPr id="8" name="CODE">
+            <a:extLst>
+              <a:ext uri="{FF2B5EF4-FFF2-40B4-BE49-F238E27FC236}">
+                <a16:creationId xmlns:a16="http://schemas.microsoft.com/office/drawing/2014/main" id="{3872ADE0-6978-A207-7D39-DF4528C2D349}"/>
+              </a:ext>
+            </a:extLst>
+          </p:cNvPr>
+          <p:cNvSpPr txBox="1"/>
+          <p:nvPr/>
+        </p:nvSpPr>
+        <p:spPr>
+          <a:xfrm>
+            <a:off x="272433" y="3849495"/>
+            <a:ext cx="831959" cy="210314"/>
+          </a:xfrm>
+          <a:prstGeom prst="rect">
+            <a:avLst/>
+          </a:prstGeom>
+          <a:ln w="12700">
+            <a:miter lim="400000"/>
+          </a:ln>
+          <a:extLst>
+            <a:ext uri="{C572A759-6A51-4108-AA02-DFA0A04FC94B}">
+              <ma14:wrappingTextBoxFlag xmlns="" xmlns:m="http://schemas.openxmlformats.org/officeDocument/2006/math" xmlns:a14="http://schemas.microsoft.com/office/drawing/2010/main" xmlns:ma14="http://schemas.microsoft.com/office/mac/drawingml/2011/main" val="1"/>
+            </a:ext>
+          </a:extLst>
+        </p:spPr>
+        <p:txBody>
+          <a:bodyPr wrap="none" lIns="12700" tIns="12700" rIns="12700" bIns="12700" anchor="ctr">
+            <a:spAutoFit/>
+          </a:bodyPr>
+          <a:lstStyle/>
+          <a:p>
+            <a:pPr lvl="1" indent="0"/>
+            <a:r>
+              <a:rPr lang="en-GB" dirty="0"/>
+              <a:t>LINE CHART</a:t>
+            </a:r>
+            <a:endParaRPr dirty="0"/>
+          </a:p>
+        </p:txBody>
+      </p:sp>
+      <p:sp>
+        <p:nvSpPr>
+          <p:cNvPr id="9" name="ggplot(mpg, aes(hwy, cty)) +…">
+            <a:extLst>
+              <a:ext uri="{FF2B5EF4-FFF2-40B4-BE49-F238E27FC236}">
+                <a16:creationId xmlns:a16="http://schemas.microsoft.com/office/drawing/2014/main" id="{E50B1236-153C-3B73-CD90-A26898249BB0}"/>
+              </a:ext>
+            </a:extLst>
+          </p:cNvPr>
+          <p:cNvSpPr txBox="1"/>
+          <p:nvPr/>
+        </p:nvSpPr>
+        <p:spPr>
+          <a:xfrm>
+            <a:off x="275185" y="4162955"/>
+            <a:ext cx="4296974" cy="5475777"/>
+          </a:xfrm>
+          <a:prstGeom prst="rect">
+            <a:avLst/>
+          </a:prstGeom>
+          <a:solidFill>
+            <a:srgbClr val="FFFFFF"/>
+          </a:solidFill>
+          <a:ln w="12700">
+            <a:solidFill>
+              <a:srgbClr val="A6AAA9"/>
+            </a:solidFill>
+            <a:miter lim="400000"/>
+          </a:ln>
+          <a:extLst>
+            <a:ext uri="{C572A759-6A51-4108-AA02-DFA0A04FC94B}">
+              <ma14:wrappingTextBoxFlag xmlns="" xmlns:m="http://schemas.openxmlformats.org/officeDocument/2006/math" xmlns:a14="http://schemas.microsoft.com/office/drawing/2010/main" xmlns:ma14="http://schemas.microsoft.com/office/mac/drawingml/2011/main" val="1"/>
+            </a:ext>
+          </a:extLst>
+        </p:spPr>
+        <p:txBody>
+          <a:bodyPr wrap="square" lIns="54570" tIns="54570" rIns="54570" bIns="54570" anchor="ctr">
+            <a:spAutoFit/>
+          </a:bodyPr>
+          <a:lstStyle/>
+          <a:p>
+            <a:r>
+              <a:rPr lang="en-GB" b="0" dirty="0"/>
+              <a:t>plot &lt;- </a:t>
+            </a:r>
+            <a:r>
+              <a:rPr lang="en-GB" b="0" dirty="0" err="1"/>
+              <a:t>ggplot</a:t>
+            </a:r>
+            <a:r>
+              <a:rPr lang="en-GB" b="0" dirty="0"/>
+              <a:t>(</a:t>
+            </a:r>
+          </a:p>
+          <a:p>
+            <a:r>
+              <a:rPr lang="en-GB" b="0" dirty="0"/>
+              <a:t>       data = &lt;data&gt;,</a:t>
+            </a:r>
+          </a:p>
+          <a:p>
+            <a:r>
+              <a:rPr lang="en-GB" b="0" dirty="0"/>
+              <a:t>       mapping = </a:t>
+            </a:r>
+            <a:r>
+              <a:rPr lang="en-GB" b="0" dirty="0" err="1"/>
+              <a:t>aes</a:t>
+            </a:r>
+            <a:r>
+              <a:rPr lang="en-GB" b="0" dirty="0"/>
+              <a:t>(x = &lt;x&gt;, y = &lt;y&gt;)</a:t>
+            </a:r>
+          </a:p>
+          <a:p>
+            <a:r>
+              <a:rPr lang="en-GB" b="0" dirty="0"/>
+              <a:t>) +</a:t>
+            </a:r>
+          </a:p>
+          <a:p>
+            <a:r>
+              <a:rPr lang="en-GB" b="0" dirty="0"/>
+              <a:t>    </a:t>
+            </a:r>
+          </a:p>
+          <a:p>
+            <a:r>
+              <a:rPr lang="en-GB" b="0" dirty="0" err="1"/>
+              <a:t>geom_line</a:t>
+            </a:r>
+            <a:r>
+              <a:rPr lang="en-GB" b="0" dirty="0"/>
+              <a:t>(</a:t>
+            </a:r>
+            <a:r>
+              <a:rPr lang="en-GB" b="0" dirty="0" err="1"/>
+              <a:t>color</a:t>
+            </a:r>
+            <a:r>
+              <a:rPr lang="en-GB" b="0" dirty="0"/>
+              <a:t> = </a:t>
+            </a:r>
+            <a:r>
+              <a:rPr lang="en-GB" b="0" dirty="0" err="1"/>
+              <a:t>commonslib_color</a:t>
+            </a:r>
+            <a:r>
+              <a:rPr lang="en-GB" b="0" dirty="0"/>
+              <a:t>(“</a:t>
+            </a:r>
+            <a:r>
+              <a:rPr lang="en-GB" b="0" dirty="0" err="1"/>
+              <a:t>commons_green</a:t>
+            </a:r>
+            <a:r>
+              <a:rPr lang="en-GB" b="0" dirty="0"/>
+              <a:t>”), size = 1.1) +</a:t>
+            </a:r>
+          </a:p>
+          <a:p>
+            <a:endParaRPr lang="en-GB" b="0" dirty="0"/>
+          </a:p>
+          <a:p>
+            <a:r>
+              <a:rPr lang="en-GB" b="0" dirty="0"/>
+              <a:t>labs(</a:t>
+            </a:r>
+          </a:p>
+          <a:p>
+            <a:r>
+              <a:rPr lang="en-GB" b="0" dirty="0"/>
+              <a:t>        x = &lt;x&gt;,</a:t>
+            </a:r>
+          </a:p>
+          <a:p>
+            <a:r>
+              <a:rPr lang="en-GB" b="0" dirty="0"/>
+              <a:t>        y = &lt;y&gt;) +</a:t>
+            </a:r>
+          </a:p>
+          <a:p>
+            <a:endParaRPr lang="en-GB" b="0" dirty="0"/>
+          </a:p>
+          <a:p>
+            <a:r>
+              <a:rPr lang="en-GB" b="0" dirty="0"/>
+              <a:t> </a:t>
+            </a:r>
+            <a:r>
+              <a:rPr lang="en-GB" b="0" dirty="0" err="1"/>
+              <a:t>scale_x_continuous</a:t>
+            </a:r>
+            <a:r>
+              <a:rPr lang="en-GB" b="0" dirty="0"/>
+              <a:t>(breaks = </a:t>
+            </a:r>
+            <a:r>
+              <a:rPr lang="en-GB" b="0" dirty="0" err="1"/>
+              <a:t>seq</a:t>
+            </a:r>
+            <a:r>
+              <a:rPr lang="en-GB" b="0" dirty="0"/>
+              <a:t>(0, 10, 2)) +</a:t>
+            </a:r>
+          </a:p>
+          <a:p>
+            <a:r>
+              <a:rPr lang="en-GB" b="0" dirty="0"/>
+              <a:t> </a:t>
+            </a:r>
+            <a:r>
+              <a:rPr lang="en-GB" b="0" dirty="0" err="1"/>
+              <a:t>scale_y_continuous</a:t>
+            </a:r>
+            <a:r>
+              <a:rPr lang="en-GB" b="0" dirty="0"/>
+              <a:t>(limits = c(0, 20)) +</a:t>
+            </a:r>
+          </a:p>
+          <a:p>
+            <a:endParaRPr lang="en-GB" b="0" dirty="0"/>
+          </a:p>
+          <a:p>
+            <a:r>
+              <a:rPr lang="en-GB" b="0" dirty="0"/>
+              <a:t> </a:t>
+            </a:r>
+            <a:r>
+              <a:rPr lang="en-GB" b="0" dirty="0" err="1"/>
+              <a:t>theme_commonslib</a:t>
+            </a:r>
+            <a:r>
+              <a:rPr lang="en-GB" b="0" dirty="0"/>
+              <a:t>() </a:t>
+            </a:r>
+          </a:p>
+          <a:p>
+            <a:endParaRPr lang="en-GB" b="0" dirty="0"/>
+          </a:p>
+          <a:p>
+            <a:r>
+              <a:rPr lang="en-GB" b="0" dirty="0"/>
+              <a:t>plot &lt;- plot + </a:t>
+            </a:r>
+            <a:r>
+              <a:rPr lang="en-GB" b="0" dirty="0" err="1"/>
+              <a:t>add_commonslib_titles</a:t>
+            </a:r>
+            <a:r>
+              <a:rPr lang="en-GB" b="0" dirty="0"/>
+              <a:t>(</a:t>
+            </a:r>
+          </a:p>
+          <a:p>
+            <a:r>
+              <a:rPr lang="en-GB" b="0" dirty="0"/>
+              <a:t>   plot,</a:t>
+            </a:r>
+          </a:p>
+          <a:p>
+            <a:r>
+              <a:rPr lang="en-GB" b="0" dirty="0"/>
+              <a:t>   title = &lt;title&gt;,</a:t>
+            </a:r>
+          </a:p>
+          <a:p>
+            <a:r>
+              <a:rPr lang="en-GB" b="0" dirty="0"/>
+              <a:t>    subtitle = &lt;title&gt;</a:t>
+            </a:r>
+          </a:p>
+          <a:p>
+            <a:r>
+              <a:rPr lang="en-GB" b="0" dirty="0"/>
+              <a:t>)</a:t>
+            </a:r>
+          </a:p>
+          <a:p>
+            <a:r>
+              <a:rPr lang="en-GB" b="0" dirty="0"/>
+              <a:t># Save the plot</a:t>
+            </a:r>
+          </a:p>
+          <a:p>
+            <a:r>
+              <a:rPr lang="en-GB" b="0" dirty="0" err="1"/>
+              <a:t>save_png</a:t>
+            </a:r>
+            <a:r>
+              <a:rPr lang="en-GB" b="0" dirty="0"/>
+              <a:t>(plot, “&lt;</a:t>
+            </a:r>
+            <a:r>
+              <a:rPr lang="en-GB" b="0" dirty="0" err="1"/>
+              <a:t>plotname</a:t>
+            </a:r>
+            <a:r>
+              <a:rPr lang="en-GB" b="0" dirty="0"/>
+              <a:t>&gt;.png", width = 8, height = 5)</a:t>
+            </a:r>
+          </a:p>
+          <a:p>
+            <a:pPr>
+              <a:spcBef>
+                <a:spcPts val="0"/>
+              </a:spcBef>
+              <a:defRPr b="0">
+                <a:solidFill>
+                  <a:srgbClr val="000000"/>
+                </a:solidFill>
+                <a:latin typeface="Menlo"/>
+                <a:ea typeface="Menlo"/>
+                <a:cs typeface="Menlo"/>
+                <a:sym typeface="Menlo"/>
+              </a:defRPr>
+            </a:pPr>
+            <a:endParaRPr lang="en-GB" dirty="0"/>
+          </a:p>
+          <a:p>
+            <a:pPr>
+              <a:spcBef>
+                <a:spcPts val="0"/>
+              </a:spcBef>
+              <a:defRPr b="0">
+                <a:solidFill>
+                  <a:srgbClr val="000000"/>
+                </a:solidFill>
+                <a:latin typeface="Menlo"/>
+                <a:ea typeface="Menlo"/>
+                <a:cs typeface="Menlo"/>
+                <a:sym typeface="Menlo"/>
+              </a:defRPr>
+            </a:pPr>
+            <a:endParaRPr dirty="0"/>
+          </a:p>
+        </p:txBody>
+      </p:sp>
+      <p:sp>
+        <p:nvSpPr>
+          <p:cNvPr id="10" name="Word balloons"/>
+          <p:cNvSpPr/>
+          <p:nvPr/>
+        </p:nvSpPr>
+        <p:spPr>
+          <a:xfrm>
+            <a:off x="2246187" y="3862768"/>
+            <a:ext cx="2258965" cy="739480"/>
+          </a:xfrm>
+          <a:custGeom>
+            <a:avLst/>
+            <a:gdLst/>
+            <a:ahLst/>
+            <a:cxnLst>
+              <a:cxn ang="0">
+                <a:pos x="wd2" y="hd2"/>
+              </a:cxn>
+              <a:cxn ang="5400000">
+                <a:pos x="wd2" y="hd2"/>
+              </a:cxn>
+              <a:cxn ang="10800000">
+                <a:pos x="wd2" y="hd2"/>
+              </a:cxn>
+              <a:cxn ang="16200000">
+                <a:pos x="wd2" y="hd2"/>
+              </a:cxn>
+            </a:cxnLst>
+            <a:rect l="0" t="0" r="r" b="b"/>
+            <a:pathLst>
+              <a:path w="21600" h="21600" extrusionOk="0">
+                <a:moveTo>
+                  <a:pt x="5136" y="0"/>
+                </a:moveTo>
+                <a:cubicBezTo>
+                  <a:pt x="4296" y="0"/>
+                  <a:pt x="3611" y="1497"/>
+                  <a:pt x="3611" y="3334"/>
+                </a:cubicBezTo>
+                <a:lnTo>
+                  <a:pt x="3611" y="15677"/>
+                </a:lnTo>
+                <a:lnTo>
+                  <a:pt x="0" y="21600"/>
+                </a:lnTo>
+                <a:lnTo>
+                  <a:pt x="4909" y="19951"/>
+                </a:lnTo>
+                <a:cubicBezTo>
+                  <a:pt x="4986" y="19977"/>
+                  <a:pt x="5056" y="20057"/>
+                  <a:pt x="5136" y="20057"/>
+                </a:cubicBezTo>
+                <a:lnTo>
+                  <a:pt x="20083" y="20057"/>
+                </a:lnTo>
+                <a:cubicBezTo>
+                  <a:pt x="20923" y="20057"/>
+                  <a:pt x="21600" y="18560"/>
+                  <a:pt x="21600" y="16723"/>
+                </a:cubicBezTo>
+                <a:lnTo>
+                  <a:pt x="21600" y="3334"/>
+                </a:lnTo>
+                <a:cubicBezTo>
+                  <a:pt x="21600" y="1497"/>
+                  <a:pt x="20923" y="0"/>
+                  <a:pt x="20083" y="0"/>
+                </a:cubicBezTo>
+                <a:lnTo>
+                  <a:pt x="5136" y="0"/>
+                </a:lnTo>
+                <a:close/>
+              </a:path>
+            </a:pathLst>
+          </a:custGeom>
+          <a:solidFill>
+            <a:srgbClr val="659FD5"/>
+          </a:solidFill>
+          <a:ln w="12700">
+            <a:miter lim="400000"/>
+          </a:ln>
+          <a:extLst>
+            <a:ext uri="{C572A759-6A51-4108-AA02-DFA0A04FC94B}">
+              <ma14:wrappingTextBoxFlag xmlns="" xmlns:m="http://schemas.openxmlformats.org/officeDocument/2006/math" xmlns:a14="http://schemas.microsoft.com/office/drawing/2010/main" xmlns:ma14="http://schemas.microsoft.com/office/mac/drawingml/2011/main" val="1"/>
+            </a:ext>
+          </a:extLst>
+        </p:spPr>
+        <p:txBody>
+          <a:bodyPr wrap="square" lIns="432000" tIns="72000" rIns="0" bIns="72000" anchor="ctr">
+            <a:spAutoFit/>
+          </a:bodyPr>
+          <a:lstStyle>
+            <a:lvl1pPr algn="ctr">
+              <a:lnSpc>
+                <a:spcPct val="80000"/>
+              </a:lnSpc>
+              <a:spcBef>
+                <a:spcPts val="300"/>
+              </a:spcBef>
+              <a:buClr>
+                <a:schemeClr val="accent4">
+                  <a:hueOff val="384618"/>
+                  <a:satOff val="3869"/>
+                  <a:lumOff val="5802"/>
+                </a:schemeClr>
+              </a:buClr>
+              <a:defRPr>
+                <a:solidFill>
+                  <a:srgbClr val="FFFFFF"/>
+                </a:solidFill>
+              </a:defRPr>
+            </a:lvl1pPr>
+          </a:lstStyle>
+          <a:p>
+            <a:r>
+              <a:rPr lang="en-GB" dirty="0" err="1"/>
+              <a:t>aes</a:t>
+            </a:r>
+            <a:r>
+              <a:rPr lang="en-GB" dirty="0"/>
+              <a:t> maps &lt;x&gt; to x and &lt;y&gt; to y. This can be set here to apply to all </a:t>
+            </a:r>
+            <a:r>
+              <a:rPr lang="en-GB" dirty="0" err="1"/>
+              <a:t>geoms</a:t>
+            </a:r>
+            <a:r>
+              <a:rPr lang="en-GB" dirty="0"/>
+              <a:t>, or set in each geom.</a:t>
+            </a:r>
+            <a:endParaRPr dirty="0"/>
+          </a:p>
+        </p:txBody>
+      </p:sp>
+      <p:sp>
+        <p:nvSpPr>
+          <p:cNvPr id="11" name="Word balloons">
+            <a:extLst>
+              <a:ext uri="{FF2B5EF4-FFF2-40B4-BE49-F238E27FC236}">
+                <a16:creationId xmlns:a16="http://schemas.microsoft.com/office/drawing/2014/main" id="{88349141-AF81-8F5E-49B5-0901D098327C}"/>
+              </a:ext>
+            </a:extLst>
+          </p:cNvPr>
+          <p:cNvSpPr/>
+          <p:nvPr/>
+        </p:nvSpPr>
+        <p:spPr>
+          <a:xfrm>
+            <a:off x="968588" y="5607993"/>
+            <a:ext cx="2258965" cy="444014"/>
+          </a:xfrm>
+          <a:custGeom>
+            <a:avLst/>
+            <a:gdLst/>
+            <a:ahLst/>
+            <a:cxnLst>
+              <a:cxn ang="0">
+                <a:pos x="wd2" y="hd2"/>
+              </a:cxn>
+              <a:cxn ang="5400000">
+                <a:pos x="wd2" y="hd2"/>
+              </a:cxn>
+              <a:cxn ang="10800000">
+                <a:pos x="wd2" y="hd2"/>
+              </a:cxn>
+              <a:cxn ang="16200000">
+                <a:pos x="wd2" y="hd2"/>
+              </a:cxn>
+            </a:cxnLst>
+            <a:rect l="0" t="0" r="r" b="b"/>
+            <a:pathLst>
+              <a:path w="21600" h="21600" extrusionOk="0">
+                <a:moveTo>
+                  <a:pt x="5136" y="0"/>
+                </a:moveTo>
+                <a:cubicBezTo>
+                  <a:pt x="4296" y="0"/>
+                  <a:pt x="3611" y="1497"/>
+                  <a:pt x="3611" y="3334"/>
+                </a:cubicBezTo>
+                <a:lnTo>
+                  <a:pt x="3611" y="15677"/>
+                </a:lnTo>
+                <a:lnTo>
+                  <a:pt x="0" y="21600"/>
+                </a:lnTo>
+                <a:lnTo>
+                  <a:pt x="4909" y="19951"/>
+                </a:lnTo>
+                <a:cubicBezTo>
+                  <a:pt x="4986" y="19977"/>
+                  <a:pt x="5056" y="20057"/>
+                  <a:pt x="5136" y="20057"/>
+                </a:cubicBezTo>
+                <a:lnTo>
+                  <a:pt x="20083" y="20057"/>
+                </a:lnTo>
+                <a:cubicBezTo>
+                  <a:pt x="20923" y="20057"/>
+                  <a:pt x="21600" y="18560"/>
+                  <a:pt x="21600" y="16723"/>
+                </a:cubicBezTo>
+                <a:lnTo>
+                  <a:pt x="21600" y="3334"/>
+                </a:lnTo>
+                <a:cubicBezTo>
+                  <a:pt x="21600" y="1497"/>
+                  <a:pt x="20923" y="0"/>
+                  <a:pt x="20083" y="0"/>
+                </a:cubicBezTo>
+                <a:lnTo>
+                  <a:pt x="5136" y="0"/>
+                </a:lnTo>
+                <a:close/>
+              </a:path>
+            </a:pathLst>
+          </a:custGeom>
+          <a:solidFill>
+            <a:srgbClr val="659FD5"/>
+          </a:solidFill>
+          <a:ln w="12700">
+            <a:miter lim="400000"/>
+          </a:ln>
+          <a:extLst>
+            <a:ext uri="{C572A759-6A51-4108-AA02-DFA0A04FC94B}">
+              <ma14:wrappingTextBoxFlag xmlns="" xmlns:m="http://schemas.openxmlformats.org/officeDocument/2006/math" xmlns:a14="http://schemas.microsoft.com/office/drawing/2010/main" xmlns:ma14="http://schemas.microsoft.com/office/mac/drawingml/2011/main" val="1"/>
+            </a:ext>
+          </a:extLst>
+        </p:spPr>
+        <p:txBody>
+          <a:bodyPr wrap="square" lIns="432000" tIns="72000" rIns="0" bIns="72000" anchor="ctr">
+            <a:spAutoFit/>
+          </a:bodyPr>
+          <a:lstStyle>
+            <a:lvl1pPr algn="ctr">
+              <a:lnSpc>
+                <a:spcPct val="80000"/>
+              </a:lnSpc>
+              <a:spcBef>
+                <a:spcPts val="300"/>
+              </a:spcBef>
+              <a:buClr>
+                <a:schemeClr val="accent4">
+                  <a:hueOff val="384618"/>
+                  <a:satOff val="3869"/>
+                  <a:lumOff val="5802"/>
+                </a:schemeClr>
+              </a:buClr>
+              <a:defRPr>
+                <a:solidFill>
+                  <a:srgbClr val="FFFFFF"/>
+                </a:solidFill>
+              </a:defRPr>
+            </a:lvl1pPr>
+          </a:lstStyle>
+          <a:p>
+            <a:r>
+              <a:rPr lang="en-GB" dirty="0"/>
+              <a:t>Set x and y axes labels here</a:t>
+            </a:r>
+            <a:endParaRPr dirty="0"/>
+          </a:p>
+        </p:txBody>
+      </p:sp>
+      <p:sp>
+        <p:nvSpPr>
+          <p:cNvPr id="12" name="Word balloons">
+            <a:extLst>
+              <a:ext uri="{FF2B5EF4-FFF2-40B4-BE49-F238E27FC236}">
+                <a16:creationId xmlns:a16="http://schemas.microsoft.com/office/drawing/2014/main" id="{0BEE3BE4-659E-A5E5-2DE4-6B4B28562983}"/>
+              </a:ext>
+            </a:extLst>
+          </p:cNvPr>
+          <p:cNvSpPr/>
+          <p:nvPr/>
+        </p:nvSpPr>
+        <p:spPr>
+          <a:xfrm>
+            <a:off x="3023658" y="5977259"/>
+            <a:ext cx="1544694" cy="739480"/>
+          </a:xfrm>
+          <a:custGeom>
+            <a:avLst/>
+            <a:gdLst/>
+            <a:ahLst/>
+            <a:cxnLst>
+              <a:cxn ang="0">
+                <a:pos x="wd2" y="hd2"/>
+              </a:cxn>
+              <a:cxn ang="5400000">
+                <a:pos x="wd2" y="hd2"/>
+              </a:cxn>
+              <a:cxn ang="10800000">
+                <a:pos x="wd2" y="hd2"/>
+              </a:cxn>
+              <a:cxn ang="16200000">
+                <a:pos x="wd2" y="hd2"/>
+              </a:cxn>
+            </a:cxnLst>
+            <a:rect l="0" t="0" r="r" b="b"/>
+            <a:pathLst>
+              <a:path w="21600" h="21600" extrusionOk="0">
+                <a:moveTo>
+                  <a:pt x="5136" y="0"/>
+                </a:moveTo>
+                <a:cubicBezTo>
+                  <a:pt x="4296" y="0"/>
+                  <a:pt x="3611" y="1497"/>
+                  <a:pt x="3611" y="3334"/>
+                </a:cubicBezTo>
+                <a:lnTo>
+                  <a:pt x="3611" y="15677"/>
+                </a:lnTo>
+                <a:lnTo>
+                  <a:pt x="0" y="21600"/>
+                </a:lnTo>
+                <a:lnTo>
+                  <a:pt x="4909" y="19951"/>
+                </a:lnTo>
+                <a:cubicBezTo>
+                  <a:pt x="4986" y="19977"/>
+                  <a:pt x="5056" y="20057"/>
+                  <a:pt x="5136" y="20057"/>
+                </a:cubicBezTo>
+                <a:lnTo>
+                  <a:pt x="20083" y="20057"/>
+                </a:lnTo>
+                <a:cubicBezTo>
+                  <a:pt x="20923" y="20057"/>
+                  <a:pt x="21600" y="18560"/>
+                  <a:pt x="21600" y="16723"/>
+                </a:cubicBezTo>
+                <a:lnTo>
+                  <a:pt x="21600" y="3334"/>
+                </a:lnTo>
+                <a:cubicBezTo>
+                  <a:pt x="21600" y="1497"/>
+                  <a:pt x="20923" y="0"/>
+                  <a:pt x="20083" y="0"/>
+                </a:cubicBezTo>
+                <a:lnTo>
+                  <a:pt x="5136" y="0"/>
+                </a:lnTo>
+                <a:close/>
+              </a:path>
+            </a:pathLst>
+          </a:custGeom>
+          <a:solidFill>
+            <a:srgbClr val="659FD5"/>
+          </a:solidFill>
+          <a:ln w="12700">
+            <a:miter lim="400000"/>
+          </a:ln>
+          <a:extLst>
+            <a:ext uri="{C572A759-6A51-4108-AA02-DFA0A04FC94B}">
+              <ma14:wrappingTextBoxFlag xmlns="" xmlns:m="http://schemas.openxmlformats.org/officeDocument/2006/math" xmlns:a14="http://schemas.microsoft.com/office/drawing/2010/main" xmlns:ma14="http://schemas.microsoft.com/office/mac/drawingml/2011/main" val="1"/>
+            </a:ext>
+          </a:extLst>
+        </p:spPr>
+        <p:txBody>
+          <a:bodyPr wrap="square" lIns="252000" tIns="72000" rIns="0" bIns="72000" anchor="ctr">
+            <a:spAutoFit/>
+          </a:bodyPr>
+          <a:lstStyle>
+            <a:lvl1pPr algn="ctr">
+              <a:lnSpc>
+                <a:spcPct val="80000"/>
+              </a:lnSpc>
+              <a:spcBef>
+                <a:spcPts val="300"/>
+              </a:spcBef>
+              <a:buClr>
+                <a:schemeClr val="accent4">
+                  <a:hueOff val="384618"/>
+                  <a:satOff val="3869"/>
+                  <a:lumOff val="5802"/>
+                </a:schemeClr>
+              </a:buClr>
+              <a:defRPr>
+                <a:solidFill>
+                  <a:srgbClr val="FFFFFF"/>
+                </a:solidFill>
+              </a:defRPr>
+            </a:lvl1pPr>
+          </a:lstStyle>
+          <a:p>
+            <a:r>
+              <a:rPr lang="en-GB" dirty="0"/>
+              <a:t>Control axes: x is from 0 to 10 in steps of  2, y is between 0 and 20</a:t>
+            </a:r>
+            <a:endParaRPr dirty="0"/>
+          </a:p>
+        </p:txBody>
+      </p:sp>
+      <p:sp>
+        <p:nvSpPr>
+          <p:cNvPr id="13" name="Manipulate Variables">
+            <a:extLst>
+              <a:ext uri="{FF2B5EF4-FFF2-40B4-BE49-F238E27FC236}">
+                <a16:creationId xmlns:a16="http://schemas.microsoft.com/office/drawing/2014/main" id="{8217FBAD-9C94-C6D8-D033-880A8053D379}"/>
+              </a:ext>
+            </a:extLst>
+          </p:cNvPr>
+          <p:cNvSpPr txBox="1"/>
+          <p:nvPr/>
+        </p:nvSpPr>
+        <p:spPr>
+          <a:xfrm>
+            <a:off x="4780778" y="1537907"/>
+            <a:ext cx="2821285" cy="340029"/>
+          </a:xfrm>
+          <a:prstGeom prst="rect">
+            <a:avLst/>
+          </a:prstGeom>
+          <a:ln w="12700">
+            <a:miter lim="400000"/>
+          </a:ln>
+          <a:extLst>
+            <a:ext uri="{C572A759-6A51-4108-AA02-DFA0A04FC94B}">
+              <ma14:wrappingTextBoxFlag xmlns="" xmlns:m="http://schemas.openxmlformats.org/officeDocument/2006/math" xmlns:a14="http://schemas.microsoft.com/office/drawing/2010/main" xmlns:ma14="http://schemas.microsoft.com/office/mac/drawingml/2011/main" val="1"/>
+            </a:ext>
+          </a:extLst>
+        </p:spPr>
+        <p:txBody>
+          <a:bodyPr wrap="none" lIns="12700" tIns="12700" rIns="12700" bIns="12700" anchor="ctr">
+            <a:spAutoFit/>
+          </a:bodyPr>
+          <a:lstStyle/>
+          <a:p>
+            <a:pPr lvl="1" indent="0">
+              <a:lnSpc>
+                <a:spcPct val="80000"/>
+              </a:lnSpc>
+              <a:spcBef>
+                <a:spcPts val="0"/>
+              </a:spcBef>
+              <a:defRPr sz="2500" b="0">
+                <a:solidFill>
+                  <a:srgbClr val="628DB5"/>
+                </a:solidFill>
+              </a:defRPr>
+            </a:pPr>
+            <a:r>
+              <a:rPr lang="en-GB" dirty="0"/>
+              <a:t>Common chart types</a:t>
+            </a:r>
+            <a:endParaRPr dirty="0"/>
+          </a:p>
+        </p:txBody>
+      </p:sp>
+      <p:sp>
+        <p:nvSpPr>
+          <p:cNvPr id="20" name="TextBox 19">
+            <a:extLst>
+              <a:ext uri="{FF2B5EF4-FFF2-40B4-BE49-F238E27FC236}">
+                <a16:creationId xmlns:a16="http://schemas.microsoft.com/office/drawing/2014/main" id="{EE5F1128-5E3A-B41F-9110-283D409A0A13}"/>
+              </a:ext>
+            </a:extLst>
+          </p:cNvPr>
+          <p:cNvSpPr txBox="1"/>
+          <p:nvPr/>
+        </p:nvSpPr>
+        <p:spPr>
+          <a:xfrm>
+            <a:off x="4723581" y="2080535"/>
+            <a:ext cx="4375182" cy="276999"/>
+          </a:xfrm>
+          <a:prstGeom prst="rect">
+            <a:avLst/>
+          </a:prstGeom>
+          <a:noFill/>
+          <a:ln w="12700" cap="flat">
+            <a:noFill/>
+            <a:miter lim="400000"/>
+          </a:ln>
+          <a:effectLst/>
+          <a:sp3d/>
+        </p:spPr>
+        <p:style>
+          <a:lnRef idx="0">
+            <a:scrgbClr r="0" g="0" b="0"/>
+          </a:lnRef>
+          <a:fillRef idx="0">
+            <a:scrgbClr r="0" g="0" b="0"/>
+          </a:fillRef>
+          <a:effectRef idx="0">
+            <a:scrgbClr r="0" g="0" b="0"/>
+          </a:effectRef>
+          <a:fontRef idx="none"/>
+        </p:style>
+        <p:txBody>
+          <a:bodyPr wrap="square">
+            <a:spAutoFit/>
+          </a:bodyPr>
+          <a:lstStyle/>
+          <a:p>
+            <a:r>
+              <a:rPr lang="en-GB" b="0" dirty="0"/>
+              <a:t>plot &lt;- </a:t>
+            </a:r>
+            <a:r>
+              <a:rPr lang="en-GB" b="0" dirty="0" err="1"/>
+              <a:t>ggplot</a:t>
+            </a:r>
+            <a:r>
+              <a:rPr lang="en-GB" b="0" dirty="0"/>
+              <a:t>(data = &lt;data&gt;,mapping = </a:t>
+            </a:r>
+            <a:r>
+              <a:rPr lang="en-GB" b="0" dirty="0" err="1"/>
+              <a:t>aes</a:t>
+            </a:r>
+            <a:r>
+              <a:rPr lang="en-GB" b="0" dirty="0"/>
+              <a:t>(x = &lt;x&gt;, y = &lt;y&gt;)) +</a:t>
+            </a:r>
+          </a:p>
+        </p:txBody>
+      </p:sp>
+      <p:sp>
+        <p:nvSpPr>
+          <p:cNvPr id="21" name="TextBox 20">
+            <a:extLst>
+              <a:ext uri="{FF2B5EF4-FFF2-40B4-BE49-F238E27FC236}">
+                <a16:creationId xmlns:a16="http://schemas.microsoft.com/office/drawing/2014/main" id="{920D3F36-2650-EEAA-23DE-DA85CB6B9BD3}"/>
+              </a:ext>
+            </a:extLst>
+          </p:cNvPr>
+          <p:cNvSpPr txBox="1"/>
+          <p:nvPr/>
+        </p:nvSpPr>
+        <p:spPr>
+          <a:xfrm>
+            <a:off x="5446703" y="3179052"/>
+            <a:ext cx="3076594" cy="907941"/>
+          </a:xfrm>
+          <a:prstGeom prst="rect">
+            <a:avLst/>
+          </a:prstGeom>
+          <a:noFill/>
+          <a:ln w="12700" cap="flat">
+            <a:noFill/>
+            <a:miter lim="400000"/>
+          </a:ln>
+          <a:effectLst/>
+          <a:sp3d/>
+        </p:spPr>
+        <p:style>
+          <a:lnRef idx="0">
+            <a:scrgbClr r="0" g="0" b="0"/>
+          </a:lnRef>
+          <a:fillRef idx="0">
+            <a:scrgbClr r="0" g="0" b="0"/>
+          </a:fillRef>
+          <a:effectRef idx="0">
+            <a:scrgbClr r="0" g="0" b="0"/>
+          </a:effectRef>
+          <a:fontRef idx="none"/>
+        </p:style>
+        <p:txBody>
+          <a:bodyPr wrap="square">
+            <a:spAutoFit/>
+          </a:bodyPr>
+          <a:lstStyle/>
+          <a:p>
+            <a:r>
+              <a:rPr lang="en-GB" dirty="0"/>
+              <a:t>Column chart </a:t>
+            </a:r>
+          </a:p>
+          <a:p>
+            <a:r>
+              <a:rPr lang="en-GB" b="0" dirty="0"/>
+              <a:t>plot + </a:t>
+            </a:r>
+            <a:r>
+              <a:rPr lang="en-GB" dirty="0" err="1"/>
+              <a:t>geom_col</a:t>
+            </a:r>
+            <a:r>
+              <a:rPr lang="en-GB" b="0" dirty="0"/>
+              <a:t>(width=0.8, fill=&lt;colour&gt;)</a:t>
+            </a:r>
+          </a:p>
+          <a:p>
+            <a:endParaRPr lang="en-GB" b="0" dirty="0"/>
+          </a:p>
+          <a:p>
+            <a:r>
+              <a:rPr lang="en-GB" b="0" dirty="0"/>
+              <a:t>Plots bars at discrete &lt;x&gt; with heights &lt;y&gt;</a:t>
+            </a:r>
+          </a:p>
+        </p:txBody>
+      </p:sp>
+      <p:grpSp>
+        <p:nvGrpSpPr>
+          <p:cNvPr id="22" name="Group">
+            <a:extLst>
+              <a:ext uri="{FF2B5EF4-FFF2-40B4-BE49-F238E27FC236}">
+                <a16:creationId xmlns:a16="http://schemas.microsoft.com/office/drawing/2014/main" id="{6123EE4E-DC7C-78A1-C89F-8D4720FF73D7}"/>
+              </a:ext>
+            </a:extLst>
+          </p:cNvPr>
+          <p:cNvGrpSpPr/>
+          <p:nvPr/>
+        </p:nvGrpSpPr>
+        <p:grpSpPr>
+          <a:xfrm>
+            <a:off x="4831727" y="3183333"/>
+            <a:ext cx="448425" cy="448545"/>
+            <a:chOff x="0" y="0"/>
+            <a:chExt cx="448424" cy="448544"/>
+          </a:xfrm>
+        </p:grpSpPr>
+        <p:pic>
+          <p:nvPicPr>
+            <p:cNvPr id="23" name="Image" descr="Image">
+              <a:extLst>
+                <a:ext uri="{FF2B5EF4-FFF2-40B4-BE49-F238E27FC236}">
+                  <a16:creationId xmlns:a16="http://schemas.microsoft.com/office/drawing/2014/main" id="{577ED421-70C8-79FF-E81C-9E6DE46CDED7}"/>
+                </a:ext>
+              </a:extLst>
+            </p:cNvPr>
+            <p:cNvPicPr>
+              <a:picLocks noChangeAspect="1"/>
+            </p:cNvPicPr>
+            <p:nvPr/>
+          </p:nvPicPr>
+          <p:blipFill>
+            <a:blip r:embed="rId6"/>
+            <a:stretch>
+              <a:fillRect/>
+            </a:stretch>
+          </p:blipFill>
+          <p:spPr>
+            <a:xfrm>
+              <a:off x="0" y="0"/>
+              <a:ext cx="448425" cy="448544"/>
+            </a:xfrm>
+            <a:prstGeom prst="rect">
+              <a:avLst/>
+            </a:prstGeom>
+            <a:ln w="12700" cap="flat">
+              <a:noFill/>
+              <a:miter lim="400000"/>
+            </a:ln>
+            <a:effectLst/>
+          </p:spPr>
+        </p:pic>
+        <p:sp>
+          <p:nvSpPr>
+            <p:cNvPr id="24" name="Rectangle">
+              <a:extLst>
+                <a:ext uri="{FF2B5EF4-FFF2-40B4-BE49-F238E27FC236}">
+                  <a16:creationId xmlns:a16="http://schemas.microsoft.com/office/drawing/2014/main" id="{027146D6-324C-E88D-D8C9-4790D9EAF775}"/>
+                </a:ext>
+              </a:extLst>
+            </p:cNvPr>
+            <p:cNvSpPr/>
+            <p:nvPr/>
+          </p:nvSpPr>
+          <p:spPr>
+            <a:xfrm>
+              <a:off x="10653" y="391393"/>
+              <a:ext cx="76201" cy="57151"/>
+            </a:xfrm>
+            <a:prstGeom prst="rect">
+              <a:avLst/>
+            </a:prstGeom>
+            <a:solidFill>
+              <a:srgbClr val="659FD5"/>
+            </a:solidFill>
+            <a:ln w="12700" cap="flat">
+              <a:noFill/>
+              <a:miter lim="400000"/>
+            </a:ln>
+            <a:effectLst/>
+          </p:spPr>
+          <p:txBody>
+            <a:bodyPr wrap="square" lIns="54570" tIns="54570" rIns="54570" bIns="54570" numCol="1" anchor="ctr">
+              <a:noAutofit/>
+            </a:bodyPr>
+            <a:lstStyle/>
+            <a:p>
+              <a:pPr>
+                <a:lnSpc>
+                  <a:spcPct val="80000"/>
+                </a:lnSpc>
+                <a:spcBef>
+                  <a:spcPts val="0"/>
+                </a:spcBef>
+                <a:defRPr b="0">
+                  <a:solidFill>
+                    <a:srgbClr val="000000"/>
+                  </a:solidFill>
+                </a:defRPr>
+              </a:pPr>
+              <a:endParaRPr/>
+            </a:p>
+          </p:txBody>
+        </p:sp>
+        <p:sp>
+          <p:nvSpPr>
+            <p:cNvPr id="25" name="Rectangle">
+              <a:extLst>
+                <a:ext uri="{FF2B5EF4-FFF2-40B4-BE49-F238E27FC236}">
+                  <a16:creationId xmlns:a16="http://schemas.microsoft.com/office/drawing/2014/main" id="{4FCB8DEF-E0D7-ABD8-E9A3-084003E6541B}"/>
+                </a:ext>
+              </a:extLst>
+            </p:cNvPr>
+            <p:cNvSpPr/>
+            <p:nvPr/>
+          </p:nvSpPr>
+          <p:spPr>
+            <a:xfrm>
+              <a:off x="123301" y="349982"/>
+              <a:ext cx="76201" cy="98562"/>
+            </a:xfrm>
+            <a:prstGeom prst="rect">
+              <a:avLst/>
+            </a:prstGeom>
+            <a:solidFill>
+              <a:srgbClr val="659FD5"/>
+            </a:solidFill>
+            <a:ln w="12700" cap="flat">
+              <a:noFill/>
+              <a:miter lim="400000"/>
+            </a:ln>
+            <a:effectLst/>
+          </p:spPr>
+          <p:txBody>
+            <a:bodyPr wrap="square" lIns="54570" tIns="54570" rIns="54570" bIns="54570" numCol="1" anchor="ctr">
+              <a:noAutofit/>
+            </a:bodyPr>
+            <a:lstStyle/>
+            <a:p>
+              <a:pPr>
+                <a:lnSpc>
+                  <a:spcPct val="80000"/>
+                </a:lnSpc>
+                <a:spcBef>
+                  <a:spcPts val="0"/>
+                </a:spcBef>
+                <a:defRPr b="0">
+                  <a:solidFill>
+                    <a:srgbClr val="000000"/>
+                  </a:solidFill>
+                </a:defRPr>
+              </a:pPr>
+              <a:endParaRPr/>
+            </a:p>
+          </p:txBody>
+        </p:sp>
+        <p:sp>
+          <p:nvSpPr>
+            <p:cNvPr id="26" name="Rectangle">
+              <a:extLst>
+                <a:ext uri="{FF2B5EF4-FFF2-40B4-BE49-F238E27FC236}">
+                  <a16:creationId xmlns:a16="http://schemas.microsoft.com/office/drawing/2014/main" id="{A3E46628-C979-78D9-1E20-A2E329E54165}"/>
+                </a:ext>
+              </a:extLst>
+            </p:cNvPr>
+            <p:cNvSpPr/>
+            <p:nvPr/>
+          </p:nvSpPr>
+          <p:spPr>
+            <a:xfrm>
+              <a:off x="235948" y="266307"/>
+              <a:ext cx="76201" cy="182238"/>
+            </a:xfrm>
+            <a:prstGeom prst="rect">
+              <a:avLst/>
+            </a:prstGeom>
+            <a:solidFill>
+              <a:srgbClr val="659FD5"/>
+            </a:solidFill>
+            <a:ln w="12700" cap="flat">
+              <a:noFill/>
+              <a:miter lim="400000"/>
+            </a:ln>
+            <a:effectLst/>
+          </p:spPr>
+          <p:txBody>
+            <a:bodyPr wrap="square" lIns="54570" tIns="54570" rIns="54570" bIns="54570" numCol="1" anchor="ctr">
+              <a:noAutofit/>
+            </a:bodyPr>
+            <a:lstStyle/>
+            <a:p>
+              <a:pPr>
+                <a:lnSpc>
+                  <a:spcPct val="80000"/>
+                </a:lnSpc>
+                <a:spcBef>
+                  <a:spcPts val="0"/>
+                </a:spcBef>
+                <a:defRPr b="0">
+                  <a:solidFill>
+                    <a:srgbClr val="000000"/>
+                  </a:solidFill>
+                </a:defRPr>
+              </a:pPr>
+              <a:endParaRPr/>
+            </a:p>
+          </p:txBody>
+        </p:sp>
+        <p:sp>
+          <p:nvSpPr>
+            <p:cNvPr id="27" name="Rectangle">
+              <a:extLst>
+                <a:ext uri="{FF2B5EF4-FFF2-40B4-BE49-F238E27FC236}">
+                  <a16:creationId xmlns:a16="http://schemas.microsoft.com/office/drawing/2014/main" id="{71BB8312-BBB9-BB7A-33E9-95B490772C24}"/>
+                </a:ext>
+              </a:extLst>
+            </p:cNvPr>
+            <p:cNvSpPr/>
+            <p:nvPr/>
+          </p:nvSpPr>
+          <p:spPr>
+            <a:xfrm>
+              <a:off x="348596" y="122911"/>
+              <a:ext cx="76201" cy="325633"/>
+            </a:xfrm>
+            <a:prstGeom prst="rect">
+              <a:avLst/>
+            </a:prstGeom>
+            <a:solidFill>
+              <a:srgbClr val="659FD5"/>
+            </a:solidFill>
+            <a:ln w="12700" cap="flat">
+              <a:noFill/>
+              <a:miter lim="400000"/>
+            </a:ln>
+            <a:effectLst/>
+          </p:spPr>
+          <p:txBody>
+            <a:bodyPr wrap="square" lIns="54570" tIns="54570" rIns="54570" bIns="54570" numCol="1" anchor="ctr">
+              <a:noAutofit/>
+            </a:bodyPr>
+            <a:lstStyle/>
+            <a:p>
+              <a:pPr>
+                <a:lnSpc>
+                  <a:spcPct val="80000"/>
+                </a:lnSpc>
+                <a:spcBef>
+                  <a:spcPts val="0"/>
+                </a:spcBef>
+                <a:defRPr b="0">
+                  <a:solidFill>
+                    <a:srgbClr val="000000"/>
+                  </a:solidFill>
+                </a:defRPr>
+              </a:pPr>
+              <a:endParaRPr/>
+            </a:p>
+          </p:txBody>
+        </p:sp>
+      </p:grpSp>
+      <p:sp>
+        <p:nvSpPr>
+          <p:cNvPr id="456" name="TextBox 455">
+            <a:extLst>
+              <a:ext uri="{FF2B5EF4-FFF2-40B4-BE49-F238E27FC236}">
+                <a16:creationId xmlns:a16="http://schemas.microsoft.com/office/drawing/2014/main" id="{7EFBE857-AD1C-2154-F314-232F22605FF8}"/>
+              </a:ext>
+            </a:extLst>
+          </p:cNvPr>
+          <p:cNvSpPr txBox="1"/>
+          <p:nvPr/>
+        </p:nvSpPr>
+        <p:spPr>
+          <a:xfrm>
+            <a:off x="4778329" y="5514260"/>
+            <a:ext cx="4375182" cy="276999"/>
+          </a:xfrm>
+          <a:prstGeom prst="rect">
+            <a:avLst/>
+          </a:prstGeom>
+          <a:noFill/>
+          <a:ln w="12700" cap="flat">
+            <a:noFill/>
+            <a:miter lim="400000"/>
+          </a:ln>
+          <a:effectLst/>
+          <a:sp3d/>
+        </p:spPr>
+        <p:style>
+          <a:lnRef idx="0">
+            <a:scrgbClr r="0" g="0" b="0"/>
+          </a:lnRef>
+          <a:fillRef idx="0">
+            <a:scrgbClr r="0" g="0" b="0"/>
+          </a:fillRef>
+          <a:effectRef idx="0">
+            <a:scrgbClr r="0" g="0" b="0"/>
+          </a:effectRef>
+          <a:fontRef idx="none"/>
+        </p:style>
+        <p:txBody>
+          <a:bodyPr wrap="square">
+            <a:spAutoFit/>
+          </a:bodyPr>
+          <a:lstStyle/>
+          <a:p>
+            <a:r>
+              <a:rPr lang="en-GB" b="0" dirty="0"/>
+              <a:t>plot &lt;- </a:t>
+            </a:r>
+            <a:r>
+              <a:rPr lang="en-GB" b="0" dirty="0" err="1"/>
+              <a:t>ggplot</a:t>
+            </a:r>
+            <a:r>
+              <a:rPr lang="en-GB" b="0" dirty="0"/>
+              <a:t>(data = &lt;data&gt;) +</a:t>
+            </a:r>
+          </a:p>
+        </p:txBody>
+      </p:sp>
+      <p:sp>
+        <p:nvSpPr>
+          <p:cNvPr id="457" name="TextBox 456">
+            <a:extLst>
+              <a:ext uri="{FF2B5EF4-FFF2-40B4-BE49-F238E27FC236}">
+                <a16:creationId xmlns:a16="http://schemas.microsoft.com/office/drawing/2014/main" id="{D01F96E6-C95C-9CA5-AC18-B4C54691786B}"/>
+              </a:ext>
+            </a:extLst>
+          </p:cNvPr>
+          <p:cNvSpPr txBox="1"/>
+          <p:nvPr/>
+        </p:nvSpPr>
+        <p:spPr>
+          <a:xfrm>
+            <a:off x="5437415" y="5862346"/>
+            <a:ext cx="3600030" cy="1277273"/>
+          </a:xfrm>
+          <a:prstGeom prst="rect">
+            <a:avLst/>
+          </a:prstGeom>
+          <a:noFill/>
+          <a:ln w="12700" cap="flat">
+            <a:noFill/>
+            <a:miter lim="400000"/>
+          </a:ln>
+          <a:effectLst/>
+          <a:sp3d/>
+        </p:spPr>
+        <p:style>
+          <a:lnRef idx="0">
+            <a:scrgbClr r="0" g="0" b="0"/>
+          </a:lnRef>
+          <a:fillRef idx="0">
+            <a:scrgbClr r="0" g="0" b="0"/>
+          </a:fillRef>
+          <a:effectRef idx="0">
+            <a:scrgbClr r="0" g="0" b="0"/>
+          </a:effectRef>
+          <a:fontRef idx="none"/>
+        </p:style>
+        <p:txBody>
+          <a:bodyPr wrap="square">
+            <a:spAutoFit/>
+          </a:bodyPr>
+          <a:lstStyle/>
+          <a:p>
+            <a:r>
+              <a:rPr lang="en-GB" dirty="0"/>
+              <a:t>Bar chart</a:t>
+            </a:r>
+          </a:p>
+          <a:p>
+            <a:r>
+              <a:rPr lang="en-GB" b="0" dirty="0"/>
+              <a:t>plot + </a:t>
+            </a:r>
+            <a:r>
+              <a:rPr lang="en-GB" dirty="0" err="1"/>
+              <a:t>geom_bar</a:t>
+            </a:r>
+            <a:r>
+              <a:rPr lang="en-GB" b="0" dirty="0"/>
+              <a:t>(mapping = </a:t>
+            </a:r>
+            <a:r>
+              <a:rPr lang="en-GB" b="0" dirty="0" err="1"/>
+              <a:t>aes</a:t>
+            </a:r>
+            <a:r>
+              <a:rPr lang="en-GB" b="0" dirty="0"/>
+              <a:t>(x=&lt;x&gt;, width=0.8, fill=&lt;colour&gt;)</a:t>
+            </a:r>
+          </a:p>
+          <a:p>
+            <a:endParaRPr lang="en-GB" b="0" dirty="0"/>
+          </a:p>
+          <a:p>
+            <a:r>
+              <a:rPr lang="en-GB" b="0" dirty="0"/>
+              <a:t>&lt;x&gt; is categorical, </a:t>
+            </a:r>
+            <a:r>
+              <a:rPr lang="en-GB" b="0" dirty="0" err="1"/>
+              <a:t>geom_bar</a:t>
+            </a:r>
+            <a:r>
+              <a:rPr lang="en-GB" b="0" dirty="0"/>
+              <a:t> plots the number in each category</a:t>
+            </a:r>
+          </a:p>
+        </p:txBody>
+      </p:sp>
+      <p:grpSp>
+        <p:nvGrpSpPr>
+          <p:cNvPr id="460" name="Group">
+            <a:extLst>
+              <a:ext uri="{FF2B5EF4-FFF2-40B4-BE49-F238E27FC236}">
+                <a16:creationId xmlns:a16="http://schemas.microsoft.com/office/drawing/2014/main" id="{3898F66D-CB91-557F-1C5C-3440A1A1E657}"/>
+              </a:ext>
+            </a:extLst>
+          </p:cNvPr>
+          <p:cNvGrpSpPr/>
+          <p:nvPr/>
+        </p:nvGrpSpPr>
+        <p:grpSpPr>
+          <a:xfrm>
+            <a:off x="4822439" y="5866627"/>
+            <a:ext cx="448425" cy="448545"/>
+            <a:chOff x="0" y="0"/>
+            <a:chExt cx="448424" cy="448544"/>
+          </a:xfrm>
+        </p:grpSpPr>
+        <p:pic>
+          <p:nvPicPr>
+            <p:cNvPr id="461" name="Image" descr="Image">
+              <a:extLst>
+                <a:ext uri="{FF2B5EF4-FFF2-40B4-BE49-F238E27FC236}">
+                  <a16:creationId xmlns:a16="http://schemas.microsoft.com/office/drawing/2014/main" id="{5DB493D9-23FA-69E7-04A0-4DAFCD495CAE}"/>
+                </a:ext>
+              </a:extLst>
+            </p:cNvPr>
+            <p:cNvPicPr>
+              <a:picLocks noChangeAspect="1"/>
+            </p:cNvPicPr>
+            <p:nvPr/>
+          </p:nvPicPr>
+          <p:blipFill>
+            <a:blip r:embed="rId6"/>
+            <a:stretch>
+              <a:fillRect/>
+            </a:stretch>
+          </p:blipFill>
+          <p:spPr>
+            <a:xfrm>
+              <a:off x="0" y="0"/>
+              <a:ext cx="448425" cy="448544"/>
+            </a:xfrm>
+            <a:prstGeom prst="rect">
+              <a:avLst/>
+            </a:prstGeom>
+            <a:ln w="12700" cap="flat">
+              <a:noFill/>
+              <a:miter lim="400000"/>
+            </a:ln>
+            <a:effectLst/>
+          </p:spPr>
+        </p:pic>
+        <p:sp>
+          <p:nvSpPr>
+            <p:cNvPr id="462" name="Rectangle">
+              <a:extLst>
+                <a:ext uri="{FF2B5EF4-FFF2-40B4-BE49-F238E27FC236}">
+                  <a16:creationId xmlns:a16="http://schemas.microsoft.com/office/drawing/2014/main" id="{84BCD9B0-6921-9102-1576-DAD21387F412}"/>
+                </a:ext>
+              </a:extLst>
+            </p:cNvPr>
+            <p:cNvSpPr/>
+            <p:nvPr/>
+          </p:nvSpPr>
+          <p:spPr>
+            <a:xfrm>
+              <a:off x="10653" y="391393"/>
+              <a:ext cx="76201" cy="57151"/>
+            </a:xfrm>
+            <a:prstGeom prst="rect">
+              <a:avLst/>
+            </a:prstGeom>
+            <a:solidFill>
+              <a:srgbClr val="659FD5"/>
+            </a:solidFill>
+            <a:ln w="12700" cap="flat">
+              <a:noFill/>
+              <a:miter lim="400000"/>
+            </a:ln>
+            <a:effectLst/>
+          </p:spPr>
+          <p:txBody>
+            <a:bodyPr wrap="square" lIns="54570" tIns="54570" rIns="54570" bIns="54570" numCol="1" anchor="ctr">
+              <a:noAutofit/>
+            </a:bodyPr>
+            <a:lstStyle/>
+            <a:p>
+              <a:pPr>
+                <a:lnSpc>
+                  <a:spcPct val="80000"/>
+                </a:lnSpc>
+                <a:spcBef>
+                  <a:spcPts val="0"/>
+                </a:spcBef>
+                <a:defRPr b="0">
+                  <a:solidFill>
+                    <a:srgbClr val="000000"/>
+                  </a:solidFill>
+                </a:defRPr>
+              </a:pPr>
+              <a:endParaRPr/>
+            </a:p>
+          </p:txBody>
+        </p:sp>
+        <p:sp>
+          <p:nvSpPr>
+            <p:cNvPr id="463" name="Rectangle">
+              <a:extLst>
+                <a:ext uri="{FF2B5EF4-FFF2-40B4-BE49-F238E27FC236}">
+                  <a16:creationId xmlns:a16="http://schemas.microsoft.com/office/drawing/2014/main" id="{956D06C4-3A04-A3C5-5660-27AF9CD035C5}"/>
+                </a:ext>
+              </a:extLst>
+            </p:cNvPr>
+            <p:cNvSpPr/>
+            <p:nvPr/>
+          </p:nvSpPr>
+          <p:spPr>
+            <a:xfrm>
+              <a:off x="123301" y="349982"/>
+              <a:ext cx="76201" cy="98562"/>
+            </a:xfrm>
+            <a:prstGeom prst="rect">
+              <a:avLst/>
+            </a:prstGeom>
+            <a:solidFill>
+              <a:srgbClr val="659FD5"/>
+            </a:solidFill>
+            <a:ln w="12700" cap="flat">
+              <a:noFill/>
+              <a:miter lim="400000"/>
+            </a:ln>
+            <a:effectLst/>
+          </p:spPr>
+          <p:txBody>
+            <a:bodyPr wrap="square" lIns="54570" tIns="54570" rIns="54570" bIns="54570" numCol="1" anchor="ctr">
+              <a:noAutofit/>
+            </a:bodyPr>
+            <a:lstStyle/>
+            <a:p>
+              <a:pPr>
+                <a:lnSpc>
+                  <a:spcPct val="80000"/>
+                </a:lnSpc>
+                <a:spcBef>
+                  <a:spcPts val="0"/>
+                </a:spcBef>
+                <a:defRPr b="0">
+                  <a:solidFill>
+                    <a:srgbClr val="000000"/>
+                  </a:solidFill>
+                </a:defRPr>
+              </a:pPr>
+              <a:endParaRPr/>
+            </a:p>
+          </p:txBody>
+        </p:sp>
+        <p:sp>
+          <p:nvSpPr>
+            <p:cNvPr id="464" name="Rectangle">
+              <a:extLst>
+                <a:ext uri="{FF2B5EF4-FFF2-40B4-BE49-F238E27FC236}">
+                  <a16:creationId xmlns:a16="http://schemas.microsoft.com/office/drawing/2014/main" id="{FBC164E0-C0F8-1470-D708-DCC3F72C4893}"/>
+                </a:ext>
+              </a:extLst>
+            </p:cNvPr>
+            <p:cNvSpPr/>
+            <p:nvPr/>
+          </p:nvSpPr>
+          <p:spPr>
+            <a:xfrm>
+              <a:off x="235948" y="266307"/>
+              <a:ext cx="76201" cy="182238"/>
+            </a:xfrm>
+            <a:prstGeom prst="rect">
+              <a:avLst/>
+            </a:prstGeom>
+            <a:solidFill>
+              <a:srgbClr val="659FD5"/>
+            </a:solidFill>
+            <a:ln w="12700" cap="flat">
+              <a:noFill/>
+              <a:miter lim="400000"/>
+            </a:ln>
+            <a:effectLst/>
+          </p:spPr>
+          <p:txBody>
+            <a:bodyPr wrap="square" lIns="54570" tIns="54570" rIns="54570" bIns="54570" numCol="1" anchor="ctr">
+              <a:noAutofit/>
+            </a:bodyPr>
+            <a:lstStyle/>
+            <a:p>
+              <a:pPr>
+                <a:lnSpc>
+                  <a:spcPct val="80000"/>
+                </a:lnSpc>
+                <a:spcBef>
+                  <a:spcPts val="0"/>
+                </a:spcBef>
+                <a:defRPr b="0">
+                  <a:solidFill>
+                    <a:srgbClr val="000000"/>
+                  </a:solidFill>
+                </a:defRPr>
+              </a:pPr>
+              <a:endParaRPr/>
+            </a:p>
+          </p:txBody>
+        </p:sp>
+        <p:sp>
+          <p:nvSpPr>
+            <p:cNvPr id="465" name="Rectangle">
+              <a:extLst>
+                <a:ext uri="{FF2B5EF4-FFF2-40B4-BE49-F238E27FC236}">
+                  <a16:creationId xmlns:a16="http://schemas.microsoft.com/office/drawing/2014/main" id="{2A73CD50-D0C3-C45D-B35B-E42E80C854DB}"/>
+                </a:ext>
+              </a:extLst>
+            </p:cNvPr>
+            <p:cNvSpPr/>
+            <p:nvPr/>
+          </p:nvSpPr>
+          <p:spPr>
+            <a:xfrm>
+              <a:off x="348596" y="122911"/>
+              <a:ext cx="76201" cy="325633"/>
+            </a:xfrm>
+            <a:prstGeom prst="rect">
+              <a:avLst/>
+            </a:prstGeom>
+            <a:solidFill>
+              <a:srgbClr val="659FD5"/>
+            </a:solidFill>
+            <a:ln w="12700" cap="flat">
+              <a:noFill/>
+              <a:miter lim="400000"/>
+            </a:ln>
+            <a:effectLst/>
+          </p:spPr>
+          <p:txBody>
+            <a:bodyPr wrap="square" lIns="54570" tIns="54570" rIns="54570" bIns="54570" numCol="1" anchor="ctr">
+              <a:noAutofit/>
+            </a:bodyPr>
+            <a:lstStyle/>
+            <a:p>
+              <a:pPr>
+                <a:lnSpc>
+                  <a:spcPct val="80000"/>
+                </a:lnSpc>
+                <a:spcBef>
+                  <a:spcPts val="0"/>
+                </a:spcBef>
+                <a:defRPr b="0">
+                  <a:solidFill>
+                    <a:srgbClr val="000000"/>
+                  </a:solidFill>
+                </a:defRPr>
+              </a:pPr>
+              <a:endParaRPr/>
+            </a:p>
+          </p:txBody>
+        </p:sp>
+      </p:grpSp>
+      <p:grpSp>
+        <p:nvGrpSpPr>
+          <p:cNvPr id="466" name="Group">
+            <a:extLst>
+              <a:ext uri="{FF2B5EF4-FFF2-40B4-BE49-F238E27FC236}">
+                <a16:creationId xmlns:a16="http://schemas.microsoft.com/office/drawing/2014/main" id="{D5471244-22CB-3E6F-101F-3756A944F1EB}"/>
+              </a:ext>
+            </a:extLst>
+          </p:cNvPr>
+          <p:cNvGrpSpPr/>
+          <p:nvPr/>
+        </p:nvGrpSpPr>
+        <p:grpSpPr>
+          <a:xfrm rot="5400000">
+            <a:off x="6243651" y="9647380"/>
+            <a:ext cx="448425" cy="448545"/>
+            <a:chOff x="0" y="0"/>
+            <a:chExt cx="448424" cy="448544"/>
+          </a:xfrm>
+        </p:grpSpPr>
+        <p:pic>
+          <p:nvPicPr>
+            <p:cNvPr id="468" name="Image" descr="Image">
+              <a:extLst>
+                <a:ext uri="{FF2B5EF4-FFF2-40B4-BE49-F238E27FC236}">
+                  <a16:creationId xmlns:a16="http://schemas.microsoft.com/office/drawing/2014/main" id="{9832345A-881A-3AA4-96CA-F769D3BD1E7F}"/>
+                </a:ext>
+              </a:extLst>
+            </p:cNvPr>
+            <p:cNvPicPr>
+              <a:picLocks noChangeAspect="1"/>
+            </p:cNvPicPr>
+            <p:nvPr/>
+          </p:nvPicPr>
+          <p:blipFill>
+            <a:blip r:embed="rId6"/>
+            <a:stretch>
+              <a:fillRect/>
+            </a:stretch>
+          </p:blipFill>
+          <p:spPr>
+            <a:xfrm>
+              <a:off x="0" y="0"/>
+              <a:ext cx="448425" cy="448544"/>
+            </a:xfrm>
+            <a:prstGeom prst="rect">
+              <a:avLst/>
+            </a:prstGeom>
+            <a:ln w="12700" cap="flat">
+              <a:noFill/>
+              <a:miter lim="400000"/>
+            </a:ln>
+            <a:effectLst/>
+          </p:spPr>
+        </p:pic>
+        <p:sp>
+          <p:nvSpPr>
+            <p:cNvPr id="469" name="Rectangle">
+              <a:extLst>
+                <a:ext uri="{FF2B5EF4-FFF2-40B4-BE49-F238E27FC236}">
+                  <a16:creationId xmlns:a16="http://schemas.microsoft.com/office/drawing/2014/main" id="{A2B3E742-F969-42A0-6CF7-806A4A521BEE}"/>
+                </a:ext>
+              </a:extLst>
+            </p:cNvPr>
+            <p:cNvSpPr/>
+            <p:nvPr/>
+          </p:nvSpPr>
+          <p:spPr>
+            <a:xfrm>
+              <a:off x="10653" y="391393"/>
+              <a:ext cx="76201" cy="57151"/>
+            </a:xfrm>
+            <a:prstGeom prst="rect">
+              <a:avLst/>
+            </a:prstGeom>
+            <a:solidFill>
+              <a:srgbClr val="659FD5"/>
+            </a:solidFill>
+            <a:ln w="12700" cap="flat">
+              <a:noFill/>
+              <a:miter lim="400000"/>
+            </a:ln>
+            <a:effectLst/>
+          </p:spPr>
+          <p:txBody>
+            <a:bodyPr wrap="square" lIns="54570" tIns="54570" rIns="54570" bIns="54570" numCol="1" anchor="ctr">
+              <a:noAutofit/>
+            </a:bodyPr>
+            <a:lstStyle/>
+            <a:p>
+              <a:pPr>
+                <a:lnSpc>
+                  <a:spcPct val="80000"/>
+                </a:lnSpc>
+                <a:spcBef>
+                  <a:spcPts val="0"/>
+                </a:spcBef>
+                <a:defRPr b="0">
+                  <a:solidFill>
+                    <a:srgbClr val="000000"/>
+                  </a:solidFill>
+                </a:defRPr>
+              </a:pPr>
+              <a:endParaRPr/>
+            </a:p>
+          </p:txBody>
+        </p:sp>
+        <p:sp>
+          <p:nvSpPr>
+            <p:cNvPr id="470" name="Rectangle">
+              <a:extLst>
+                <a:ext uri="{FF2B5EF4-FFF2-40B4-BE49-F238E27FC236}">
+                  <a16:creationId xmlns:a16="http://schemas.microsoft.com/office/drawing/2014/main" id="{9B7ACCED-2EE4-CA78-5BCC-4EBAF3C85925}"/>
+                </a:ext>
+              </a:extLst>
+            </p:cNvPr>
+            <p:cNvSpPr/>
+            <p:nvPr/>
+          </p:nvSpPr>
+          <p:spPr>
+            <a:xfrm>
+              <a:off x="123301" y="349982"/>
+              <a:ext cx="76201" cy="98562"/>
+            </a:xfrm>
+            <a:prstGeom prst="rect">
+              <a:avLst/>
+            </a:prstGeom>
+            <a:solidFill>
+              <a:srgbClr val="659FD5"/>
+            </a:solidFill>
+            <a:ln w="12700" cap="flat">
+              <a:noFill/>
+              <a:miter lim="400000"/>
+            </a:ln>
+            <a:effectLst/>
+          </p:spPr>
+          <p:txBody>
+            <a:bodyPr wrap="square" lIns="54570" tIns="54570" rIns="54570" bIns="54570" numCol="1" anchor="ctr">
+              <a:noAutofit/>
+            </a:bodyPr>
+            <a:lstStyle/>
+            <a:p>
+              <a:pPr>
+                <a:lnSpc>
+                  <a:spcPct val="80000"/>
+                </a:lnSpc>
+                <a:spcBef>
+                  <a:spcPts val="0"/>
+                </a:spcBef>
+                <a:defRPr b="0">
+                  <a:solidFill>
+                    <a:srgbClr val="000000"/>
+                  </a:solidFill>
+                </a:defRPr>
+              </a:pPr>
+              <a:endParaRPr/>
+            </a:p>
+          </p:txBody>
+        </p:sp>
+        <p:sp>
+          <p:nvSpPr>
+            <p:cNvPr id="471" name="Rectangle">
+              <a:extLst>
+                <a:ext uri="{FF2B5EF4-FFF2-40B4-BE49-F238E27FC236}">
+                  <a16:creationId xmlns:a16="http://schemas.microsoft.com/office/drawing/2014/main" id="{531A0DB2-DC3E-9D3C-C26A-1DD762DD2471}"/>
+                </a:ext>
+              </a:extLst>
+            </p:cNvPr>
+            <p:cNvSpPr/>
+            <p:nvPr/>
+          </p:nvSpPr>
+          <p:spPr>
+            <a:xfrm>
+              <a:off x="235948" y="266307"/>
+              <a:ext cx="76201" cy="182238"/>
+            </a:xfrm>
+            <a:prstGeom prst="rect">
+              <a:avLst/>
+            </a:prstGeom>
+            <a:solidFill>
+              <a:srgbClr val="659FD5"/>
+            </a:solidFill>
+            <a:ln w="12700" cap="flat">
+              <a:noFill/>
+              <a:miter lim="400000"/>
+            </a:ln>
+            <a:effectLst/>
+          </p:spPr>
+          <p:txBody>
+            <a:bodyPr wrap="square" lIns="54570" tIns="54570" rIns="54570" bIns="54570" numCol="1" anchor="ctr">
+              <a:noAutofit/>
+            </a:bodyPr>
+            <a:lstStyle/>
+            <a:p>
+              <a:pPr>
+                <a:lnSpc>
+                  <a:spcPct val="80000"/>
+                </a:lnSpc>
+                <a:spcBef>
+                  <a:spcPts val="0"/>
+                </a:spcBef>
+                <a:defRPr b="0">
+                  <a:solidFill>
+                    <a:srgbClr val="000000"/>
+                  </a:solidFill>
+                </a:defRPr>
+              </a:pPr>
+              <a:endParaRPr/>
+            </a:p>
+          </p:txBody>
+        </p:sp>
+        <p:sp>
+          <p:nvSpPr>
+            <p:cNvPr id="472" name="Rectangle">
+              <a:extLst>
+                <a:ext uri="{FF2B5EF4-FFF2-40B4-BE49-F238E27FC236}">
+                  <a16:creationId xmlns:a16="http://schemas.microsoft.com/office/drawing/2014/main" id="{F2072EC3-3F01-E974-A6EF-0F65A6B92B2F}"/>
+                </a:ext>
+              </a:extLst>
+            </p:cNvPr>
+            <p:cNvSpPr/>
+            <p:nvPr/>
+          </p:nvSpPr>
+          <p:spPr>
+            <a:xfrm>
+              <a:off x="348596" y="122911"/>
+              <a:ext cx="76201" cy="325633"/>
+            </a:xfrm>
+            <a:prstGeom prst="rect">
+              <a:avLst/>
+            </a:prstGeom>
+            <a:solidFill>
+              <a:srgbClr val="659FD5"/>
+            </a:solidFill>
+            <a:ln w="12700" cap="flat">
+              <a:noFill/>
+              <a:miter lim="400000"/>
+            </a:ln>
+            <a:effectLst/>
+          </p:spPr>
+          <p:txBody>
+            <a:bodyPr wrap="square" lIns="54570" tIns="54570" rIns="54570" bIns="54570" numCol="1" anchor="ctr">
+              <a:noAutofit/>
+            </a:bodyPr>
+            <a:lstStyle/>
+            <a:p>
+              <a:pPr>
+                <a:lnSpc>
+                  <a:spcPct val="80000"/>
+                </a:lnSpc>
+                <a:spcBef>
+                  <a:spcPts val="0"/>
+                </a:spcBef>
+                <a:defRPr b="0">
+                  <a:solidFill>
+                    <a:srgbClr val="000000"/>
+                  </a:solidFill>
+                </a:defRPr>
+              </a:pPr>
+              <a:endParaRPr/>
+            </a:p>
+          </p:txBody>
+        </p:sp>
+      </p:grpSp>
+      <p:sp>
+        <p:nvSpPr>
+          <p:cNvPr id="473" name="ggplot(mpg, aes(hwy, cty)) +…">
+            <a:extLst>
+              <a:ext uri="{FF2B5EF4-FFF2-40B4-BE49-F238E27FC236}">
+                <a16:creationId xmlns:a16="http://schemas.microsoft.com/office/drawing/2014/main" id="{9D4F910E-615A-476E-343E-7549CAD9746E}"/>
+              </a:ext>
+            </a:extLst>
+          </p:cNvPr>
+          <p:cNvSpPr txBox="1"/>
+          <p:nvPr/>
+        </p:nvSpPr>
+        <p:spPr>
+          <a:xfrm>
+            <a:off x="6203164" y="10225561"/>
+            <a:ext cx="732121" cy="479538"/>
+          </a:xfrm>
+          <a:prstGeom prst="rect">
+            <a:avLst/>
+          </a:prstGeom>
+          <a:solidFill>
+            <a:srgbClr val="FFFFFF"/>
+          </a:solidFill>
+          <a:ln w="12700">
+            <a:solidFill>
+              <a:srgbClr val="A6AAA9"/>
+            </a:solidFill>
+            <a:miter lim="400000"/>
+          </a:ln>
+          <a:extLst>
+            <a:ext uri="{C572A759-6A51-4108-AA02-DFA0A04FC94B}">
+              <ma14:wrappingTextBoxFlag xmlns="" xmlns:m="http://schemas.openxmlformats.org/officeDocument/2006/math" xmlns:a14="http://schemas.microsoft.com/office/drawing/2010/main" xmlns:ma14="http://schemas.microsoft.com/office/mac/drawingml/2011/main" val="1"/>
+            </a:ext>
+          </a:extLst>
+        </p:spPr>
+        <p:txBody>
+          <a:bodyPr wrap="square" lIns="54570" tIns="54570" rIns="54570" bIns="54570" anchor="ctr">
+            <a:spAutoFit/>
+          </a:bodyPr>
+          <a:lstStyle/>
+          <a:p>
+            <a:pPr>
+              <a:spcBef>
+                <a:spcPts val="0"/>
+              </a:spcBef>
+              <a:defRPr b="0">
+                <a:solidFill>
+                  <a:srgbClr val="000000"/>
+                </a:solidFill>
+                <a:latin typeface="Menlo"/>
+                <a:ea typeface="Menlo"/>
+                <a:cs typeface="Menlo"/>
+                <a:sym typeface="Menlo"/>
+              </a:defRPr>
+            </a:pPr>
+            <a:r>
+              <a:rPr lang="en-GB" sz="800" dirty="0" err="1"/>
+              <a:t>coord_flip</a:t>
+            </a:r>
+            <a:r>
+              <a:rPr lang="en-GB" sz="800" dirty="0"/>
+              <a:t>()</a:t>
+            </a:r>
+          </a:p>
+          <a:p>
+            <a:pPr>
+              <a:spcBef>
+                <a:spcPts val="0"/>
+              </a:spcBef>
+              <a:defRPr b="0">
+                <a:solidFill>
+                  <a:srgbClr val="000000"/>
+                </a:solidFill>
+                <a:latin typeface="Menlo"/>
+                <a:ea typeface="Menlo"/>
+                <a:cs typeface="Menlo"/>
+                <a:sym typeface="Menlo"/>
+              </a:defRPr>
+            </a:pPr>
+            <a:endParaRPr lang="en-GB" sz="800" dirty="0"/>
+          </a:p>
+          <a:p>
+            <a:pPr>
+              <a:spcBef>
+                <a:spcPts val="0"/>
+              </a:spcBef>
+              <a:defRPr b="0">
+                <a:solidFill>
+                  <a:srgbClr val="000000"/>
+                </a:solidFill>
+                <a:latin typeface="Menlo"/>
+                <a:ea typeface="Menlo"/>
+                <a:cs typeface="Menlo"/>
+                <a:sym typeface="Menlo"/>
+              </a:defRPr>
+            </a:pPr>
+            <a:r>
+              <a:rPr lang="en-GB" sz="800" dirty="0"/>
+              <a:t>Flips chart</a:t>
+            </a:r>
+            <a:endParaRPr sz="800" dirty="0"/>
+          </a:p>
+        </p:txBody>
+      </p:sp>
+      <p:grpSp>
+        <p:nvGrpSpPr>
+          <p:cNvPr id="474" name="Group">
+            <a:extLst>
+              <a:ext uri="{FF2B5EF4-FFF2-40B4-BE49-F238E27FC236}">
+                <a16:creationId xmlns:a16="http://schemas.microsoft.com/office/drawing/2014/main" id="{F581B646-1367-7A82-4F72-A3163543735A}"/>
+              </a:ext>
+            </a:extLst>
+          </p:cNvPr>
+          <p:cNvGrpSpPr/>
+          <p:nvPr/>
+        </p:nvGrpSpPr>
+        <p:grpSpPr>
+          <a:xfrm>
+            <a:off x="4831727" y="2551262"/>
+            <a:ext cx="448426" cy="435562"/>
+            <a:chOff x="0" y="0"/>
+            <a:chExt cx="448425" cy="448544"/>
+          </a:xfrm>
+        </p:grpSpPr>
+        <p:pic>
+          <p:nvPicPr>
+            <p:cNvPr id="475" name="Image" descr="Image">
+              <a:extLst>
+                <a:ext uri="{FF2B5EF4-FFF2-40B4-BE49-F238E27FC236}">
+                  <a16:creationId xmlns:a16="http://schemas.microsoft.com/office/drawing/2014/main" id="{84E9BAB9-54E3-2FB0-776F-513C69038005}"/>
+                </a:ext>
+              </a:extLst>
+            </p:cNvPr>
+            <p:cNvPicPr>
+              <a:picLocks noChangeAspect="1"/>
+            </p:cNvPicPr>
+            <p:nvPr/>
+          </p:nvPicPr>
+          <p:blipFill>
+            <a:blip r:embed="rId6"/>
+            <a:stretch>
+              <a:fillRect/>
+            </a:stretch>
+          </p:blipFill>
+          <p:spPr>
+            <a:xfrm>
+              <a:off x="0" y="0"/>
+              <a:ext cx="448425" cy="448544"/>
+            </a:xfrm>
+            <a:prstGeom prst="rect">
+              <a:avLst/>
+            </a:prstGeom>
+            <a:ln w="12700" cap="flat">
+              <a:noFill/>
+              <a:miter lim="400000"/>
+            </a:ln>
+            <a:effectLst/>
+          </p:spPr>
+        </p:pic>
+        <p:sp>
+          <p:nvSpPr>
+            <p:cNvPr id="476" name="Line">
+              <a:extLst>
+                <a:ext uri="{FF2B5EF4-FFF2-40B4-BE49-F238E27FC236}">
+                  <a16:creationId xmlns:a16="http://schemas.microsoft.com/office/drawing/2014/main" id="{B4F3B7DE-969A-5925-49E6-4C83B286BFF9}"/>
+                </a:ext>
+              </a:extLst>
+            </p:cNvPr>
+            <p:cNvSpPr/>
+            <p:nvPr/>
+          </p:nvSpPr>
+          <p:spPr>
+            <a:xfrm>
+              <a:off x="2587" y="92697"/>
+              <a:ext cx="444185" cy="275622"/>
+            </a:xfrm>
+            <a:custGeom>
+              <a:avLst/>
+              <a:gdLst/>
+              <a:ahLst/>
+              <a:cxnLst>
+                <a:cxn ang="0">
+                  <a:pos x="wd2" y="hd2"/>
+                </a:cxn>
+                <a:cxn ang="5400000">
+                  <a:pos x="wd2" y="hd2"/>
+                </a:cxn>
+                <a:cxn ang="10800000">
+                  <a:pos x="wd2" y="hd2"/>
+                </a:cxn>
+                <a:cxn ang="16200000">
+                  <a:pos x="wd2" y="hd2"/>
+                </a:cxn>
+              </a:cxnLst>
+              <a:rect l="0" t="0" r="r" b="b"/>
+              <a:pathLst>
+                <a:path w="21600" h="21600" extrusionOk="0">
+                  <a:moveTo>
+                    <a:pt x="0" y="21600"/>
+                  </a:moveTo>
+                  <a:lnTo>
+                    <a:pt x="2104" y="20087"/>
+                  </a:lnTo>
+                  <a:lnTo>
+                    <a:pt x="3587" y="18508"/>
+                  </a:lnTo>
+                  <a:lnTo>
+                    <a:pt x="4599" y="16206"/>
+                  </a:lnTo>
+                  <a:cubicBezTo>
+                    <a:pt x="4736" y="15881"/>
+                    <a:pt x="4874" y="15555"/>
+                    <a:pt x="5011" y="15230"/>
+                  </a:cubicBezTo>
+                  <a:cubicBezTo>
+                    <a:pt x="5148" y="14905"/>
+                    <a:pt x="5286" y="14579"/>
+                    <a:pt x="5423" y="14254"/>
+                  </a:cubicBezTo>
+                  <a:cubicBezTo>
+                    <a:pt x="5593" y="14819"/>
+                    <a:pt x="5762" y="15384"/>
+                    <a:pt x="5932" y="15948"/>
+                  </a:cubicBezTo>
+                  <a:cubicBezTo>
+                    <a:pt x="6102" y="16513"/>
+                    <a:pt x="6272" y="17078"/>
+                    <a:pt x="6442" y="17643"/>
+                  </a:cubicBezTo>
+                  <a:lnTo>
+                    <a:pt x="8078" y="16008"/>
+                  </a:lnTo>
+                  <a:lnTo>
+                    <a:pt x="9272" y="13609"/>
+                  </a:lnTo>
+                  <a:lnTo>
+                    <a:pt x="10499" y="9377"/>
+                  </a:lnTo>
+                  <a:lnTo>
+                    <a:pt x="12208" y="11732"/>
+                  </a:lnTo>
+                  <a:lnTo>
+                    <a:pt x="13281" y="8587"/>
+                  </a:lnTo>
+                  <a:lnTo>
+                    <a:pt x="14507" y="4200"/>
+                  </a:lnTo>
+                  <a:lnTo>
+                    <a:pt x="15513" y="0"/>
+                  </a:lnTo>
+                  <a:lnTo>
+                    <a:pt x="16848" y="4930"/>
+                  </a:lnTo>
+                  <a:lnTo>
+                    <a:pt x="18336" y="3993"/>
+                  </a:lnTo>
+                  <a:lnTo>
+                    <a:pt x="19783" y="9080"/>
+                  </a:lnTo>
+                  <a:lnTo>
+                    <a:pt x="21600" y="13583"/>
+                  </a:lnTo>
+                </a:path>
+              </a:pathLst>
+            </a:custGeom>
+            <a:noFill/>
+            <a:ln w="12700" cap="flat">
+              <a:solidFill>
+                <a:srgbClr val="659FD5"/>
+              </a:solidFill>
+              <a:prstDash val="solid"/>
+              <a:miter lim="400000"/>
+            </a:ln>
+            <a:effectLst/>
+          </p:spPr>
+          <p:txBody>
+            <a:bodyPr wrap="square" lIns="54570" tIns="54570" rIns="54570" bIns="54570" numCol="1" anchor="ctr">
+              <a:noAutofit/>
+            </a:bodyPr>
+            <a:lstStyle/>
+            <a:p>
+              <a:pPr algn="ctr">
+                <a:spcBef>
+                  <a:spcPts val="0"/>
+                </a:spcBef>
+                <a:defRPr sz="2600" b="0">
+                  <a:solidFill>
+                    <a:srgbClr val="000000"/>
+                  </a:solidFill>
+                  <a:latin typeface="Helvetica Light"/>
+                  <a:ea typeface="Helvetica Light"/>
+                  <a:cs typeface="Helvetica Light"/>
+                  <a:sym typeface="Helvetica Light"/>
+                </a:defRPr>
+              </a:pPr>
+              <a:endParaRPr/>
+            </a:p>
+          </p:txBody>
+        </p:sp>
+      </p:grpSp>
+      <p:sp>
+        <p:nvSpPr>
+          <p:cNvPr id="477" name="TextBox 476">
+            <a:extLst>
+              <a:ext uri="{FF2B5EF4-FFF2-40B4-BE49-F238E27FC236}">
+                <a16:creationId xmlns:a16="http://schemas.microsoft.com/office/drawing/2014/main" id="{E093B10C-EB97-86D9-574A-120627063E9A}"/>
+              </a:ext>
+            </a:extLst>
+          </p:cNvPr>
+          <p:cNvSpPr txBox="1"/>
+          <p:nvPr/>
+        </p:nvSpPr>
+        <p:spPr>
+          <a:xfrm>
+            <a:off x="5420104" y="2461741"/>
+            <a:ext cx="3076594" cy="487313"/>
+          </a:xfrm>
+          <a:prstGeom prst="rect">
+            <a:avLst/>
+          </a:prstGeom>
+          <a:noFill/>
+          <a:ln w="12700" cap="flat">
+            <a:noFill/>
+            <a:miter lim="400000"/>
+          </a:ln>
+          <a:effectLst/>
+          <a:sp3d/>
+        </p:spPr>
+        <p:style>
+          <a:lnRef idx="0">
+            <a:scrgbClr r="0" g="0" b="0"/>
+          </a:lnRef>
+          <a:fillRef idx="0">
+            <a:scrgbClr r="0" g="0" b="0"/>
+          </a:fillRef>
+          <a:effectRef idx="0">
+            <a:scrgbClr r="0" g="0" b="0"/>
+          </a:effectRef>
+          <a:fontRef idx="none"/>
+        </p:style>
+        <p:txBody>
+          <a:bodyPr wrap="square">
+            <a:spAutoFit/>
+          </a:bodyPr>
+          <a:lstStyle/>
+          <a:p>
+            <a:r>
+              <a:rPr lang="en-GB" dirty="0"/>
+              <a:t>Line chart </a:t>
+            </a:r>
+          </a:p>
+          <a:p>
+            <a:r>
+              <a:rPr lang="en-GB" b="0" dirty="0"/>
+              <a:t>plot + </a:t>
+            </a:r>
+            <a:r>
+              <a:rPr lang="en-GB" dirty="0" err="1"/>
+              <a:t>geom_line</a:t>
+            </a:r>
+            <a:r>
+              <a:rPr lang="en-GB" b="0" dirty="0"/>
+              <a:t>(size=1.1)</a:t>
+            </a:r>
+          </a:p>
+        </p:txBody>
+      </p:sp>
+      <p:pic>
+        <p:nvPicPr>
+          <p:cNvPr id="479" name="Image" descr="Image">
+            <a:extLst>
+              <a:ext uri="{FF2B5EF4-FFF2-40B4-BE49-F238E27FC236}">
+                <a16:creationId xmlns:a16="http://schemas.microsoft.com/office/drawing/2014/main" id="{85538C1D-5E7D-C8A7-82BF-C83B57F42F4F}"/>
+              </a:ext>
+            </a:extLst>
+          </p:cNvPr>
+          <p:cNvPicPr>
+            <a:picLocks noChangeAspect="1"/>
+          </p:cNvPicPr>
+          <p:nvPr/>
+        </p:nvPicPr>
+        <p:blipFill>
+          <a:blip r:embed="rId6"/>
+          <a:stretch>
+            <a:fillRect/>
+          </a:stretch>
+        </p:blipFill>
+        <p:spPr>
+          <a:xfrm>
+            <a:off x="4822439" y="4165012"/>
+            <a:ext cx="448426" cy="448545"/>
+          </a:xfrm>
+          <a:prstGeom prst="rect">
+            <a:avLst/>
+          </a:prstGeom>
+          <a:ln w="12700" cap="flat">
+            <a:noFill/>
+            <a:miter lim="400000"/>
+          </a:ln>
+          <a:effectLst/>
+        </p:spPr>
+      </p:pic>
+      <p:sp>
+        <p:nvSpPr>
+          <p:cNvPr id="491" name="Oval 490">
+            <a:extLst>
+              <a:ext uri="{FF2B5EF4-FFF2-40B4-BE49-F238E27FC236}">
+                <a16:creationId xmlns:a16="http://schemas.microsoft.com/office/drawing/2014/main" id="{DAFE2B7A-9EA4-7F9D-7F4F-DD44FEFD8EED}"/>
+              </a:ext>
+            </a:extLst>
+          </p:cNvPr>
+          <p:cNvSpPr>
+            <a:spLocks noChangeAspect="1"/>
+          </p:cNvSpPr>
+          <p:nvPr/>
+        </p:nvSpPr>
+        <p:spPr>
+          <a:xfrm>
+            <a:off x="4909293" y="4262110"/>
+            <a:ext cx="36000" cy="36000"/>
+          </a:xfrm>
+          <a:prstGeom prst="ellipse">
+            <a:avLst/>
+          </a:prstGeom>
+          <a:blipFill rotWithShape="1">
+            <a:blip r:embed="rId8"/>
+            <a:srcRect/>
+            <a:tile tx="0" ty="0" sx="100000" sy="100000" flip="none" algn="tl"/>
+          </a:blipFill>
+          <a:ln w="12700" cap="flat">
+            <a:noFill/>
+            <a:miter lim="400000"/>
+          </a:ln>
+          <a:effectLst/>
+          <a:sp3d/>
+        </p:spPr>
+        <p:style>
+          <a:lnRef idx="0">
+            <a:scrgbClr r="0" g="0" b="0"/>
+          </a:lnRef>
+          <a:fillRef idx="0">
+            <a:scrgbClr r="0" g="0" b="0"/>
+          </a:fillRef>
+          <a:effectRef idx="0">
+            <a:scrgbClr r="0" g="0" b="0"/>
+          </a:effectRef>
+          <a:fontRef idx="none"/>
+        </p:style>
+        <p:txBody>
+          <a:bodyPr rot="0" spcFirstLastPara="1" vertOverflow="overflow" horzOverflow="overflow" vert="horz" wrap="square" lIns="54570" tIns="54570" rIns="54570" bIns="54570" numCol="1" spcCol="38100" rtlCol="0" anchor="ctr">
+            <a:spAutoFit/>
+          </a:bodyPr>
+          <a:lstStyle/>
+          <a:p>
+            <a:pPr marL="0" marR="0" indent="0" algn="l" defTabSz="584200" rtl="0" fontAlgn="auto" latinLnBrk="0" hangingPunct="0">
+              <a:lnSpc>
+                <a:spcPct val="80000"/>
+              </a:lnSpc>
+              <a:spcBef>
+                <a:spcPts val="0"/>
+              </a:spcBef>
+              <a:spcAft>
+                <a:spcPts val="0"/>
+              </a:spcAft>
+              <a:buClrTx/>
+              <a:buSzTx/>
+              <a:buFontTx/>
+              <a:buNone/>
+              <a:tabLst/>
+            </a:pPr>
+            <a:endParaRPr kumimoji="0" lang="en-GB" sz="1200" b="0" i="0" u="none" strike="noStrike" cap="none" spc="0" normalizeH="0" baseline="0">
+              <a:ln>
+                <a:noFill/>
+              </a:ln>
+              <a:solidFill>
+                <a:srgbClr val="000000"/>
+              </a:solidFill>
+              <a:effectLst/>
+              <a:uFillTx/>
+              <a:latin typeface="Source Sans Pro"/>
+              <a:ea typeface="Source Sans Pro"/>
+              <a:cs typeface="Source Sans Pro"/>
+              <a:sym typeface="Source Sans Pro"/>
+            </a:endParaRPr>
+          </a:p>
+        </p:txBody>
+      </p:sp>
+      <p:sp>
+        <p:nvSpPr>
+          <p:cNvPr id="492" name="Oval 491">
+            <a:extLst>
+              <a:ext uri="{FF2B5EF4-FFF2-40B4-BE49-F238E27FC236}">
+                <a16:creationId xmlns:a16="http://schemas.microsoft.com/office/drawing/2014/main" id="{F1CD02DD-1BA0-F0B0-A27B-F43F25758FFD}"/>
+              </a:ext>
+            </a:extLst>
+          </p:cNvPr>
+          <p:cNvSpPr>
+            <a:spLocks noChangeAspect="1"/>
+          </p:cNvSpPr>
+          <p:nvPr/>
+        </p:nvSpPr>
+        <p:spPr>
+          <a:xfrm>
+            <a:off x="5061693" y="4414510"/>
+            <a:ext cx="36000" cy="36000"/>
+          </a:xfrm>
+          <a:prstGeom prst="ellipse">
+            <a:avLst/>
+          </a:prstGeom>
+          <a:blipFill rotWithShape="1">
+            <a:blip r:embed="rId8"/>
+            <a:srcRect/>
+            <a:tile tx="0" ty="0" sx="100000" sy="100000" flip="none" algn="tl"/>
+          </a:blipFill>
+          <a:ln w="12700" cap="flat">
+            <a:noFill/>
+            <a:miter lim="400000"/>
+          </a:ln>
+          <a:effectLst/>
+          <a:sp3d/>
+        </p:spPr>
+        <p:style>
+          <a:lnRef idx="0">
+            <a:scrgbClr r="0" g="0" b="0"/>
+          </a:lnRef>
+          <a:fillRef idx="0">
+            <a:scrgbClr r="0" g="0" b="0"/>
+          </a:fillRef>
+          <a:effectRef idx="0">
+            <a:scrgbClr r="0" g="0" b="0"/>
+          </a:effectRef>
+          <a:fontRef idx="none"/>
+        </p:style>
+        <p:txBody>
+          <a:bodyPr rot="0" spcFirstLastPara="1" vertOverflow="overflow" horzOverflow="overflow" vert="horz" wrap="square" lIns="54570" tIns="54570" rIns="54570" bIns="54570" numCol="1" spcCol="38100" rtlCol="0" anchor="ctr">
+            <a:spAutoFit/>
+          </a:bodyPr>
+          <a:lstStyle/>
+          <a:p>
+            <a:pPr marL="0" marR="0" indent="0" algn="l" defTabSz="584200" rtl="0" fontAlgn="auto" latinLnBrk="0" hangingPunct="0">
+              <a:lnSpc>
+                <a:spcPct val="80000"/>
+              </a:lnSpc>
+              <a:spcBef>
+                <a:spcPts val="0"/>
+              </a:spcBef>
+              <a:spcAft>
+                <a:spcPts val="0"/>
+              </a:spcAft>
+              <a:buClrTx/>
+              <a:buSzTx/>
+              <a:buFontTx/>
+              <a:buNone/>
+              <a:tabLst/>
+            </a:pPr>
+            <a:endParaRPr kumimoji="0" lang="en-GB" sz="1200" b="0" i="0" u="none" strike="noStrike" cap="none" spc="0" normalizeH="0" baseline="0">
+              <a:ln>
+                <a:noFill/>
+              </a:ln>
+              <a:solidFill>
+                <a:srgbClr val="000000"/>
+              </a:solidFill>
+              <a:effectLst/>
+              <a:uFillTx/>
+              <a:latin typeface="Source Sans Pro"/>
+              <a:ea typeface="Source Sans Pro"/>
+              <a:cs typeface="Source Sans Pro"/>
+              <a:sym typeface="Source Sans Pro"/>
+            </a:endParaRPr>
+          </a:p>
+        </p:txBody>
+      </p:sp>
+      <p:sp>
+        <p:nvSpPr>
+          <p:cNvPr id="493" name="Oval 492">
+            <a:extLst>
+              <a:ext uri="{FF2B5EF4-FFF2-40B4-BE49-F238E27FC236}">
+                <a16:creationId xmlns:a16="http://schemas.microsoft.com/office/drawing/2014/main" id="{B3FBDDF4-A8AC-6780-FCEC-68665363F01B}"/>
+              </a:ext>
+            </a:extLst>
+          </p:cNvPr>
+          <p:cNvSpPr>
+            <a:spLocks noChangeAspect="1"/>
+          </p:cNvSpPr>
+          <p:nvPr/>
+        </p:nvSpPr>
+        <p:spPr>
+          <a:xfrm>
+            <a:off x="5144064" y="4306531"/>
+            <a:ext cx="36000" cy="36000"/>
+          </a:xfrm>
+          <a:prstGeom prst="ellipse">
+            <a:avLst/>
+          </a:prstGeom>
+          <a:blipFill rotWithShape="1">
+            <a:blip r:embed="rId8"/>
+            <a:srcRect/>
+            <a:tile tx="0" ty="0" sx="100000" sy="100000" flip="none" algn="tl"/>
+          </a:blipFill>
+          <a:ln w="12700" cap="flat">
+            <a:noFill/>
+            <a:miter lim="400000"/>
+          </a:ln>
+          <a:effectLst/>
+          <a:sp3d/>
+        </p:spPr>
+        <p:style>
+          <a:lnRef idx="0">
+            <a:scrgbClr r="0" g="0" b="0"/>
+          </a:lnRef>
+          <a:fillRef idx="0">
+            <a:scrgbClr r="0" g="0" b="0"/>
+          </a:fillRef>
+          <a:effectRef idx="0">
+            <a:scrgbClr r="0" g="0" b="0"/>
+          </a:effectRef>
+          <a:fontRef idx="none"/>
+        </p:style>
+        <p:txBody>
+          <a:bodyPr rot="0" spcFirstLastPara="1" vertOverflow="overflow" horzOverflow="overflow" vert="horz" wrap="square" lIns="54570" tIns="54570" rIns="54570" bIns="54570" numCol="1" spcCol="38100" rtlCol="0" anchor="ctr">
+            <a:spAutoFit/>
+          </a:bodyPr>
+          <a:lstStyle/>
+          <a:p>
+            <a:pPr marL="0" marR="0" indent="0" algn="l" defTabSz="584200" rtl="0" fontAlgn="auto" latinLnBrk="0" hangingPunct="0">
+              <a:lnSpc>
+                <a:spcPct val="80000"/>
+              </a:lnSpc>
+              <a:spcBef>
+                <a:spcPts val="0"/>
+              </a:spcBef>
+              <a:spcAft>
+                <a:spcPts val="0"/>
+              </a:spcAft>
+              <a:buClrTx/>
+              <a:buSzTx/>
+              <a:buFontTx/>
+              <a:buNone/>
+              <a:tabLst/>
+            </a:pPr>
+            <a:endParaRPr kumimoji="0" lang="en-GB" sz="1200" b="0" i="0" u="none" strike="noStrike" cap="none" spc="0" normalizeH="0" baseline="0">
+              <a:ln>
+                <a:noFill/>
+              </a:ln>
+              <a:solidFill>
+                <a:srgbClr val="000000"/>
+              </a:solidFill>
+              <a:effectLst/>
+              <a:uFillTx/>
+              <a:latin typeface="Source Sans Pro"/>
+              <a:ea typeface="Source Sans Pro"/>
+              <a:cs typeface="Source Sans Pro"/>
+              <a:sym typeface="Source Sans Pro"/>
+            </a:endParaRPr>
+          </a:p>
+        </p:txBody>
+      </p:sp>
+      <p:sp>
+        <p:nvSpPr>
+          <p:cNvPr id="506" name="Oval 505">
+            <a:extLst>
+              <a:ext uri="{FF2B5EF4-FFF2-40B4-BE49-F238E27FC236}">
+                <a16:creationId xmlns:a16="http://schemas.microsoft.com/office/drawing/2014/main" id="{41A61891-726B-E77A-A025-8F761F52D170}"/>
+              </a:ext>
+            </a:extLst>
+          </p:cNvPr>
+          <p:cNvSpPr>
+            <a:spLocks noChangeAspect="1"/>
+          </p:cNvSpPr>
+          <p:nvPr/>
+        </p:nvSpPr>
+        <p:spPr>
+          <a:xfrm>
+            <a:off x="5153036" y="4232508"/>
+            <a:ext cx="36000" cy="36000"/>
+          </a:xfrm>
+          <a:prstGeom prst="ellipse">
+            <a:avLst/>
+          </a:prstGeom>
+          <a:blipFill rotWithShape="1">
+            <a:blip r:embed="rId8"/>
+            <a:srcRect/>
+            <a:tile tx="0" ty="0" sx="100000" sy="100000" flip="none" algn="tl"/>
+          </a:blipFill>
+          <a:ln w="12700" cap="flat">
+            <a:noFill/>
+            <a:miter lim="400000"/>
+          </a:ln>
+          <a:effectLst/>
+          <a:sp3d/>
+        </p:spPr>
+        <p:style>
+          <a:lnRef idx="0">
+            <a:scrgbClr r="0" g="0" b="0"/>
+          </a:lnRef>
+          <a:fillRef idx="0">
+            <a:scrgbClr r="0" g="0" b="0"/>
+          </a:fillRef>
+          <a:effectRef idx="0">
+            <a:scrgbClr r="0" g="0" b="0"/>
+          </a:effectRef>
+          <a:fontRef idx="none"/>
+        </p:style>
+        <p:txBody>
+          <a:bodyPr rot="0" spcFirstLastPara="1" vertOverflow="overflow" horzOverflow="overflow" vert="horz" wrap="square" lIns="54570" tIns="54570" rIns="54570" bIns="54570" numCol="1" spcCol="38100" rtlCol="0" anchor="ctr">
+            <a:spAutoFit/>
+          </a:bodyPr>
+          <a:lstStyle/>
+          <a:p>
+            <a:pPr marL="0" marR="0" indent="0" algn="l" defTabSz="584200" rtl="0" fontAlgn="auto" latinLnBrk="0" hangingPunct="0">
+              <a:lnSpc>
+                <a:spcPct val="80000"/>
+              </a:lnSpc>
+              <a:spcBef>
+                <a:spcPts val="0"/>
+              </a:spcBef>
+              <a:spcAft>
+                <a:spcPts val="0"/>
+              </a:spcAft>
+              <a:buClrTx/>
+              <a:buSzTx/>
+              <a:buFontTx/>
+              <a:buNone/>
+              <a:tabLst/>
+            </a:pPr>
+            <a:endParaRPr kumimoji="0" lang="en-GB" sz="1200" b="0" i="0" u="none" strike="noStrike" cap="none" spc="0" normalizeH="0" baseline="0">
+              <a:ln>
+                <a:noFill/>
+              </a:ln>
+              <a:solidFill>
+                <a:srgbClr val="000000"/>
+              </a:solidFill>
+              <a:effectLst/>
+              <a:uFillTx/>
+              <a:latin typeface="Source Sans Pro"/>
+              <a:ea typeface="Source Sans Pro"/>
+              <a:cs typeface="Source Sans Pro"/>
+              <a:sym typeface="Source Sans Pro"/>
+            </a:endParaRPr>
+          </a:p>
+        </p:txBody>
+      </p:sp>
+      <p:sp>
+        <p:nvSpPr>
+          <p:cNvPr id="507" name="Oval 506">
+            <a:extLst>
+              <a:ext uri="{FF2B5EF4-FFF2-40B4-BE49-F238E27FC236}">
+                <a16:creationId xmlns:a16="http://schemas.microsoft.com/office/drawing/2014/main" id="{9F6BAD43-FB12-142C-8D97-1976E2A49C50}"/>
+              </a:ext>
+            </a:extLst>
+          </p:cNvPr>
+          <p:cNvSpPr>
+            <a:spLocks noChangeAspect="1"/>
+          </p:cNvSpPr>
+          <p:nvPr/>
+        </p:nvSpPr>
+        <p:spPr>
+          <a:xfrm>
+            <a:off x="5073113" y="4250508"/>
+            <a:ext cx="36000" cy="36000"/>
+          </a:xfrm>
+          <a:prstGeom prst="ellipse">
+            <a:avLst/>
+          </a:prstGeom>
+          <a:blipFill rotWithShape="1">
+            <a:blip r:embed="rId8"/>
+            <a:srcRect/>
+            <a:tile tx="0" ty="0" sx="100000" sy="100000" flip="none" algn="tl"/>
+          </a:blipFill>
+          <a:ln w="12700" cap="flat">
+            <a:noFill/>
+            <a:miter lim="400000"/>
+          </a:ln>
+          <a:effectLst/>
+          <a:sp3d/>
+        </p:spPr>
+        <p:style>
+          <a:lnRef idx="0">
+            <a:scrgbClr r="0" g="0" b="0"/>
+          </a:lnRef>
+          <a:fillRef idx="0">
+            <a:scrgbClr r="0" g="0" b="0"/>
+          </a:fillRef>
+          <a:effectRef idx="0">
+            <a:scrgbClr r="0" g="0" b="0"/>
+          </a:effectRef>
+          <a:fontRef idx="none"/>
+        </p:style>
+        <p:txBody>
+          <a:bodyPr rot="0" spcFirstLastPara="1" vertOverflow="overflow" horzOverflow="overflow" vert="horz" wrap="square" lIns="54570" tIns="54570" rIns="54570" bIns="54570" numCol="1" spcCol="38100" rtlCol="0" anchor="ctr">
+            <a:spAutoFit/>
+          </a:bodyPr>
+          <a:lstStyle/>
+          <a:p>
+            <a:pPr marL="0" marR="0" indent="0" algn="l" defTabSz="584200" rtl="0" fontAlgn="auto" latinLnBrk="0" hangingPunct="0">
+              <a:lnSpc>
+                <a:spcPct val="80000"/>
+              </a:lnSpc>
+              <a:spcBef>
+                <a:spcPts val="0"/>
+              </a:spcBef>
+              <a:spcAft>
+                <a:spcPts val="0"/>
+              </a:spcAft>
+              <a:buClrTx/>
+              <a:buSzTx/>
+              <a:buFontTx/>
+              <a:buNone/>
+              <a:tabLst/>
+            </a:pPr>
+            <a:endParaRPr kumimoji="0" lang="en-GB" sz="1200" b="0" i="0" u="none" strike="noStrike" cap="none" spc="0" normalizeH="0" baseline="0">
+              <a:ln>
+                <a:noFill/>
+              </a:ln>
+              <a:solidFill>
+                <a:srgbClr val="000000"/>
+              </a:solidFill>
+              <a:effectLst/>
+              <a:uFillTx/>
+              <a:latin typeface="Source Sans Pro"/>
+              <a:ea typeface="Source Sans Pro"/>
+              <a:cs typeface="Source Sans Pro"/>
+              <a:sym typeface="Source Sans Pro"/>
+            </a:endParaRPr>
+          </a:p>
+        </p:txBody>
+      </p:sp>
+      <p:sp>
+        <p:nvSpPr>
+          <p:cNvPr id="508" name="TextBox 507">
+            <a:extLst>
+              <a:ext uri="{FF2B5EF4-FFF2-40B4-BE49-F238E27FC236}">
+                <a16:creationId xmlns:a16="http://schemas.microsoft.com/office/drawing/2014/main" id="{E09171A3-3527-36A5-6157-F06E9C778FDC}"/>
+              </a:ext>
+            </a:extLst>
+          </p:cNvPr>
+          <p:cNvSpPr txBox="1"/>
+          <p:nvPr/>
+        </p:nvSpPr>
+        <p:spPr>
+          <a:xfrm>
+            <a:off x="5461126" y="4146962"/>
+            <a:ext cx="3076594" cy="697627"/>
+          </a:xfrm>
+          <a:prstGeom prst="rect">
+            <a:avLst/>
+          </a:prstGeom>
+          <a:noFill/>
+          <a:ln w="12700" cap="flat">
+            <a:noFill/>
+            <a:miter lim="400000"/>
+          </a:ln>
+          <a:effectLst/>
+          <a:sp3d/>
+        </p:spPr>
+        <p:style>
+          <a:lnRef idx="0">
+            <a:scrgbClr r="0" g="0" b="0"/>
+          </a:lnRef>
+          <a:fillRef idx="0">
+            <a:scrgbClr r="0" g="0" b="0"/>
+          </a:fillRef>
+          <a:effectRef idx="0">
+            <a:scrgbClr r="0" g="0" b="0"/>
+          </a:effectRef>
+          <a:fontRef idx="none"/>
+        </p:style>
+        <p:txBody>
+          <a:bodyPr wrap="square">
+            <a:spAutoFit/>
+          </a:bodyPr>
+          <a:lstStyle/>
+          <a:p>
+            <a:r>
+              <a:rPr lang="en-GB" dirty="0"/>
+              <a:t>Scatter chart </a:t>
+            </a:r>
+          </a:p>
+          <a:p>
+            <a:r>
+              <a:rPr lang="en-GB" b="0" dirty="0"/>
+              <a:t>plot + </a:t>
+            </a:r>
+            <a:r>
+              <a:rPr lang="en-GB" dirty="0" err="1"/>
+              <a:t>geom_point</a:t>
+            </a:r>
+            <a:r>
+              <a:rPr lang="en-GB" b="0" dirty="0"/>
+              <a:t>(shape=16)</a:t>
+            </a:r>
+          </a:p>
+          <a:p>
+            <a:endParaRPr lang="en-GB" b="0" dirty="0"/>
+          </a:p>
+        </p:txBody>
+      </p:sp>
+      <p:sp>
+        <p:nvSpPr>
+          <p:cNvPr id="1025" name="TextBox 1024">
+            <a:extLst>
+              <a:ext uri="{FF2B5EF4-FFF2-40B4-BE49-F238E27FC236}">
+                <a16:creationId xmlns:a16="http://schemas.microsoft.com/office/drawing/2014/main" id="{B213FD77-C22B-AB3C-962F-74A7DBDF7F8E}"/>
+              </a:ext>
+            </a:extLst>
+          </p:cNvPr>
+          <p:cNvSpPr txBox="1"/>
+          <p:nvPr/>
+        </p:nvSpPr>
+        <p:spPr>
+          <a:xfrm>
+            <a:off x="4722306" y="1893606"/>
+            <a:ext cx="8205786" cy="276999"/>
+          </a:xfrm>
+          <a:prstGeom prst="rect">
+            <a:avLst/>
+          </a:prstGeom>
+          <a:noFill/>
+          <a:ln w="12700" cap="flat">
+            <a:noFill/>
+            <a:miter lim="400000"/>
+          </a:ln>
+          <a:effectLst/>
+          <a:sp3d/>
+        </p:spPr>
+        <p:style>
+          <a:lnRef idx="0">
+            <a:scrgbClr r="0" g="0" b="0"/>
+          </a:lnRef>
+          <a:fillRef idx="0">
+            <a:scrgbClr r="0" g="0" b="0"/>
+          </a:fillRef>
+          <a:effectRef idx="0">
+            <a:scrgbClr r="0" g="0" b="0"/>
+          </a:effectRef>
+          <a:fontRef idx="none"/>
+        </p:style>
+        <p:txBody>
+          <a:bodyPr wrap="square">
+            <a:spAutoFit/>
+          </a:bodyPr>
+          <a:lstStyle/>
+          <a:p>
+            <a:r>
+              <a:rPr lang="en-GB" dirty="0"/>
+              <a:t>Two variables</a:t>
+            </a:r>
+          </a:p>
+        </p:txBody>
+      </p:sp>
+      <p:sp>
+        <p:nvSpPr>
+          <p:cNvPr id="1026" name="TextBox 1025">
+            <a:extLst>
+              <a:ext uri="{FF2B5EF4-FFF2-40B4-BE49-F238E27FC236}">
+                <a16:creationId xmlns:a16="http://schemas.microsoft.com/office/drawing/2014/main" id="{F52086BB-553F-06FA-D701-DE30F9BF81B9}"/>
+              </a:ext>
+            </a:extLst>
+          </p:cNvPr>
+          <p:cNvSpPr txBox="1"/>
+          <p:nvPr/>
+        </p:nvSpPr>
+        <p:spPr>
+          <a:xfrm>
+            <a:off x="4787900" y="5312195"/>
+            <a:ext cx="8205786" cy="276999"/>
+          </a:xfrm>
+          <a:prstGeom prst="rect">
+            <a:avLst/>
+          </a:prstGeom>
+          <a:noFill/>
+          <a:ln w="12700" cap="flat">
+            <a:noFill/>
+            <a:miter lim="400000"/>
+          </a:ln>
+          <a:effectLst/>
+          <a:sp3d/>
+        </p:spPr>
+        <p:style>
+          <a:lnRef idx="0">
+            <a:scrgbClr r="0" g="0" b="0"/>
+          </a:lnRef>
+          <a:fillRef idx="0">
+            <a:scrgbClr r="0" g="0" b="0"/>
+          </a:fillRef>
+          <a:effectRef idx="0">
+            <a:scrgbClr r="0" g="0" b="0"/>
+          </a:effectRef>
+          <a:fontRef idx="none"/>
+        </p:style>
+        <p:txBody>
+          <a:bodyPr wrap="square">
+            <a:spAutoFit/>
+          </a:bodyPr>
+          <a:lstStyle/>
+          <a:p>
+            <a:r>
+              <a:rPr lang="en-GB" dirty="0"/>
+              <a:t>1 discrete variable</a:t>
+            </a:r>
+          </a:p>
+        </p:txBody>
+      </p:sp>
+      <p:grpSp>
+        <p:nvGrpSpPr>
+          <p:cNvPr id="1029" name="Group">
+            <a:extLst>
+              <a:ext uri="{FF2B5EF4-FFF2-40B4-BE49-F238E27FC236}">
+                <a16:creationId xmlns:a16="http://schemas.microsoft.com/office/drawing/2014/main" id="{33B6B141-1090-34AC-3714-918838618358}"/>
+              </a:ext>
+            </a:extLst>
+          </p:cNvPr>
+          <p:cNvGrpSpPr/>
+          <p:nvPr/>
+        </p:nvGrpSpPr>
+        <p:grpSpPr>
+          <a:xfrm>
+            <a:off x="7409803" y="9631517"/>
+            <a:ext cx="448425" cy="448545"/>
+            <a:chOff x="0" y="0"/>
+            <a:chExt cx="448424" cy="448544"/>
+          </a:xfrm>
+        </p:grpSpPr>
+        <p:pic>
+          <p:nvPicPr>
+            <p:cNvPr id="1030" name="Image" descr="Image">
+              <a:extLst>
+                <a:ext uri="{FF2B5EF4-FFF2-40B4-BE49-F238E27FC236}">
+                  <a16:creationId xmlns:a16="http://schemas.microsoft.com/office/drawing/2014/main" id="{10876205-C7A0-1B82-1F72-FDBA2EE9C655}"/>
+                </a:ext>
+              </a:extLst>
+            </p:cNvPr>
+            <p:cNvPicPr>
+              <a:picLocks noChangeAspect="1"/>
+            </p:cNvPicPr>
+            <p:nvPr/>
+          </p:nvPicPr>
+          <p:blipFill>
+            <a:blip r:embed="rId6"/>
+            <a:stretch>
+              <a:fillRect/>
+            </a:stretch>
+          </p:blipFill>
+          <p:spPr>
+            <a:xfrm>
+              <a:off x="0" y="0"/>
+              <a:ext cx="448425" cy="448544"/>
+            </a:xfrm>
+            <a:prstGeom prst="rect">
+              <a:avLst/>
+            </a:prstGeom>
+            <a:ln w="12700" cap="flat">
+              <a:noFill/>
+              <a:miter lim="400000"/>
+            </a:ln>
+            <a:effectLst/>
+          </p:spPr>
+        </p:pic>
+        <p:sp>
+          <p:nvSpPr>
+            <p:cNvPr id="1031" name="Rectangle">
+              <a:extLst>
+                <a:ext uri="{FF2B5EF4-FFF2-40B4-BE49-F238E27FC236}">
+                  <a16:creationId xmlns:a16="http://schemas.microsoft.com/office/drawing/2014/main" id="{D219BE38-2A4D-AAB4-34C5-2C08A10B663B}"/>
+                </a:ext>
+              </a:extLst>
+            </p:cNvPr>
+            <p:cNvSpPr/>
+            <p:nvPr/>
+          </p:nvSpPr>
+          <p:spPr>
+            <a:xfrm>
+              <a:off x="10653" y="391393"/>
+              <a:ext cx="76201" cy="57151"/>
+            </a:xfrm>
+            <a:prstGeom prst="rect">
+              <a:avLst/>
+            </a:prstGeom>
+            <a:solidFill>
+              <a:srgbClr val="659FD5"/>
+            </a:solidFill>
+            <a:ln w="12700" cap="flat">
+              <a:noFill/>
+              <a:miter lim="400000"/>
+            </a:ln>
+            <a:effectLst/>
+          </p:spPr>
+          <p:txBody>
+            <a:bodyPr wrap="square" lIns="54570" tIns="54570" rIns="54570" bIns="54570" numCol="1" anchor="ctr">
+              <a:noAutofit/>
+            </a:bodyPr>
+            <a:lstStyle/>
+            <a:p>
+              <a:pPr>
+                <a:lnSpc>
+                  <a:spcPct val="80000"/>
+                </a:lnSpc>
+                <a:spcBef>
+                  <a:spcPts val="0"/>
+                </a:spcBef>
+                <a:defRPr b="0">
+                  <a:solidFill>
+                    <a:srgbClr val="000000"/>
+                  </a:solidFill>
+                </a:defRPr>
+              </a:pPr>
+              <a:endParaRPr/>
+            </a:p>
+          </p:txBody>
+        </p:sp>
+        <p:sp>
+          <p:nvSpPr>
+            <p:cNvPr id="1032" name="Rectangle">
+              <a:extLst>
+                <a:ext uri="{FF2B5EF4-FFF2-40B4-BE49-F238E27FC236}">
+                  <a16:creationId xmlns:a16="http://schemas.microsoft.com/office/drawing/2014/main" id="{CBE1F0C8-3A03-14EC-A3AE-B84163EE5EAF}"/>
+                </a:ext>
+              </a:extLst>
+            </p:cNvPr>
+            <p:cNvSpPr/>
+            <p:nvPr/>
+          </p:nvSpPr>
+          <p:spPr>
+            <a:xfrm>
+              <a:off x="123301" y="349982"/>
+              <a:ext cx="76201" cy="98562"/>
+            </a:xfrm>
+            <a:prstGeom prst="rect">
+              <a:avLst/>
+            </a:prstGeom>
+            <a:solidFill>
+              <a:srgbClr val="659FD5"/>
+            </a:solidFill>
+            <a:ln w="12700" cap="flat">
+              <a:noFill/>
+              <a:miter lim="400000"/>
+            </a:ln>
+            <a:effectLst/>
+          </p:spPr>
+          <p:txBody>
+            <a:bodyPr wrap="square" lIns="54570" tIns="54570" rIns="54570" bIns="54570" numCol="1" anchor="ctr">
+              <a:noAutofit/>
+            </a:bodyPr>
+            <a:lstStyle/>
+            <a:p>
+              <a:pPr>
+                <a:lnSpc>
+                  <a:spcPct val="80000"/>
+                </a:lnSpc>
+                <a:spcBef>
+                  <a:spcPts val="0"/>
+                </a:spcBef>
+                <a:defRPr b="0">
+                  <a:solidFill>
+                    <a:srgbClr val="000000"/>
+                  </a:solidFill>
+                </a:defRPr>
+              </a:pPr>
+              <a:endParaRPr/>
+            </a:p>
+          </p:txBody>
+        </p:sp>
+        <p:sp>
+          <p:nvSpPr>
+            <p:cNvPr id="1033" name="Rectangle">
+              <a:extLst>
+                <a:ext uri="{FF2B5EF4-FFF2-40B4-BE49-F238E27FC236}">
+                  <a16:creationId xmlns:a16="http://schemas.microsoft.com/office/drawing/2014/main" id="{8032B036-54E3-25CD-F995-AFB7EE15DA77}"/>
+                </a:ext>
+              </a:extLst>
+            </p:cNvPr>
+            <p:cNvSpPr/>
+            <p:nvPr/>
+          </p:nvSpPr>
+          <p:spPr>
+            <a:xfrm>
+              <a:off x="235948" y="266307"/>
+              <a:ext cx="76201" cy="182238"/>
+            </a:xfrm>
+            <a:prstGeom prst="rect">
+              <a:avLst/>
+            </a:prstGeom>
+            <a:solidFill>
+              <a:srgbClr val="659FD5"/>
+            </a:solidFill>
+            <a:ln w="12700" cap="flat">
+              <a:noFill/>
+              <a:miter lim="400000"/>
+            </a:ln>
+            <a:effectLst/>
+          </p:spPr>
+          <p:txBody>
+            <a:bodyPr wrap="square" lIns="54570" tIns="54570" rIns="54570" bIns="54570" numCol="1" anchor="ctr">
+              <a:noAutofit/>
+            </a:bodyPr>
+            <a:lstStyle/>
+            <a:p>
+              <a:pPr>
+                <a:lnSpc>
+                  <a:spcPct val="80000"/>
+                </a:lnSpc>
+                <a:spcBef>
+                  <a:spcPts val="0"/>
+                </a:spcBef>
+                <a:defRPr b="0">
+                  <a:solidFill>
+                    <a:srgbClr val="000000"/>
+                  </a:solidFill>
+                </a:defRPr>
+              </a:pPr>
+              <a:endParaRPr/>
+            </a:p>
+          </p:txBody>
+        </p:sp>
+        <p:sp>
+          <p:nvSpPr>
+            <p:cNvPr id="1034" name="Rectangle">
+              <a:extLst>
+                <a:ext uri="{FF2B5EF4-FFF2-40B4-BE49-F238E27FC236}">
+                  <a16:creationId xmlns:a16="http://schemas.microsoft.com/office/drawing/2014/main" id="{5E09F9D2-4041-FE83-ED83-061E37EB6B70}"/>
+                </a:ext>
+              </a:extLst>
+            </p:cNvPr>
+            <p:cNvSpPr/>
+            <p:nvPr/>
+          </p:nvSpPr>
+          <p:spPr>
+            <a:xfrm>
+              <a:off x="348596" y="122911"/>
+              <a:ext cx="76201" cy="325633"/>
+            </a:xfrm>
+            <a:prstGeom prst="rect">
+              <a:avLst/>
+            </a:prstGeom>
+            <a:solidFill>
+              <a:srgbClr val="659FD5"/>
+            </a:solidFill>
+            <a:ln w="12700" cap="flat">
+              <a:noFill/>
+              <a:miter lim="400000"/>
+            </a:ln>
+            <a:effectLst/>
+          </p:spPr>
+          <p:txBody>
+            <a:bodyPr wrap="square" lIns="54570" tIns="54570" rIns="54570" bIns="54570" numCol="1" anchor="ctr">
+              <a:noAutofit/>
+            </a:bodyPr>
+            <a:lstStyle/>
+            <a:p>
+              <a:pPr>
+                <a:lnSpc>
+                  <a:spcPct val="80000"/>
+                </a:lnSpc>
+                <a:spcBef>
+                  <a:spcPts val="0"/>
+                </a:spcBef>
+                <a:defRPr b="0">
+                  <a:solidFill>
+                    <a:srgbClr val="000000"/>
+                  </a:solidFill>
+                </a:defRPr>
+              </a:pPr>
+              <a:endParaRPr/>
+            </a:p>
+          </p:txBody>
+        </p:sp>
+      </p:grpSp>
+      <p:sp>
+        <p:nvSpPr>
+          <p:cNvPr id="1036" name="TextBox 1035">
+            <a:extLst>
+              <a:ext uri="{FF2B5EF4-FFF2-40B4-BE49-F238E27FC236}">
+                <a16:creationId xmlns:a16="http://schemas.microsoft.com/office/drawing/2014/main" id="{6EE0471A-727E-6021-9850-90EAE09A705B}"/>
+              </a:ext>
+            </a:extLst>
+          </p:cNvPr>
+          <p:cNvSpPr txBox="1"/>
+          <p:nvPr/>
+        </p:nvSpPr>
+        <p:spPr>
+          <a:xfrm>
+            <a:off x="7281807" y="9950272"/>
+            <a:ext cx="138650" cy="258964"/>
+          </a:xfrm>
+          <a:prstGeom prst="rect">
+            <a:avLst/>
+          </a:prstGeom>
+          <a:noFill/>
+          <a:ln w="12700" cap="flat">
+            <a:noFill/>
+            <a:miter lim="400000"/>
+          </a:ln>
+          <a:effectLst/>
+          <a:sp3d/>
+        </p:spPr>
+        <p:style>
+          <a:lnRef idx="0">
+            <a:scrgbClr r="0" g="0" b="0"/>
+          </a:lnRef>
+          <a:fillRef idx="0">
+            <a:scrgbClr r="0" g="0" b="0"/>
+          </a:fillRef>
+          <a:effectRef idx="0">
+            <a:scrgbClr r="0" g="0" b="0"/>
+          </a:effectRef>
+          <a:fontRef idx="none"/>
+        </p:style>
+        <p:txBody>
+          <a:bodyPr rot="0" spcFirstLastPara="1" vertOverflow="overflow" horzOverflow="overflow" vert="horz" wrap="square" lIns="54570" tIns="54570" rIns="54570" bIns="54570" numCol="1" spcCol="38100" rtlCol="0" anchor="ctr">
+            <a:spAutoFit/>
+          </a:bodyPr>
+          <a:lstStyle/>
+          <a:p>
+            <a:pPr marL="0" marR="0" indent="0" algn="l" defTabSz="584200" rtl="0" fontAlgn="auto" latinLnBrk="0" hangingPunct="0">
+              <a:lnSpc>
+                <a:spcPct val="100000"/>
+              </a:lnSpc>
+              <a:spcBef>
+                <a:spcPts val="200"/>
+              </a:spcBef>
+              <a:spcAft>
+                <a:spcPts val="0"/>
+              </a:spcAft>
+              <a:buClrTx/>
+              <a:buSzTx/>
+              <a:buFontTx/>
+              <a:buNone/>
+              <a:tabLst/>
+            </a:pPr>
+            <a:r>
+              <a:rPr kumimoji="0" lang="en-GB" sz="800" b="1" i="0" u="none" strike="noStrike" cap="none" spc="0" normalizeH="0" baseline="0" dirty="0">
+                <a:ln>
+                  <a:noFill/>
+                </a:ln>
+                <a:solidFill>
+                  <a:srgbClr val="4C4C4C"/>
+                </a:solidFill>
+                <a:effectLst/>
+                <a:uFillTx/>
+                <a:latin typeface="Source Sans Pro"/>
+                <a:ea typeface="Source Sans Pro"/>
+                <a:cs typeface="Source Sans Pro"/>
+                <a:sym typeface="Source Sans Pro"/>
+              </a:rPr>
+              <a:t>0                    </a:t>
+            </a:r>
+          </a:p>
+        </p:txBody>
+      </p:sp>
+      <p:sp>
+        <p:nvSpPr>
+          <p:cNvPr id="1038" name="TextBox 1037">
+            <a:extLst>
+              <a:ext uri="{FF2B5EF4-FFF2-40B4-BE49-F238E27FC236}">
+                <a16:creationId xmlns:a16="http://schemas.microsoft.com/office/drawing/2014/main" id="{10639C4E-3FA9-3AB5-F3EA-F4BBE663DDF3}"/>
+              </a:ext>
+            </a:extLst>
+          </p:cNvPr>
+          <p:cNvSpPr txBox="1"/>
+          <p:nvPr/>
+        </p:nvSpPr>
+        <p:spPr>
+          <a:xfrm>
+            <a:off x="7217686" y="9509250"/>
+            <a:ext cx="232598" cy="258964"/>
+          </a:xfrm>
+          <a:prstGeom prst="rect">
+            <a:avLst/>
+          </a:prstGeom>
+          <a:noFill/>
+          <a:ln w="12700" cap="flat">
+            <a:noFill/>
+            <a:miter lim="400000"/>
+          </a:ln>
+          <a:effectLst/>
+          <a:sp3d/>
+        </p:spPr>
+        <p:style>
+          <a:lnRef idx="0">
+            <a:scrgbClr r="0" g="0" b="0"/>
+          </a:lnRef>
+          <a:fillRef idx="0">
+            <a:scrgbClr r="0" g="0" b="0"/>
+          </a:fillRef>
+          <a:effectRef idx="0">
+            <a:scrgbClr r="0" g="0" b="0"/>
+          </a:effectRef>
+          <a:fontRef idx="none"/>
+        </p:style>
+        <p:txBody>
+          <a:bodyPr rot="0" spcFirstLastPara="1" vertOverflow="overflow" horzOverflow="overflow" vert="horz" wrap="square" lIns="54570" tIns="54570" rIns="54570" bIns="54570" numCol="1" spcCol="38100" rtlCol="0" anchor="ctr">
+            <a:spAutoFit/>
+          </a:bodyPr>
+          <a:lstStyle/>
+          <a:p>
+            <a:pPr marL="0" marR="0" indent="0" algn="l" defTabSz="584200" rtl="0" fontAlgn="auto" latinLnBrk="0" hangingPunct="0">
+              <a:lnSpc>
+                <a:spcPct val="100000"/>
+              </a:lnSpc>
+              <a:spcBef>
+                <a:spcPts val="200"/>
+              </a:spcBef>
+              <a:spcAft>
+                <a:spcPts val="0"/>
+              </a:spcAft>
+              <a:buClrTx/>
+              <a:buSzTx/>
+              <a:buFontTx/>
+              <a:buNone/>
+              <a:tabLst/>
+            </a:pPr>
+            <a:r>
+              <a:rPr lang="en-GB" sz="800" dirty="0"/>
+              <a:t>10</a:t>
+            </a:r>
+            <a:r>
+              <a:rPr kumimoji="0" lang="en-GB" sz="800" b="1" i="0" u="none" strike="noStrike" cap="none" spc="0" normalizeH="0" baseline="0" dirty="0">
+                <a:ln>
+                  <a:noFill/>
+                </a:ln>
+                <a:solidFill>
+                  <a:srgbClr val="4C4C4C"/>
+                </a:solidFill>
+                <a:effectLst/>
+                <a:uFillTx/>
+                <a:latin typeface="Source Sans Pro"/>
+                <a:ea typeface="Source Sans Pro"/>
+                <a:cs typeface="Source Sans Pro"/>
+                <a:sym typeface="Source Sans Pro"/>
+              </a:rPr>
+              <a:t>                    </a:t>
+            </a:r>
+          </a:p>
+        </p:txBody>
+      </p:sp>
+      <p:sp>
+        <p:nvSpPr>
+          <p:cNvPr id="1040" name="ggplot(mpg, aes(hwy, cty)) +…">
+            <a:extLst>
+              <a:ext uri="{FF2B5EF4-FFF2-40B4-BE49-F238E27FC236}">
+                <a16:creationId xmlns:a16="http://schemas.microsoft.com/office/drawing/2014/main" id="{E610D9B9-2AC0-77B3-DB93-9174C2683952}"/>
+              </a:ext>
+            </a:extLst>
+          </p:cNvPr>
+          <p:cNvSpPr txBox="1"/>
+          <p:nvPr/>
+        </p:nvSpPr>
+        <p:spPr>
+          <a:xfrm>
+            <a:off x="6935285" y="10217573"/>
+            <a:ext cx="1699128" cy="479538"/>
+          </a:xfrm>
+          <a:prstGeom prst="rect">
+            <a:avLst/>
+          </a:prstGeom>
+          <a:solidFill>
+            <a:srgbClr val="FFFFFF"/>
+          </a:solidFill>
+          <a:ln w="12700">
+            <a:solidFill>
+              <a:srgbClr val="A6AAA9"/>
+            </a:solidFill>
+            <a:miter lim="400000"/>
+          </a:ln>
+          <a:extLst>
+            <a:ext uri="{C572A759-6A51-4108-AA02-DFA0A04FC94B}">
+              <ma14:wrappingTextBoxFlag xmlns="" xmlns:m="http://schemas.openxmlformats.org/officeDocument/2006/math" xmlns:a14="http://schemas.microsoft.com/office/drawing/2010/main" xmlns:ma14="http://schemas.microsoft.com/office/mac/drawingml/2011/main" val="1"/>
+            </a:ext>
+          </a:extLst>
+        </p:spPr>
+        <p:txBody>
+          <a:bodyPr wrap="square" lIns="54570" tIns="54570" rIns="54570" bIns="54570" anchor="ctr">
+            <a:spAutoFit/>
+          </a:bodyPr>
+          <a:lstStyle/>
+          <a:p>
+            <a:pPr>
+              <a:spcBef>
+                <a:spcPts val="0"/>
+              </a:spcBef>
+              <a:defRPr b="0">
+                <a:solidFill>
+                  <a:srgbClr val="000000"/>
+                </a:solidFill>
+                <a:latin typeface="Menlo"/>
+                <a:ea typeface="Menlo"/>
+                <a:cs typeface="Menlo"/>
+                <a:sym typeface="Menlo"/>
+              </a:defRPr>
+            </a:pPr>
+            <a:r>
+              <a:rPr lang="en-GB" sz="800" dirty="0" err="1"/>
+              <a:t>scale_y_continuous</a:t>
+            </a:r>
+            <a:r>
+              <a:rPr lang="en-GB" sz="800" dirty="0"/>
+              <a:t>(expand=c(0,0))</a:t>
+            </a:r>
+          </a:p>
+          <a:p>
+            <a:pPr>
+              <a:spcBef>
+                <a:spcPts val="0"/>
+              </a:spcBef>
+              <a:defRPr b="0">
+                <a:solidFill>
+                  <a:srgbClr val="000000"/>
+                </a:solidFill>
+                <a:latin typeface="Menlo"/>
+                <a:ea typeface="Menlo"/>
+                <a:cs typeface="Menlo"/>
+                <a:sym typeface="Menlo"/>
+              </a:defRPr>
+            </a:pPr>
+            <a:endParaRPr lang="en-GB" sz="800" dirty="0"/>
+          </a:p>
+          <a:p>
+            <a:pPr>
+              <a:spcBef>
+                <a:spcPts val="0"/>
+              </a:spcBef>
+              <a:defRPr b="0">
+                <a:solidFill>
+                  <a:srgbClr val="000000"/>
+                </a:solidFill>
+                <a:latin typeface="Menlo"/>
+                <a:ea typeface="Menlo"/>
+                <a:cs typeface="Menlo"/>
+                <a:sym typeface="Menlo"/>
+              </a:defRPr>
+            </a:pPr>
+            <a:r>
+              <a:rPr lang="en-GB" sz="800" dirty="0"/>
+              <a:t>Turns of axis expansion for y axis</a:t>
+            </a:r>
+            <a:endParaRPr sz="800" dirty="0"/>
+          </a:p>
+        </p:txBody>
+      </p:sp>
+      <p:sp>
+        <p:nvSpPr>
+          <p:cNvPr id="1042" name="TextBox 1041">
+            <a:extLst>
+              <a:ext uri="{FF2B5EF4-FFF2-40B4-BE49-F238E27FC236}">
+                <a16:creationId xmlns:a16="http://schemas.microsoft.com/office/drawing/2014/main" id="{B49B0BCD-CA83-4111-EF31-5E7C5D1CA18E}"/>
+              </a:ext>
+            </a:extLst>
+          </p:cNvPr>
+          <p:cNvSpPr txBox="1"/>
+          <p:nvPr/>
+        </p:nvSpPr>
+        <p:spPr>
+          <a:xfrm>
+            <a:off x="9205103" y="5936561"/>
+            <a:ext cx="4469615" cy="366126"/>
+          </a:xfrm>
+          <a:prstGeom prst="rect">
+            <a:avLst/>
+          </a:prstGeom>
+          <a:noFill/>
+          <a:ln w="12700" cap="flat">
+            <a:noFill/>
+            <a:miter lim="400000"/>
+          </a:ln>
+          <a:effectLst/>
+          <a:sp3d/>
+        </p:spPr>
+        <p:style>
+          <a:lnRef idx="0">
+            <a:scrgbClr r="0" g="0" b="0"/>
+          </a:lnRef>
+          <a:fillRef idx="0">
+            <a:scrgbClr r="0" g="0" b="0"/>
+          </a:fillRef>
+          <a:effectRef idx="0">
+            <a:scrgbClr r="0" g="0" b="0"/>
+          </a:effectRef>
+          <a:fontRef idx="none"/>
+        </p:style>
+        <p:txBody>
+          <a:bodyPr wrap="square">
+            <a:spAutoFit/>
+          </a:bodyPr>
+          <a:lstStyle/>
+          <a:p>
+            <a:pPr>
+              <a:lnSpc>
+                <a:spcPct val="80000"/>
+              </a:lnSpc>
+              <a:spcBef>
+                <a:spcPts val="600"/>
+              </a:spcBef>
+              <a:defRPr b="0">
+                <a:solidFill>
+                  <a:srgbClr val="000000"/>
+                </a:solidFill>
+              </a:defRPr>
+            </a:pPr>
+            <a:r>
+              <a:rPr lang="en-GB" sz="1100" b="0" dirty="0"/>
+              <a:t>Scales map data values to the visual values of an aesthetic. This can be mapping ‘</a:t>
+            </a:r>
+            <a:r>
+              <a:rPr lang="en-GB" sz="1100" b="0" dirty="0" err="1"/>
+              <a:t>color</a:t>
+            </a:r>
+            <a:r>
+              <a:rPr lang="en-GB" sz="1100" b="0" dirty="0"/>
+              <a:t>’ or ‘fill’ to one of the available palettes</a:t>
+            </a:r>
+            <a:endParaRPr lang="en-GB" sz="1100" dirty="0"/>
           </a:p>
         </p:txBody>
       </p:sp>
